--- a/m9/diapositivos/sessao-06-m9-f05.pptx
+++ b/m9/diapositivos/sessao-06-m9-f05.pptx
@@ -15,9 +15,11 @@
     <p:sldId id="263" r:id="rId9"/>
     <p:sldId id="264" r:id="rId10"/>
     <p:sldId id="265" r:id="rId11"/>
+    <p:sldId id="266" r:id="rId12"/>
+    <p:sldId id="267" r:id="rId13"/>
   </p:sldIdLst>
   <p:notesMasterIdLst>
-    <p:notesMasterId r:id="rId12"/>
+    <p:notesMasterId r:id="rId14"/>
   </p:notesMasterIdLst>
   <p:sldSz cx="12192000" cy="6858000"/>
   <p:notesSz cx="6858000" cy="12192000"/>
@@ -1452,6 +1454,1342 @@
             <a:off x="822960" y="502920"/>
             <a:ext cx="201168" cy="201168"/>
           </a:xfrm>
+          <a:prstGeom prst="rect">
+            <a:avLst/>
+          </a:prstGeom>
+          <a:ln w="19050">
+            <a:solidFill>
+              <a:srgbClr val="F2F0EA"/>
+            </a:solidFill>
+            <a:prstDash val="solid"/>
+          </a:ln>
+        </p:spPr>
+      </p:sp>
+      <p:sp>
+        <p:nvSpPr>
+          <p:cNvPr id="7" name="Text 4"/>
+          <p:cNvSpPr/>
+          <p:nvPr/>
+        </p:nvSpPr>
+        <p:spPr>
+          <a:xfrm>
+            <a:off x="1188720" y="457200"/>
+            <a:ext cx="9448495" cy="292608"/>
+          </a:xfrm>
+          <a:prstGeom prst="rect">
+            <a:avLst/>
+          </a:prstGeom>
+          <a:noFill/>
+          <a:ln/>
+        </p:spPr>
+        <p:txBody>
+          <a:bodyPr wrap="square" lIns="0" tIns="0" rIns="0" bIns="0" rtlCol="0" anchor="ctr"/>
+          <a:lstStyle/>
+          <a:p>
+            <a:pPr indent="0" marL="0">
+              <a:buNone/>
+            </a:pPr>
+            <a:r>
+              <a:rPr lang="en-US" sz="1100" b="1" spc="250" kern="0" dirty="0">
+                <a:solidFill>
+                  <a:srgbClr val="A9A79F"/>
+                </a:solidFill>
+                <a:latin typeface="Arial" pitchFamily="34" charset="0"/>
+                <a:ea typeface="Arial" pitchFamily="34" charset="-122"/>
+                <a:cs typeface="Arial" pitchFamily="34" charset="-120"/>
+              </a:rPr>
+              <a:t>PAUSA: CARTÕES NO TELEMÓVEL</a:t>
+            </a:r>
+            <a:endParaRPr lang="en-US" sz="1100" dirty="0"/>
+          </a:p>
+        </p:txBody>
+      </p:sp>
+      <p:sp>
+        <p:nvSpPr>
+          <p:cNvPr id="8" name="Text 5"/>
+          <p:cNvSpPr/>
+          <p:nvPr/>
+        </p:nvSpPr>
+        <p:spPr>
+          <a:xfrm>
+            <a:off x="822960" y="868680"/>
+            <a:ext cx="7071055" cy="1188720"/>
+          </a:xfrm>
+          <a:prstGeom prst="rect">
+            <a:avLst/>
+          </a:prstGeom>
+          <a:noFill/>
+          <a:ln/>
+        </p:spPr>
+        <p:txBody>
+          <a:bodyPr wrap="square" lIns="0" tIns="0" rIns="0" bIns="0" rtlCol="0" anchor="b">
+            <a:normAutofit/>
+          </a:bodyPr>
+          <a:lstStyle/>
+          <a:p>
+            <a:pPr indent="0" marL="0">
+              <a:buNone/>
+            </a:pPr>
+            <a:r>
+              <a:rPr lang="en-US" sz="3800" dirty="0">
+                <a:solidFill>
+                  <a:srgbClr val="F2F0EA"/>
+                </a:solidFill>
+                <a:latin typeface="Arial" pitchFamily="34" charset="0"/>
+                <a:ea typeface="Arial" pitchFamily="34" charset="-122"/>
+                <a:cs typeface="Arial" pitchFamily="34" charset="-120"/>
+              </a:rPr>
+              <a:t>Três minutos, com placar</a:t>
+            </a:r>
+            <a:endParaRPr lang="en-US" sz="3800" dirty="0"/>
+          </a:p>
+        </p:txBody>
+      </p:sp>
+      <p:sp>
+        <p:nvSpPr>
+          <p:cNvPr id="9" name="Shape 6"/>
+          <p:cNvSpPr/>
+          <p:nvPr/>
+        </p:nvSpPr>
+        <p:spPr>
+          <a:xfrm>
+            <a:off x="822960" y="2121408"/>
+            <a:ext cx="640080" cy="64008"/>
+          </a:xfrm>
+          <a:prstGeom prst="rect">
+            <a:avLst/>
+          </a:prstGeom>
+          <a:solidFill>
+            <a:srgbClr val="E4555C"/>
+          </a:solidFill>
+          <a:ln w="12700">
+            <a:solidFill>
+              <a:srgbClr val="E4555C"/>
+            </a:solidFill>
+            <a:prstDash val="solid"/>
+          </a:ln>
+        </p:spPr>
+      </p:sp>
+      <p:sp>
+        <p:nvSpPr>
+          <p:cNvPr id="10" name="Shape 7"/>
+          <p:cNvSpPr/>
+          <p:nvPr/>
+        </p:nvSpPr>
+        <p:spPr>
+          <a:xfrm>
+            <a:off x="1005840" y="2606040"/>
+            <a:ext cx="0" cy="1424940"/>
+          </a:xfrm>
+          <a:prstGeom prst="line">
+            <a:avLst/>
+          </a:prstGeom>
+          <a:noFill/>
+          <a:ln w="12700">
+            <a:solidFill>
+              <a:srgbClr val="A9A79F"/>
+            </a:solidFill>
+            <a:prstDash val="solid"/>
+          </a:ln>
+        </p:spPr>
+      </p:sp>
+      <p:sp>
+        <p:nvSpPr>
+          <p:cNvPr id="11" name="Shape 8"/>
+          <p:cNvSpPr/>
+          <p:nvPr/>
+        </p:nvSpPr>
+        <p:spPr>
+          <a:xfrm>
+            <a:off x="822960" y="2423160"/>
+            <a:ext cx="365760" cy="365760"/>
+          </a:xfrm>
+          <a:prstGeom prst="ellipse">
+            <a:avLst/>
+          </a:prstGeom>
+          <a:solidFill>
+            <a:srgbClr val="111111"/>
+          </a:solidFill>
+          <a:ln w="15875">
+            <a:solidFill>
+              <a:srgbClr val="F2F0EA"/>
+            </a:solidFill>
+            <a:prstDash val="solid"/>
+          </a:ln>
+        </p:spPr>
+      </p:sp>
+      <p:sp>
+        <p:nvSpPr>
+          <p:cNvPr id="12" name="Text 9"/>
+          <p:cNvSpPr/>
+          <p:nvPr/>
+        </p:nvSpPr>
+        <p:spPr>
+          <a:xfrm>
+            <a:off x="822960" y="2423160"/>
+            <a:ext cx="365760" cy="365760"/>
+          </a:xfrm>
+          <a:prstGeom prst="rect">
+            <a:avLst/>
+          </a:prstGeom>
+          <a:noFill/>
+          <a:ln/>
+        </p:spPr>
+        <p:txBody>
+          <a:bodyPr wrap="square" lIns="0" tIns="0" rIns="0" bIns="0" rtlCol="0" anchor="ctr"/>
+          <a:lstStyle/>
+          <a:p>
+            <a:pPr algn="ctr" indent="0" marL="0">
+              <a:buNone/>
+            </a:pPr>
+            <a:r>
+              <a:rPr lang="en-US" sz="1300" b="1" dirty="0">
+                <a:solidFill>
+                  <a:srgbClr val="F2F0EA"/>
+                </a:solidFill>
+                <a:latin typeface="Arial" pitchFamily="34" charset="0"/>
+                <a:ea typeface="Arial" pitchFamily="34" charset="-122"/>
+                <a:cs typeface="Arial" pitchFamily="34" charset="-120"/>
+              </a:rPr>
+              <a:t>1</a:t>
+            </a:r>
+            <a:endParaRPr lang="en-US" sz="1300" dirty="0"/>
+          </a:p>
+        </p:txBody>
+      </p:sp>
+      <p:sp>
+        <p:nvSpPr>
+          <p:cNvPr id="13" name="Text 10"/>
+          <p:cNvSpPr/>
+          <p:nvPr/>
+        </p:nvSpPr>
+        <p:spPr>
+          <a:xfrm>
+            <a:off x="1417320" y="2432304"/>
+            <a:ext cx="6430975" cy="882904"/>
+          </a:xfrm>
+          <a:prstGeom prst="rect">
+            <a:avLst/>
+          </a:prstGeom>
+          <a:noFill/>
+          <a:ln/>
+        </p:spPr>
+        <p:txBody>
+          <a:bodyPr wrap="square" lIns="0" tIns="0" rIns="0" bIns="0" rtlCol="0" anchor="t">
+            <a:normAutofit/>
+          </a:bodyPr>
+          <a:lstStyle/>
+          <a:p>
+            <a:pPr indent="0" marL="0">
+              <a:lnSpc>
+                <a:spcPct val="105000"/>
+              </a:lnSpc>
+              <a:buNone/>
+            </a:pPr>
+            <a:r>
+              <a:rPr lang="en-US" sz="2200" dirty="0">
+                <a:solidFill>
+                  <a:srgbClr val="F2F0EA"/>
+                </a:solidFill>
+                <a:latin typeface="Arial" pitchFamily="34" charset="0"/>
+                <a:ea typeface="Arial" pitchFamily="34" charset="-122"/>
+                <a:cs typeface="Arial" pitchFamily="34" charset="-120"/>
+              </a:rPr>
+              <a:t>Na lição, toca em «Sala» e escreve o código do ecrã e uma alcunha</a:t>
+            </a:r>
+            <a:endParaRPr lang="en-US" sz="2200" dirty="0"/>
+          </a:p>
+        </p:txBody>
+      </p:sp>
+      <p:sp>
+        <p:nvSpPr>
+          <p:cNvPr id="14" name="Shape 11"/>
+          <p:cNvSpPr/>
+          <p:nvPr/>
+        </p:nvSpPr>
+        <p:spPr>
+          <a:xfrm>
+            <a:off x="822960" y="3306064"/>
+            <a:ext cx="365760" cy="365760"/>
+          </a:xfrm>
+          <a:prstGeom prst="ellipse">
+            <a:avLst/>
+          </a:prstGeom>
+          <a:solidFill>
+            <a:srgbClr val="111111"/>
+          </a:solidFill>
+          <a:ln w="15875">
+            <a:solidFill>
+              <a:srgbClr val="F2F0EA"/>
+            </a:solidFill>
+            <a:prstDash val="solid"/>
+          </a:ln>
+        </p:spPr>
+      </p:sp>
+      <p:sp>
+        <p:nvSpPr>
+          <p:cNvPr id="15" name="Text 12"/>
+          <p:cNvSpPr/>
+          <p:nvPr/>
+        </p:nvSpPr>
+        <p:spPr>
+          <a:xfrm>
+            <a:off x="822960" y="3306064"/>
+            <a:ext cx="365760" cy="365760"/>
+          </a:xfrm>
+          <a:prstGeom prst="rect">
+            <a:avLst/>
+          </a:prstGeom>
+          <a:noFill/>
+          <a:ln/>
+        </p:spPr>
+        <p:txBody>
+          <a:bodyPr wrap="square" lIns="0" tIns="0" rIns="0" bIns="0" rtlCol="0" anchor="ctr"/>
+          <a:lstStyle/>
+          <a:p>
+            <a:pPr algn="ctr" indent="0" marL="0">
+              <a:buNone/>
+            </a:pPr>
+            <a:r>
+              <a:rPr lang="en-US" sz="1300" b="1" dirty="0">
+                <a:solidFill>
+                  <a:srgbClr val="F2F0EA"/>
+                </a:solidFill>
+                <a:latin typeface="Arial" pitchFamily="34" charset="0"/>
+                <a:ea typeface="Arial" pitchFamily="34" charset="-122"/>
+                <a:cs typeface="Arial" pitchFamily="34" charset="-120"/>
+              </a:rPr>
+              <a:t>2</a:t>
+            </a:r>
+            <a:endParaRPr lang="en-US" sz="1300" dirty="0"/>
+          </a:p>
+        </p:txBody>
+      </p:sp>
+      <p:sp>
+        <p:nvSpPr>
+          <p:cNvPr id="16" name="Text 13"/>
+          <p:cNvSpPr/>
+          <p:nvPr/>
+        </p:nvSpPr>
+        <p:spPr>
+          <a:xfrm>
+            <a:off x="1417320" y="3315208"/>
+            <a:ext cx="6430975" cy="542036"/>
+          </a:xfrm>
+          <a:prstGeom prst="rect">
+            <a:avLst/>
+          </a:prstGeom>
+          <a:noFill/>
+          <a:ln/>
+        </p:spPr>
+        <p:txBody>
+          <a:bodyPr wrap="square" lIns="0" tIns="0" rIns="0" bIns="0" rtlCol="0" anchor="t">
+            <a:normAutofit/>
+          </a:bodyPr>
+          <a:lstStyle/>
+          <a:p>
+            <a:pPr indent="0" marL="0">
+              <a:lnSpc>
+                <a:spcPct val="105000"/>
+              </a:lnSpc>
+              <a:buNone/>
+            </a:pPr>
+            <a:r>
+              <a:rPr lang="en-US" sz="2200" dirty="0">
+                <a:solidFill>
+                  <a:srgbClr val="F2F0EA"/>
+                </a:solidFill>
+                <a:latin typeface="Arial" pitchFamily="34" charset="0"/>
+                <a:ea typeface="Arial" pitchFamily="34" charset="-122"/>
+                <a:cs typeface="Arial" pitchFamily="34" charset="-120"/>
+              </a:rPr>
+              <a:t>Faz os cartões que o ecrã indica</a:t>
+            </a:r>
+            <a:endParaRPr lang="en-US" sz="2200" dirty="0"/>
+          </a:p>
+        </p:txBody>
+      </p:sp>
+      <p:sp>
+        <p:nvSpPr>
+          <p:cNvPr id="17" name="Shape 14"/>
+          <p:cNvSpPr/>
+          <p:nvPr/>
+        </p:nvSpPr>
+        <p:spPr>
+          <a:xfrm>
+            <a:off x="822960" y="3848100"/>
+            <a:ext cx="365760" cy="365760"/>
+          </a:xfrm>
+          <a:prstGeom prst="ellipse">
+            <a:avLst/>
+          </a:prstGeom>
+          <a:solidFill>
+            <a:srgbClr val="111111"/>
+          </a:solidFill>
+          <a:ln w="15875">
+            <a:solidFill>
+              <a:srgbClr val="F2F0EA"/>
+            </a:solidFill>
+            <a:prstDash val="solid"/>
+          </a:ln>
+        </p:spPr>
+      </p:sp>
+      <p:sp>
+        <p:nvSpPr>
+          <p:cNvPr id="18" name="Text 15"/>
+          <p:cNvSpPr/>
+          <p:nvPr/>
+        </p:nvSpPr>
+        <p:spPr>
+          <a:xfrm>
+            <a:off x="822960" y="3848100"/>
+            <a:ext cx="365760" cy="365760"/>
+          </a:xfrm>
+          <a:prstGeom prst="rect">
+            <a:avLst/>
+          </a:prstGeom>
+          <a:noFill/>
+          <a:ln/>
+        </p:spPr>
+        <p:txBody>
+          <a:bodyPr wrap="square" lIns="0" tIns="0" rIns="0" bIns="0" rtlCol="0" anchor="ctr"/>
+          <a:lstStyle/>
+          <a:p>
+            <a:pPr algn="ctr" indent="0" marL="0">
+              <a:buNone/>
+            </a:pPr>
+            <a:r>
+              <a:rPr lang="en-US" sz="1300" b="1" dirty="0">
+                <a:solidFill>
+                  <a:srgbClr val="F2F0EA"/>
+                </a:solidFill>
+                <a:latin typeface="Arial" pitchFamily="34" charset="0"/>
+                <a:ea typeface="Arial" pitchFamily="34" charset="-122"/>
+                <a:cs typeface="Arial" pitchFamily="34" charset="-120"/>
+              </a:rPr>
+              <a:t>3</a:t>
+            </a:r>
+            <a:endParaRPr lang="en-US" sz="1300" dirty="0"/>
+          </a:p>
+        </p:txBody>
+      </p:sp>
+      <p:sp>
+        <p:nvSpPr>
+          <p:cNvPr id="19" name="Text 16"/>
+          <p:cNvSpPr/>
+          <p:nvPr/>
+        </p:nvSpPr>
+        <p:spPr>
+          <a:xfrm>
+            <a:off x="1417320" y="3857244"/>
+            <a:ext cx="6430975" cy="542036"/>
+          </a:xfrm>
+          <a:prstGeom prst="rect">
+            <a:avLst/>
+          </a:prstGeom>
+          <a:noFill/>
+          <a:ln/>
+        </p:spPr>
+        <p:txBody>
+          <a:bodyPr wrap="square" lIns="0" tIns="0" rIns="0" bIns="0" rtlCol="0" anchor="t">
+            <a:normAutofit/>
+          </a:bodyPr>
+          <a:lstStyle/>
+          <a:p>
+            <a:pPr indent="0" marL="0">
+              <a:lnSpc>
+                <a:spcPct val="105000"/>
+              </a:lnSpc>
+              <a:buNone/>
+            </a:pPr>
+            <a:r>
+              <a:rPr lang="en-US" sz="2200" dirty="0">
+                <a:solidFill>
+                  <a:srgbClr val="F2F0EA"/>
+                </a:solidFill>
+                <a:latin typeface="Arial" pitchFamily="34" charset="0"/>
+                <a:ea typeface="Arial" pitchFamily="34" charset="-122"/>
+                <a:cs typeface="Arial" pitchFamily="34" charset="-120"/>
+              </a:rPr>
+              <a:t>Quando acabares, olha para o placar</a:t>
+            </a:r>
+            <a:endParaRPr lang="en-US" sz="2200" dirty="0"/>
+          </a:p>
+        </p:txBody>
+      </p:sp>
+      <p:sp>
+        <p:nvSpPr>
+          <p:cNvPr id="20" name="Shape 17"/>
+          <p:cNvSpPr/>
+          <p:nvPr/>
+        </p:nvSpPr>
+        <p:spPr>
+          <a:xfrm>
+            <a:off x="8332927" y="1033272"/>
+            <a:ext cx="3145536" cy="3145536"/>
+          </a:xfrm>
+          <a:prstGeom prst="rect">
+            <a:avLst/>
+          </a:prstGeom>
+          <a:solidFill>
+            <a:srgbClr val="FFFFFF"/>
+          </a:solidFill>
+          <a:ln w="12700">
+            <a:solidFill>
+              <a:srgbClr val="F2F0EA"/>
+            </a:solidFill>
+            <a:prstDash val="solid"/>
+          </a:ln>
+        </p:spPr>
+      </p:sp>
+      <p:pic>
+        <p:nvPicPr>
+          <p:cNvPr id="21" name="Image 0" descr="/home/user/epi-portugues-fontes/_interno/biblioteca-imagens/qr/licao-m9-f05.png">    </p:cNvPr>
+          <p:cNvPicPr>
+            <a:picLocks noChangeAspect="1"/>
+          </p:cNvPicPr>
+          <p:nvPr/>
+        </p:nvPicPr>
+        <p:blipFill>
+          <a:blip r:embed="rId1"/>
+          <a:stretch>
+            <a:fillRect/>
+          </a:stretch>
+        </p:blipFill>
+        <p:spPr>
+          <a:xfrm>
+            <a:off x="8442655" y="1143000"/>
+            <a:ext cx="2926080" cy="2926080"/>
+          </a:xfrm>
+          <a:prstGeom prst="rect">
+            <a:avLst/>
+          </a:prstGeom>
+        </p:spPr>
+      </p:pic>
+      <p:sp>
+        <p:nvSpPr>
+          <p:cNvPr id="22" name="Text 18"/>
+          <p:cNvSpPr/>
+          <p:nvPr/>
+        </p:nvSpPr>
+        <p:spPr>
+          <a:xfrm>
+            <a:off x="8332927" y="4343400"/>
+            <a:ext cx="3145536" cy="640080"/>
+          </a:xfrm>
+          <a:prstGeom prst="rect">
+            <a:avLst/>
+          </a:prstGeom>
+          <a:noFill/>
+          <a:ln/>
+        </p:spPr>
+        <p:txBody>
+          <a:bodyPr wrap="square" lIns="0" tIns="0" rIns="0" bIns="0" rtlCol="0" anchor="t">
+            <a:normAutofit/>
+          </a:bodyPr>
+          <a:lstStyle/>
+          <a:p>
+            <a:pPr algn="ctr" indent="0" marL="0">
+              <a:buNone/>
+            </a:pPr>
+            <a:r>
+              <a:rPr lang="en-US" sz="1200" dirty="0">
+                <a:solidFill>
+                  <a:srgbClr val="F2F0EA"/>
+                </a:solidFill>
+                <a:latin typeface="Arial" pitchFamily="34" charset="0"/>
+                <a:ea typeface="Arial" pitchFamily="34" charset="-122"/>
+                <a:cs typeface="Arial" pitchFamily="34" charset="-120"/>
+              </a:rPr>
+              <a:t>pedrohfernandes-klk.github.io/​pt/​m9/​licao-m9-f05/​</a:t>
+            </a:r>
+            <a:endParaRPr lang="en-US" sz="1200" dirty="0"/>
+          </a:p>
+        </p:txBody>
+      </p:sp>
+    </p:spTree>
+  </p:cSld>
+  <p:clrMapOvr>
+    <a:masterClrMapping/>
+  </p:clrMapOvr>
+</p:sld>
+</file>
+
+<file path=ppt/slides/slide11.xml><?xml version="1.0" encoding="utf-8"?>
+<p:sld xmlns:a="http://schemas.openxmlformats.org/drawingml/2006/main" xmlns:r="http://schemas.openxmlformats.org/officeDocument/2006/relationships" xmlns:p="http://schemas.openxmlformats.org/presentationml/2006/main">
+  <p:cSld name="Slide 11">
+    <p:bg>
+      <p:bgPr>
+        <a:solidFill>
+          <a:srgbClr val="111111"/>
+        </a:solidFill>
+      </p:bgPr>
+    </p:bg>
+    <p:spTree>
+      <p:nvGrpSpPr>
+        <p:cNvPr id="1" name=""/>
+        <p:cNvGrpSpPr/>
+        <p:nvPr/>
+      </p:nvGrpSpPr>
+      <p:grpSpPr>
+        <a:xfrm>
+          <a:off x="0" y="0"/>
+          <a:ext cx="0" cy="0"/>
+          <a:chOff x="0" y="0"/>
+          <a:chExt cx="0" cy="0"/>
+        </a:xfrm>
+      </p:grpSpPr>
+      <p:sp>
+        <p:nvSpPr>
+          <p:cNvPr id="3" name="Text 0"/>
+          <p:cNvSpPr/>
+          <p:nvPr/>
+        </p:nvSpPr>
+        <p:spPr>
+          <a:xfrm>
+            <a:off x="10637215" y="384048"/>
+            <a:ext cx="731520" cy="365760"/>
+          </a:xfrm>
+          <a:prstGeom prst="rect">
+            <a:avLst/>
+          </a:prstGeom>
+          <a:noFill/>
+          <a:ln/>
+        </p:spPr>
+        <p:txBody>
+          <a:bodyPr wrap="square" lIns="0" tIns="0" rIns="0" bIns="0" rtlCol="0" anchor="ctr"/>
+          <a:lstStyle/>
+          <a:p>
+            <a:pPr algn="r" indent="0" marL="0">
+              <a:buNone/>
+            </a:pPr>
+            <a:r>
+              <a:rPr lang="en-US" sz="1200" b="1" spc="300" kern="0" dirty="0">
+                <a:solidFill>
+                  <a:srgbClr val="A9A79F"/>
+                </a:solidFill>
+                <a:latin typeface="Arial" pitchFamily="34" charset="0"/>
+                <a:ea typeface="Arial" pitchFamily="34" charset="-122"/>
+                <a:cs typeface="Arial" pitchFamily="34" charset="-120"/>
+              </a:rPr>
+              <a:t>EPI</a:t>
+            </a:r>
+            <a:endParaRPr lang="en-US" sz="1200" dirty="0"/>
+          </a:p>
+        </p:txBody>
+      </p:sp>
+      <p:sp>
+        <p:nvSpPr>
+          <p:cNvPr id="4" name="Text 1"/>
+          <p:cNvSpPr/>
+          <p:nvPr/>
+        </p:nvSpPr>
+        <p:spPr>
+          <a:xfrm>
+            <a:off x="822960" y="6400800"/>
+            <a:ext cx="9631375" cy="274320"/>
+          </a:xfrm>
+          <a:prstGeom prst="rect">
+            <a:avLst/>
+          </a:prstGeom>
+          <a:noFill/>
+          <a:ln/>
+        </p:spPr>
+        <p:txBody>
+          <a:bodyPr wrap="square" lIns="0" tIns="0" rIns="0" bIns="0" rtlCol="0" anchor="ctr"/>
+          <a:lstStyle/>
+          <a:p>
+            <a:pPr indent="0" marL="0">
+              <a:buNone/>
+            </a:pPr>
+            <a:r>
+              <a:rPr lang="en-US" sz="1000" dirty="0">
+                <a:solidFill>
+                  <a:srgbClr val="A9A79F"/>
+                </a:solidFill>
+                <a:latin typeface="Arial" pitchFamily="34" charset="0"/>
+                <a:ea typeface="Arial" pitchFamily="34" charset="-122"/>
+                <a:cs typeface="Arial" pitchFamily="34" charset="-120"/>
+              </a:rPr>
+              <a:t>Lição M9-F05, Os que carregaram a pedra</a:t>
+            </a:r>
+            <a:endParaRPr lang="en-US" sz="1000" dirty="0"/>
+          </a:p>
+        </p:txBody>
+      </p:sp>
+      <p:sp>
+        <p:nvSpPr>
+          <p:cNvPr id="5" name="Text 2"/>
+          <p:cNvSpPr/>
+          <p:nvPr/>
+        </p:nvSpPr>
+        <p:spPr>
+          <a:xfrm>
+            <a:off x="10637215" y="6400800"/>
+            <a:ext cx="731520" cy="274320"/>
+          </a:xfrm>
+          <a:prstGeom prst="rect">
+            <a:avLst/>
+          </a:prstGeom>
+          <a:noFill/>
+          <a:ln/>
+        </p:spPr>
+        <p:txBody>
+          <a:bodyPr wrap="square" lIns="0" tIns="0" rIns="0" bIns="0" rtlCol="0" anchor="ctr"/>
+          <a:lstStyle/>
+          <a:p>
+            <a:pPr algn="r" indent="0" marL="0">
+              <a:buNone/>
+            </a:pPr>
+            <a:r>
+              <a:rPr lang="en-US" sz="1000" dirty="0">
+                <a:solidFill>
+                  <a:srgbClr val="A9A79F"/>
+                </a:solidFill>
+                <a:latin typeface="Arial" pitchFamily="34" charset="0"/>
+                <a:ea typeface="Arial" pitchFamily="34" charset="-122"/>
+                <a:cs typeface="Arial" pitchFamily="34" charset="-120"/>
+              </a:rPr>
+              <a:t>11</a:t>
+            </a:r>
+            <a:endParaRPr lang="en-US" sz="1000" dirty="0"/>
+          </a:p>
+        </p:txBody>
+      </p:sp>
+      <p:sp>
+        <p:nvSpPr>
+          <p:cNvPr id="6" name="Shape 3"/>
+          <p:cNvSpPr/>
+          <p:nvPr/>
+        </p:nvSpPr>
+        <p:spPr>
+          <a:xfrm>
+            <a:off x="822960" y="502920"/>
+            <a:ext cx="201168" cy="201168"/>
+          </a:xfrm>
+          <a:prstGeom prst="triangle">
+            <a:avLst/>
+          </a:prstGeom>
+          <a:ln w="19050">
+            <a:solidFill>
+              <a:srgbClr val="F2F0EA"/>
+            </a:solidFill>
+            <a:prstDash val="solid"/>
+          </a:ln>
+        </p:spPr>
+      </p:sp>
+      <p:sp>
+        <p:nvSpPr>
+          <p:cNvPr id="7" name="Text 4"/>
+          <p:cNvSpPr/>
+          <p:nvPr/>
+        </p:nvSpPr>
+        <p:spPr>
+          <a:xfrm>
+            <a:off x="1188720" y="457200"/>
+            <a:ext cx="9448495" cy="292608"/>
+          </a:xfrm>
+          <a:prstGeom prst="rect">
+            <a:avLst/>
+          </a:prstGeom>
+          <a:noFill/>
+          <a:ln/>
+        </p:spPr>
+        <p:txBody>
+          <a:bodyPr wrap="square" lIns="0" tIns="0" rIns="0" bIns="0" rtlCol="0" anchor="ctr"/>
+          <a:lstStyle/>
+          <a:p>
+            <a:pPr indent="0" marL="0">
+              <a:buNone/>
+            </a:pPr>
+            <a:r>
+              <a:rPr lang="en-US" sz="1100" b="1" spc="250" kern="0" dirty="0">
+                <a:solidFill>
+                  <a:srgbClr val="A9A79F"/>
+                </a:solidFill>
+                <a:latin typeface="Arial" pitchFamily="34" charset="0"/>
+                <a:ea typeface="Arial" pitchFamily="34" charset="-122"/>
+                <a:cs typeface="Arial" pitchFamily="34" charset="-120"/>
+              </a:rPr>
+              <a:t>SÍNTESE</a:t>
+            </a:r>
+            <a:endParaRPr lang="en-US" sz="1100" dirty="0"/>
+          </a:p>
+        </p:txBody>
+      </p:sp>
+      <p:sp>
+        <p:nvSpPr>
+          <p:cNvPr id="8" name="Text 5"/>
+          <p:cNvSpPr/>
+          <p:nvPr/>
+        </p:nvSpPr>
+        <p:spPr>
+          <a:xfrm>
+            <a:off x="822960" y="868680"/>
+            <a:ext cx="9814255" cy="822960"/>
+          </a:xfrm>
+          <a:prstGeom prst="rect">
+            <a:avLst/>
+          </a:prstGeom>
+          <a:noFill/>
+          <a:ln/>
+        </p:spPr>
+        <p:txBody>
+          <a:bodyPr wrap="square" lIns="0" tIns="0" rIns="0" bIns="0" rtlCol="0" anchor="b">
+            <a:normAutofit/>
+          </a:bodyPr>
+          <a:lstStyle/>
+          <a:p>
+            <a:pPr indent="0" marL="0">
+              <a:buNone/>
+            </a:pPr>
+            <a:r>
+              <a:rPr lang="en-US" sz="3400" dirty="0">
+                <a:solidFill>
+                  <a:srgbClr val="F2F0EA"/>
+                </a:solidFill>
+                <a:latin typeface="Arial" pitchFamily="34" charset="0"/>
+                <a:ea typeface="Arial" pitchFamily="34" charset="-122"/>
+                <a:cs typeface="Arial" pitchFamily="34" charset="-120"/>
+              </a:rPr>
+              <a:t>Para fixar</a:t>
+            </a:r>
+            <a:endParaRPr lang="en-US" sz="3400" dirty="0"/>
+          </a:p>
+        </p:txBody>
+      </p:sp>
+      <p:sp>
+        <p:nvSpPr>
+          <p:cNvPr id="9" name="Shape 6"/>
+          <p:cNvSpPr/>
+          <p:nvPr/>
+        </p:nvSpPr>
+        <p:spPr>
+          <a:xfrm>
+            <a:off x="822960" y="1746504"/>
+            <a:ext cx="640080" cy="64008"/>
+          </a:xfrm>
+          <a:prstGeom prst="rect">
+            <a:avLst/>
+          </a:prstGeom>
+          <a:solidFill>
+            <a:srgbClr val="E4555C"/>
+          </a:solidFill>
+          <a:ln w="12700">
+            <a:solidFill>
+              <a:srgbClr val="E4555C"/>
+            </a:solidFill>
+            <a:prstDash val="solid"/>
+          </a:ln>
+        </p:spPr>
+      </p:sp>
+      <p:sp>
+        <p:nvSpPr>
+          <p:cNvPr id="10" name="Shape 7"/>
+          <p:cNvSpPr/>
+          <p:nvPr/>
+        </p:nvSpPr>
+        <p:spPr>
+          <a:xfrm>
+            <a:off x="1005840" y="2286000"/>
+            <a:ext cx="0" cy="2106676"/>
+          </a:xfrm>
+          <a:prstGeom prst="line">
+            <a:avLst/>
+          </a:prstGeom>
+          <a:noFill/>
+          <a:ln w="12700">
+            <a:solidFill>
+              <a:srgbClr val="A9A79F"/>
+            </a:solidFill>
+            <a:prstDash val="solid"/>
+          </a:ln>
+        </p:spPr>
+      </p:sp>
+      <p:sp>
+        <p:nvSpPr>
+          <p:cNvPr id="11" name="Shape 8"/>
+          <p:cNvSpPr/>
+          <p:nvPr/>
+        </p:nvSpPr>
+        <p:spPr>
+          <a:xfrm>
+            <a:off x="822960" y="2103120"/>
+            <a:ext cx="365760" cy="365760"/>
+          </a:xfrm>
+          <a:prstGeom prst="ellipse">
+            <a:avLst/>
+          </a:prstGeom>
+          <a:solidFill>
+            <a:srgbClr val="111111"/>
+          </a:solidFill>
+          <a:ln w="15875">
+            <a:solidFill>
+              <a:srgbClr val="F2F0EA"/>
+            </a:solidFill>
+            <a:prstDash val="solid"/>
+          </a:ln>
+        </p:spPr>
+      </p:sp>
+      <p:sp>
+        <p:nvSpPr>
+          <p:cNvPr id="12" name="Text 9"/>
+          <p:cNvSpPr/>
+          <p:nvPr/>
+        </p:nvSpPr>
+        <p:spPr>
+          <a:xfrm>
+            <a:off x="822960" y="2103120"/>
+            <a:ext cx="365760" cy="365760"/>
+          </a:xfrm>
+          <a:prstGeom prst="rect">
+            <a:avLst/>
+          </a:prstGeom>
+          <a:noFill/>
+          <a:ln/>
+        </p:spPr>
+        <p:txBody>
+          <a:bodyPr wrap="square" lIns="0" tIns="0" rIns="0" bIns="0" rtlCol="0" anchor="ctr"/>
+          <a:lstStyle/>
+          <a:p>
+            <a:pPr algn="ctr" indent="0" marL="0">
+              <a:buNone/>
+            </a:pPr>
+            <a:r>
+              <a:rPr lang="en-US" sz="1300" b="1" dirty="0">
+                <a:solidFill>
+                  <a:srgbClr val="F2F0EA"/>
+                </a:solidFill>
+                <a:latin typeface="Arial" pitchFamily="34" charset="0"/>
+                <a:ea typeface="Arial" pitchFamily="34" charset="-122"/>
+                <a:cs typeface="Arial" pitchFamily="34" charset="-120"/>
+              </a:rPr>
+              <a:t>1</a:t>
+            </a:r>
+            <a:endParaRPr lang="en-US" sz="1300" dirty="0"/>
+          </a:p>
+        </p:txBody>
+      </p:sp>
+      <p:sp>
+        <p:nvSpPr>
+          <p:cNvPr id="13" name="Text 10"/>
+          <p:cNvSpPr/>
+          <p:nvPr/>
+        </p:nvSpPr>
+        <p:spPr>
+          <a:xfrm>
+            <a:off x="1417320" y="2112264"/>
+            <a:ext cx="9174175" cy="1223772"/>
+          </a:xfrm>
+          <a:prstGeom prst="rect">
+            <a:avLst/>
+          </a:prstGeom>
+          <a:noFill/>
+          <a:ln/>
+        </p:spPr>
+        <p:txBody>
+          <a:bodyPr wrap="square" lIns="0" tIns="0" rIns="0" bIns="0" rtlCol="0" anchor="t">
+            <a:normAutofit/>
+          </a:bodyPr>
+          <a:lstStyle/>
+          <a:p>
+            <a:pPr indent="0" marL="0">
+              <a:lnSpc>
+                <a:spcPct val="105000"/>
+              </a:lnSpc>
+              <a:buNone/>
+            </a:pPr>
+            <a:r>
+              <a:rPr lang="en-US" sz="2200" dirty="0">
+                <a:solidFill>
+                  <a:srgbClr val="F2F0EA"/>
+                </a:solidFill>
+                <a:latin typeface="Arial" pitchFamily="34" charset="0"/>
+                <a:ea typeface="Arial" pitchFamily="34" charset="-122"/>
+                <a:cs typeface="Arial" pitchFamily="34" charset="-120"/>
+              </a:rPr>
+              <a:t>Os itens seguiram a grande pedra de Pêro Pinheiro a Mafra: um homem morre e fica em Cheleiros, os companheiros velam-no e o narrador diz-lhes os nomes, um a um.</a:t>
+            </a:r>
+            <a:endParaRPr lang="en-US" sz="2200" dirty="0"/>
+          </a:p>
+        </p:txBody>
+      </p:sp>
+      <p:sp>
+        <p:nvSpPr>
+          <p:cNvPr id="14" name="Shape 11"/>
+          <p:cNvSpPr/>
+          <p:nvPr/>
+        </p:nvSpPr>
+        <p:spPr>
+          <a:xfrm>
+            <a:off x="822960" y="3326892"/>
+            <a:ext cx="365760" cy="365760"/>
+          </a:xfrm>
+          <a:prstGeom prst="ellipse">
+            <a:avLst/>
+          </a:prstGeom>
+          <a:solidFill>
+            <a:srgbClr val="111111"/>
+          </a:solidFill>
+          <a:ln w="15875">
+            <a:solidFill>
+              <a:srgbClr val="F2F0EA"/>
+            </a:solidFill>
+            <a:prstDash val="solid"/>
+          </a:ln>
+        </p:spPr>
+      </p:sp>
+      <p:sp>
+        <p:nvSpPr>
+          <p:cNvPr id="15" name="Text 12"/>
+          <p:cNvSpPr/>
+          <p:nvPr/>
+        </p:nvSpPr>
+        <p:spPr>
+          <a:xfrm>
+            <a:off x="822960" y="3326892"/>
+            <a:ext cx="365760" cy="365760"/>
+          </a:xfrm>
+          <a:prstGeom prst="rect">
+            <a:avLst/>
+          </a:prstGeom>
+          <a:noFill/>
+          <a:ln/>
+        </p:spPr>
+        <p:txBody>
+          <a:bodyPr wrap="square" lIns="0" tIns="0" rIns="0" bIns="0" rtlCol="0" anchor="ctr"/>
+          <a:lstStyle/>
+          <a:p>
+            <a:pPr algn="ctr" indent="0" marL="0">
+              <a:buNone/>
+            </a:pPr>
+            <a:r>
+              <a:rPr lang="en-US" sz="1300" b="1" dirty="0">
+                <a:solidFill>
+                  <a:srgbClr val="F2F0EA"/>
+                </a:solidFill>
+                <a:latin typeface="Arial" pitchFamily="34" charset="0"/>
+                <a:ea typeface="Arial" pitchFamily="34" charset="-122"/>
+                <a:cs typeface="Arial" pitchFamily="34" charset="-120"/>
+              </a:rPr>
+              <a:t>2</a:t>
+            </a:r>
+            <a:endParaRPr lang="en-US" sz="1300" dirty="0"/>
+          </a:p>
+        </p:txBody>
+      </p:sp>
+      <p:sp>
+        <p:nvSpPr>
+          <p:cNvPr id="16" name="Text 13"/>
+          <p:cNvSpPr/>
+          <p:nvPr/>
+        </p:nvSpPr>
+        <p:spPr>
+          <a:xfrm>
+            <a:off x="1417320" y="3336036"/>
+            <a:ext cx="9174175" cy="882904"/>
+          </a:xfrm>
+          <a:prstGeom prst="rect">
+            <a:avLst/>
+          </a:prstGeom>
+          <a:noFill/>
+          <a:ln/>
+        </p:spPr>
+        <p:txBody>
+          <a:bodyPr wrap="square" lIns="0" tIns="0" rIns="0" bIns="0" rtlCol="0" anchor="t">
+            <a:normAutofit/>
+          </a:bodyPr>
+          <a:lstStyle/>
+          <a:p>
+            <a:pPr indent="0" marL="0">
+              <a:lnSpc>
+                <a:spcPct val="105000"/>
+              </a:lnSpc>
+              <a:buNone/>
+            </a:pPr>
+            <a:r>
+              <a:rPr lang="en-US" sz="2200" dirty="0">
+                <a:solidFill>
+                  <a:srgbClr val="F2F0EA"/>
+                </a:solidFill>
+                <a:latin typeface="Arial" pitchFamily="34" charset="0"/>
+                <a:ea typeface="Arial" pitchFamily="34" charset="-122"/>
+                <a:cs typeface="Arial" pitchFamily="34" charset="-120"/>
+              </a:rPr>
+              <a:t>D. Maria Bárbara vê da estrada homens atados por cordas e esquece-os logo: o romance lembra quem o poder não vê.</a:t>
+            </a:r>
+            <a:endParaRPr lang="en-US" sz="2200" dirty="0"/>
+          </a:p>
+        </p:txBody>
+      </p:sp>
+      <p:sp>
+        <p:nvSpPr>
+          <p:cNvPr id="17" name="Shape 14"/>
+          <p:cNvSpPr/>
+          <p:nvPr/>
+        </p:nvSpPr>
+        <p:spPr>
+          <a:xfrm>
+            <a:off x="822960" y="4209796"/>
+            <a:ext cx="365760" cy="365760"/>
+          </a:xfrm>
+          <a:prstGeom prst="ellipse">
+            <a:avLst/>
+          </a:prstGeom>
+          <a:solidFill>
+            <a:srgbClr val="111111"/>
+          </a:solidFill>
+          <a:ln w="15875">
+            <a:solidFill>
+              <a:srgbClr val="F2F0EA"/>
+            </a:solidFill>
+            <a:prstDash val="solid"/>
+          </a:ln>
+        </p:spPr>
+      </p:sp>
+      <p:sp>
+        <p:nvSpPr>
+          <p:cNvPr id="18" name="Text 15"/>
+          <p:cNvSpPr/>
+          <p:nvPr/>
+        </p:nvSpPr>
+        <p:spPr>
+          <a:xfrm>
+            <a:off x="822960" y="4209796"/>
+            <a:ext cx="365760" cy="365760"/>
+          </a:xfrm>
+          <a:prstGeom prst="rect">
+            <a:avLst/>
+          </a:prstGeom>
+          <a:noFill/>
+          <a:ln/>
+        </p:spPr>
+        <p:txBody>
+          <a:bodyPr wrap="square" lIns="0" tIns="0" rIns="0" bIns="0" rtlCol="0" anchor="ctr"/>
+          <a:lstStyle/>
+          <a:p>
+            <a:pPr algn="ctr" indent="0" marL="0">
+              <a:buNone/>
+            </a:pPr>
+            <a:r>
+              <a:rPr lang="en-US" sz="1300" b="1" dirty="0">
+                <a:solidFill>
+                  <a:srgbClr val="F2F0EA"/>
+                </a:solidFill>
+                <a:latin typeface="Arial" pitchFamily="34" charset="0"/>
+                <a:ea typeface="Arial" pitchFamily="34" charset="-122"/>
+                <a:cs typeface="Arial" pitchFamily="34" charset="-120"/>
+              </a:rPr>
+              <a:t>3</a:t>
+            </a:r>
+            <a:endParaRPr lang="en-US" sz="1300" dirty="0"/>
+          </a:p>
+        </p:txBody>
+      </p:sp>
+      <p:sp>
+        <p:nvSpPr>
+          <p:cNvPr id="19" name="Text 16"/>
+          <p:cNvSpPr/>
+          <p:nvPr/>
+        </p:nvSpPr>
+        <p:spPr>
+          <a:xfrm>
+            <a:off x="1417320" y="4218940"/>
+            <a:ext cx="9174175" cy="1564640"/>
+          </a:xfrm>
+          <a:prstGeom prst="rect">
+            <a:avLst/>
+          </a:prstGeom>
+          <a:noFill/>
+          <a:ln/>
+        </p:spPr>
+        <p:txBody>
+          <a:bodyPr wrap="square" lIns="0" tIns="0" rIns="0" bIns="0" rtlCol="0" anchor="t">
+            <a:normAutofit/>
+          </a:bodyPr>
+          <a:lstStyle/>
+          <a:p>
+            <a:pPr indent="0" marL="0">
+              <a:lnSpc>
+                <a:spcPct val="105000"/>
+              </a:lnSpc>
+              <a:buNone/>
+            </a:pPr>
+            <a:r>
+              <a:rPr lang="en-US" sz="2200" dirty="0">
+                <a:solidFill>
+                  <a:srgbClr val="F2F0EA"/>
+                </a:solidFill>
+                <a:latin typeface="Arial" pitchFamily="34" charset="0"/>
+                <a:ea typeface="Arial" pitchFamily="34" charset="-122"/>
+                <a:cs typeface="Arial" pitchFamily="34" charset="-120"/>
+              </a:rPr>
+              <a:t>No processo, as citações escolhem-se antes de produzir e o protótipo passa pela crítica de outro grupo; a memória descritiva é tua e diz que decisão do grupo defendeste ou contrariaste.</a:t>
+            </a:r>
+            <a:endParaRPr lang="en-US" sz="2200" dirty="0"/>
+          </a:p>
+        </p:txBody>
+      </p:sp>
+    </p:spTree>
+  </p:cSld>
+  <p:clrMapOvr>
+    <a:masterClrMapping/>
+  </p:clrMapOvr>
+</p:sld>
+</file>
+
+<file path=ppt/slides/slide12.xml><?xml version="1.0" encoding="utf-8"?>
+<p:sld xmlns:a="http://schemas.openxmlformats.org/drawingml/2006/main" xmlns:r="http://schemas.openxmlformats.org/officeDocument/2006/relationships" xmlns:p="http://schemas.openxmlformats.org/presentationml/2006/main">
+  <p:cSld name="Slide 12">
+    <p:bg>
+      <p:bgPr>
+        <a:solidFill>
+          <a:srgbClr val="111111"/>
+        </a:solidFill>
+      </p:bgPr>
+    </p:bg>
+    <p:spTree>
+      <p:nvGrpSpPr>
+        <p:cNvPr id="1" name=""/>
+        <p:cNvGrpSpPr/>
+        <p:nvPr/>
+      </p:nvGrpSpPr>
+      <p:grpSpPr>
+        <a:xfrm>
+          <a:off x="0" y="0"/>
+          <a:ext cx="0" cy="0"/>
+          <a:chOff x="0" y="0"/>
+          <a:chExt cx="0" cy="0"/>
+        </a:xfrm>
+      </p:grpSpPr>
+      <p:sp>
+        <p:nvSpPr>
+          <p:cNvPr id="3" name="Text 0"/>
+          <p:cNvSpPr/>
+          <p:nvPr/>
+        </p:nvSpPr>
+        <p:spPr>
+          <a:xfrm>
+            <a:off x="10637215" y="384048"/>
+            <a:ext cx="731520" cy="365760"/>
+          </a:xfrm>
+          <a:prstGeom prst="rect">
+            <a:avLst/>
+          </a:prstGeom>
+          <a:noFill/>
+          <a:ln/>
+        </p:spPr>
+        <p:txBody>
+          <a:bodyPr wrap="square" lIns="0" tIns="0" rIns="0" bIns="0" rtlCol="0" anchor="ctr"/>
+          <a:lstStyle/>
+          <a:p>
+            <a:pPr algn="r" indent="0" marL="0">
+              <a:buNone/>
+            </a:pPr>
+            <a:r>
+              <a:rPr lang="en-US" sz="1200" b="1" spc="300" kern="0" dirty="0">
+                <a:solidFill>
+                  <a:srgbClr val="A9A79F"/>
+                </a:solidFill>
+                <a:latin typeface="Arial" pitchFamily="34" charset="0"/>
+                <a:ea typeface="Arial" pitchFamily="34" charset="-122"/>
+                <a:cs typeface="Arial" pitchFamily="34" charset="-120"/>
+              </a:rPr>
+              <a:t>EPI</a:t>
+            </a:r>
+            <a:endParaRPr lang="en-US" sz="1200" dirty="0"/>
+          </a:p>
+        </p:txBody>
+      </p:sp>
+      <p:sp>
+        <p:nvSpPr>
+          <p:cNvPr id="4" name="Text 1"/>
+          <p:cNvSpPr/>
+          <p:nvPr/>
+        </p:nvSpPr>
+        <p:spPr>
+          <a:xfrm>
+            <a:off x="822960" y="6400800"/>
+            <a:ext cx="9631375" cy="274320"/>
+          </a:xfrm>
+          <a:prstGeom prst="rect">
+            <a:avLst/>
+          </a:prstGeom>
+          <a:noFill/>
+          <a:ln/>
+        </p:spPr>
+        <p:txBody>
+          <a:bodyPr wrap="square" lIns="0" tIns="0" rIns="0" bIns="0" rtlCol="0" anchor="ctr"/>
+          <a:lstStyle/>
+          <a:p>
+            <a:pPr indent="0" marL="0">
+              <a:buNone/>
+            </a:pPr>
+            <a:r>
+              <a:rPr lang="en-US" sz="1000" dirty="0">
+                <a:solidFill>
+                  <a:srgbClr val="A9A79F"/>
+                </a:solidFill>
+                <a:latin typeface="Arial" pitchFamily="34" charset="0"/>
+                <a:ea typeface="Arial" pitchFamily="34" charset="-122"/>
+                <a:cs typeface="Arial" pitchFamily="34" charset="-120"/>
+              </a:rPr>
+              <a:t>Lição M9-F05, Os que carregaram a pedra</a:t>
+            </a:r>
+            <a:endParaRPr lang="en-US" sz="1000" dirty="0"/>
+          </a:p>
+        </p:txBody>
+      </p:sp>
+      <p:sp>
+        <p:nvSpPr>
+          <p:cNvPr id="5" name="Text 2"/>
+          <p:cNvSpPr/>
+          <p:nvPr/>
+        </p:nvSpPr>
+        <p:spPr>
+          <a:xfrm>
+            <a:off x="10637215" y="6400800"/>
+            <a:ext cx="731520" cy="274320"/>
+          </a:xfrm>
+          <a:prstGeom prst="rect">
+            <a:avLst/>
+          </a:prstGeom>
+          <a:noFill/>
+          <a:ln/>
+        </p:spPr>
+        <p:txBody>
+          <a:bodyPr wrap="square" lIns="0" tIns="0" rIns="0" bIns="0" rtlCol="0" anchor="ctr"/>
+          <a:lstStyle/>
+          <a:p>
+            <a:pPr algn="r" indent="0" marL="0">
+              <a:buNone/>
+            </a:pPr>
+            <a:r>
+              <a:rPr lang="en-US" sz="1000" dirty="0">
+                <a:solidFill>
+                  <a:srgbClr val="A9A79F"/>
+                </a:solidFill>
+                <a:latin typeface="Arial" pitchFamily="34" charset="0"/>
+                <a:ea typeface="Arial" pitchFamily="34" charset="-122"/>
+                <a:cs typeface="Arial" pitchFamily="34" charset="-120"/>
+              </a:rPr>
+              <a:t>12</a:t>
+            </a:r>
+            <a:endParaRPr lang="en-US" sz="1000" dirty="0"/>
+          </a:p>
+        </p:txBody>
+      </p:sp>
+      <p:sp>
+        <p:nvSpPr>
+          <p:cNvPr id="6" name="Shape 3"/>
+          <p:cNvSpPr/>
+          <p:nvPr/>
+        </p:nvSpPr>
+        <p:spPr>
+          <a:xfrm>
+            <a:off x="822960" y="502920"/>
+            <a:ext cx="201168" cy="201168"/>
+          </a:xfrm>
           <a:prstGeom prst="triangle">
             <a:avLst/>
           </a:prstGeom>
@@ -2433,9 +3771,34 @@
           </a:p>
         </p:txBody>
       </p:sp>
-      <p:sp>
-        <p:nvSpPr>
-          <p:cNvPr id="6" name="Shape 3"/>
+      <p:pic>
+        <p:nvPicPr>
+          <p:cNvPr id="6" name="Image 0" descr="/home/user/epi-portugues-fontes/_interno/biblioteca-imagens/fontes/oliveira-milenar-constancia.jpg">    </p:cNvPr>
+          <p:cNvPicPr>
+            <a:picLocks noChangeAspect="1"/>
+          </p:cNvPicPr>
+          <p:nvPr/>
+        </p:nvPicPr>
+        <p:blipFill>
+          <a:blip r:embed="rId1">
+            <a:alphaModFix amt="8000"/>
+          </a:blip>
+          <a:srcRect l="0" r="0" t="0" b="0"/>
+          <a:stretch/>
+        </p:blipFill>
+        <p:spPr>
+          <a:xfrm>
+            <a:off x="0" y="0"/>
+            <a:ext cx="12191695" cy="6858000"/>
+          </a:xfrm>
+          <a:prstGeom prst="rect">
+            <a:avLst/>
+          </a:prstGeom>
+        </p:spPr>
+      </p:pic>
+      <p:sp>
+        <p:nvSpPr>
+          <p:cNvPr id="7" name="Shape 3"/>
           <p:cNvSpPr/>
           <p:nvPr/>
         </p:nvSpPr>
@@ -2457,7 +3820,7 @@
       </p:sp>
       <p:sp>
         <p:nvSpPr>
-          <p:cNvPr id="7" name="Text 4"/>
+          <p:cNvPr id="8" name="Text 4"/>
           <p:cNvSpPr/>
           <p:nvPr/>
         </p:nvSpPr>
@@ -2488,7 +3851,7 @@
                 <a:ea typeface="Arial" pitchFamily="34" charset="-122"/>
                 <a:cs typeface="Arial" pitchFamily="34" charset="-120"/>
               </a:rPr>
-              <a:t>LER, NA FOLHA</a:t>
+              <a:t>LER: A PEDRA E OS NOMES (1 DE 2)</a:t>
             </a:r>
             <a:endParaRPr lang="en-US" sz="1100" dirty="0"/>
           </a:p>
@@ -2496,167 +3859,14 @@
       </p:sp>
       <p:sp>
         <p:nvSpPr>
-          <p:cNvPr id="8" name="Text 5"/>
-          <p:cNvSpPr/>
-          <p:nvPr/>
-        </p:nvSpPr>
-        <p:spPr>
-          <a:xfrm>
-            <a:off x="822960" y="868680"/>
-            <a:ext cx="9814255" cy="822960"/>
-          </a:xfrm>
-          <a:prstGeom prst="rect">
-            <a:avLst/>
-          </a:prstGeom>
-          <a:noFill/>
-          <a:ln/>
-        </p:spPr>
-        <p:txBody>
-          <a:bodyPr wrap="square" lIns="0" tIns="0" rIns="0" bIns="0" rtlCol="0" anchor="b">
-            <a:normAutofit/>
-          </a:bodyPr>
-          <a:lstStyle/>
-          <a:p>
-            <a:pPr indent="0" marL="0">
-              <a:buNone/>
-            </a:pPr>
-            <a:r>
-              <a:rPr lang="en-US" sz="3400" dirty="0">
-                <a:solidFill>
-                  <a:srgbClr val="F2F0EA"/>
-                </a:solidFill>
-                <a:latin typeface="Arial" pitchFamily="34" charset="0"/>
-                <a:ea typeface="Arial" pitchFamily="34" charset="-122"/>
-                <a:cs typeface="Arial" pitchFamily="34" charset="-120"/>
-              </a:rPr>
-              <a:t>Os textos leem-se na folha</a:t>
-            </a:r>
-            <a:endParaRPr lang="en-US" sz="3400" dirty="0"/>
-          </a:p>
-        </p:txBody>
-      </p:sp>
-      <p:sp>
-        <p:nvSpPr>
-          <p:cNvPr id="9" name="Shape 6"/>
-          <p:cNvSpPr/>
-          <p:nvPr/>
-        </p:nvSpPr>
-        <p:spPr>
-          <a:xfrm>
-            <a:off x="822960" y="1746504"/>
-            <a:ext cx="640080" cy="64008"/>
-          </a:xfrm>
-          <a:prstGeom prst="rect">
-            <a:avLst/>
-          </a:prstGeom>
-          <a:solidFill>
-            <a:srgbClr val="E4555C"/>
-          </a:solidFill>
-          <a:ln w="12700">
-            <a:solidFill>
-              <a:srgbClr val="E4555C"/>
-            </a:solidFill>
-            <a:prstDash val="solid"/>
-          </a:ln>
-        </p:spPr>
-      </p:sp>
-      <p:sp>
-        <p:nvSpPr>
-          <p:cNvPr id="10" name="Shape 7"/>
-          <p:cNvSpPr/>
-          <p:nvPr/>
-        </p:nvSpPr>
-        <p:spPr>
-          <a:xfrm>
-            <a:off x="1005840" y="2286000"/>
-            <a:ext cx="0" cy="1316736"/>
-          </a:xfrm>
-          <a:prstGeom prst="line">
-            <a:avLst/>
-          </a:prstGeom>
-          <a:noFill/>
-          <a:ln w="12700">
-            <a:solidFill>
-              <a:srgbClr val="A9A79F"/>
-            </a:solidFill>
-            <a:prstDash val="solid"/>
-          </a:ln>
-        </p:spPr>
-      </p:sp>
-      <p:sp>
-        <p:nvSpPr>
-          <p:cNvPr id="11" name="Shape 8"/>
-          <p:cNvSpPr/>
-          <p:nvPr/>
-        </p:nvSpPr>
-        <p:spPr>
-          <a:xfrm>
-            <a:off x="822960" y="2103120"/>
-            <a:ext cx="365760" cy="365760"/>
-          </a:xfrm>
-          <a:prstGeom prst="ellipse">
-            <a:avLst/>
-          </a:prstGeom>
-          <a:solidFill>
-            <a:srgbClr val="111111"/>
-          </a:solidFill>
-          <a:ln w="15875">
-            <a:solidFill>
-              <a:srgbClr val="F2F0EA"/>
-            </a:solidFill>
-            <a:prstDash val="solid"/>
-          </a:ln>
-        </p:spPr>
-      </p:sp>
-      <p:sp>
-        <p:nvSpPr>
-          <p:cNvPr id="12" name="Text 9"/>
-          <p:cNvSpPr/>
-          <p:nvPr/>
-        </p:nvSpPr>
-        <p:spPr>
-          <a:xfrm>
-            <a:off x="822960" y="2103120"/>
-            <a:ext cx="365760" cy="365760"/>
-          </a:xfrm>
-          <a:prstGeom prst="rect">
-            <a:avLst/>
-          </a:prstGeom>
-          <a:noFill/>
-          <a:ln/>
-        </p:spPr>
-        <p:txBody>
-          <a:bodyPr wrap="square" lIns="0" tIns="0" rIns="0" bIns="0" rtlCol="0" anchor="ctr"/>
-          <a:lstStyle/>
-          <a:p>
-            <a:pPr algn="ctr" indent="0" marL="0">
-              <a:buNone/>
-            </a:pPr>
-            <a:r>
-              <a:rPr lang="en-US" sz="1300" b="1" dirty="0">
-                <a:solidFill>
-                  <a:srgbClr val="F2F0EA"/>
-                </a:solidFill>
-                <a:latin typeface="Arial" pitchFamily="34" charset="0"/>
-                <a:ea typeface="Arial" pitchFamily="34" charset="-122"/>
-                <a:cs typeface="Arial" pitchFamily="34" charset="-120"/>
-              </a:rPr>
-              <a:t>1</a:t>
-            </a:r>
-            <a:endParaRPr lang="en-US" sz="1300" dirty="0"/>
-          </a:p>
-        </p:txBody>
-      </p:sp>
-      <p:sp>
-        <p:nvSpPr>
-          <p:cNvPr id="13" name="Text 10"/>
-          <p:cNvSpPr/>
-          <p:nvPr/>
-        </p:nvSpPr>
-        <p:spPr>
-          <a:xfrm>
-            <a:off x="1417320" y="2112264"/>
-            <a:ext cx="9174175" cy="1316736"/>
+          <p:cNvPr id="9" name="Text 5"/>
+          <p:cNvSpPr/>
+          <p:nvPr/>
+        </p:nvSpPr>
+        <p:spPr>
+          <a:xfrm>
+            <a:off x="822960" y="1005840"/>
+            <a:ext cx="9814255" cy="4937760"/>
           </a:xfrm>
           <a:prstGeom prst="rect">
             <a:avLst/>
@@ -2672,170 +3882,83 @@
           <a:p>
             <a:pPr indent="0" marL="0">
               <a:lnSpc>
-                <a:spcPct val="105000"/>
+                <a:spcPct val="125000"/>
               </a:lnSpc>
               <a:buNone/>
             </a:pPr>
             <a:r>
-              <a:rPr lang="en-US" sz="2400" dirty="0">
+              <a:rPr lang="en-US" sz="2600" dirty="0">
                 <a:solidFill>
                   <a:srgbClr val="F2F0EA"/>
                 </a:solidFill>
-                <a:latin typeface="Arial" pitchFamily="34" charset="0"/>
-                <a:ea typeface="Arial" pitchFamily="34" charset="-122"/>
-                <a:cs typeface="Arial" pitchFamily="34" charset="-120"/>
-              </a:rPr>
-              <a:t>A pedra e os nomes</a:t>
-            </a:r>
-            <a:endParaRPr lang="en-US" sz="2400" dirty="0"/>
+                <a:latin typeface="Georgia" pitchFamily="34" charset="0"/>
+                <a:ea typeface="Georgia" pitchFamily="34" charset="-122"/>
+                <a:cs typeface="Georgia" pitchFamily="34" charset="-120"/>
+              </a:rPr>
+              <a:t>Daqueles homens que conhecemos no outro dia, vão na viagem José Pequeno e Baltasar, conduzindo cada qual sua junta, e, entre o pessoal peão, só para as forças chamado, vai o de Cheleiros, aquele que lá tem a mulher e os filhos, Francisco Marques é o nome dele, e também vai o Manuel Milho, o das ideias que lhe vêm e não sabe donde.</a:t>
+            </a:r>
+            <a:endParaRPr lang="en-US" sz="2600" dirty="0"/>
           </a:p>
           <a:p>
             <a:pPr indent="0" marL="0">
               <a:lnSpc>
-                <a:spcPct val="105000"/>
+                <a:spcPct val="125000"/>
               </a:lnSpc>
               <a:buNone/>
             </a:pPr>
             <a:r>
-              <a:rPr lang="en-US" sz="2400" dirty="0">
+              <a:rPr lang="en-US" sz="2600" dirty="0">
                 <a:solidFill>
                   <a:srgbClr val="F2F0EA"/>
                 </a:solidFill>
-                <a:latin typeface="Arial" pitchFamily="34" charset="0"/>
-                <a:ea typeface="Arial" pitchFamily="34" charset="-122"/>
-                <a:cs typeface="Arial" pitchFamily="34" charset="-120"/>
-              </a:rPr>
-              <a:t>José Saramago, Memorial do Convento (1982), a viagem da pedra para Mafra (excerto).</a:t>
-            </a:r>
-            <a:endParaRPr lang="en-US" sz="2400" dirty="0"/>
-          </a:p>
-        </p:txBody>
-      </p:sp>
-      <p:sp>
-        <p:nvSpPr>
-          <p:cNvPr id="14" name="Shape 11"/>
-          <p:cNvSpPr/>
-          <p:nvPr/>
-        </p:nvSpPr>
-        <p:spPr>
-          <a:xfrm>
-            <a:off x="822960" y="3419856"/>
-            <a:ext cx="365760" cy="365760"/>
-          </a:xfrm>
-          <a:prstGeom prst="ellipse">
-            <a:avLst/>
-          </a:prstGeom>
-          <a:solidFill>
-            <a:srgbClr val="111111"/>
-          </a:solidFill>
-          <a:ln w="15875">
-            <a:solidFill>
-              <a:srgbClr val="F2F0EA"/>
-            </a:solidFill>
-            <a:prstDash val="solid"/>
-          </a:ln>
-        </p:spPr>
-      </p:sp>
-      <p:sp>
-        <p:nvSpPr>
-          <p:cNvPr id="15" name="Text 12"/>
-          <p:cNvSpPr/>
-          <p:nvPr/>
-        </p:nvSpPr>
-        <p:spPr>
-          <a:xfrm>
-            <a:off x="822960" y="3419856"/>
-            <a:ext cx="365760" cy="365760"/>
-          </a:xfrm>
-          <a:prstGeom prst="rect">
-            <a:avLst/>
-          </a:prstGeom>
-          <a:noFill/>
-          <a:ln/>
-        </p:spPr>
-        <p:txBody>
-          <a:bodyPr wrap="square" lIns="0" tIns="0" rIns="0" bIns="0" rtlCol="0" anchor="ctr"/>
-          <a:lstStyle/>
-          <a:p>
-            <a:pPr algn="ctr" indent="0" marL="0">
-              <a:buNone/>
-            </a:pPr>
-            <a:r>
-              <a:rPr lang="en-US" sz="1300" b="1" dirty="0">
-                <a:solidFill>
-                  <a:srgbClr val="F2F0EA"/>
-                </a:solidFill>
-                <a:latin typeface="Arial" pitchFamily="34" charset="0"/>
-                <a:ea typeface="Arial" pitchFamily="34" charset="-122"/>
-                <a:cs typeface="Arial" pitchFamily="34" charset="-120"/>
-              </a:rPr>
-              <a:t>2</a:t>
-            </a:r>
-            <a:endParaRPr lang="en-US" sz="1300" dirty="0"/>
-          </a:p>
-        </p:txBody>
-      </p:sp>
-      <p:sp>
-        <p:nvSpPr>
-          <p:cNvPr id="16" name="Text 13"/>
-          <p:cNvSpPr/>
-          <p:nvPr/>
-        </p:nvSpPr>
-        <p:spPr>
-          <a:xfrm>
-            <a:off x="1417320" y="3429000"/>
-            <a:ext cx="9174175" cy="1316736"/>
-          </a:xfrm>
-          <a:prstGeom prst="rect">
-            <a:avLst/>
-          </a:prstGeom>
-          <a:noFill/>
-          <a:ln/>
-        </p:spPr>
-        <p:txBody>
-          <a:bodyPr wrap="square" lIns="0" tIns="0" rIns="0" bIns="0" rtlCol="0" anchor="t">
+                <a:latin typeface="Georgia" pitchFamily="34" charset="0"/>
+                <a:ea typeface="Georgia" pitchFamily="34" charset="-122"/>
+                <a:cs typeface="Georgia" pitchFamily="34" charset="-120"/>
+              </a:rPr>
+              <a:t>[…]</a:t>
+            </a:r>
+            <a:endParaRPr lang="en-US" sz="2600" dirty="0"/>
+          </a:p>
+        </p:txBody>
+      </p:sp>
+      <p:sp>
+        <p:nvSpPr>
+          <p:cNvPr id="10" name="Text 6"/>
+          <p:cNvSpPr/>
+          <p:nvPr/>
+        </p:nvSpPr>
+        <p:spPr>
+          <a:xfrm>
+            <a:off x="822960" y="6035040"/>
+            <a:ext cx="9814255" cy="292608"/>
+          </a:xfrm>
+          <a:prstGeom prst="rect">
+            <a:avLst/>
+          </a:prstGeom>
+          <a:noFill/>
+          <a:ln/>
+        </p:spPr>
+        <p:txBody>
+          <a:bodyPr wrap="square" lIns="0" tIns="0" rIns="0" bIns="0" rtlCol="0" anchor="ctr">
             <a:normAutofit/>
           </a:bodyPr>
           <a:lstStyle/>
           <a:p>
             <a:pPr indent="0" marL="0">
-              <a:lnSpc>
-                <a:spcPct val="105000"/>
-              </a:lnSpc>
-              <a:buNone/>
-            </a:pPr>
-            <a:r>
-              <a:rPr lang="en-US" sz="2400" dirty="0">
-                <a:solidFill>
-                  <a:srgbClr val="F2F0EA"/>
-                </a:solidFill>
-                <a:latin typeface="Arial" pitchFamily="34" charset="0"/>
-                <a:ea typeface="Arial" pitchFamily="34" charset="-122"/>
-                <a:cs typeface="Arial" pitchFamily="34" charset="-120"/>
-              </a:rPr>
-              <a:t>A princesa na estrada</a:t>
-            </a:r>
-            <a:endParaRPr lang="en-US" sz="2400" dirty="0"/>
-          </a:p>
-          <a:p>
-            <a:pPr indent="0" marL="0">
-              <a:lnSpc>
-                <a:spcPct val="105000"/>
-              </a:lnSpc>
-              <a:buNone/>
-            </a:pPr>
-            <a:r>
-              <a:rPr lang="en-US" sz="2400" dirty="0">
-                <a:solidFill>
-                  <a:srgbClr val="F2F0EA"/>
-                </a:solidFill>
-                <a:latin typeface="Arial" pitchFamily="34" charset="0"/>
-                <a:ea typeface="Arial" pitchFamily="34" charset="-122"/>
-                <a:cs typeface="Arial" pitchFamily="34" charset="-120"/>
-              </a:rPr>
-              <a:t>José Saramago, Memorial do Convento (1982). Texto junto pelo docente; grafia da edição.</a:t>
-            </a:r>
-            <a:endParaRPr lang="en-US" sz="2400" dirty="0"/>
+              <a:buNone/>
+            </a:pPr>
+            <a:r>
+              <a:rPr lang="en-US" sz="1200" dirty="0">
+                <a:solidFill>
+                  <a:srgbClr val="A9A79F"/>
+                </a:solidFill>
+                <a:latin typeface="Arial" pitchFamily="34" charset="0"/>
+                <a:ea typeface="Arial" pitchFamily="34" charset="-122"/>
+                <a:cs typeface="Arial" pitchFamily="34" charset="-120"/>
+              </a:rPr>
+              <a:t>José Saramago, Memorial do Convento (1982), a viagem da pedra para Mafra (excerto). Excerto para estudo.</a:t>
+            </a:r>
+            <a:endParaRPr lang="en-US" sz="1200" dirty="0"/>
           </a:p>
         </p:txBody>
       </p:sp>
@@ -2988,9 +4111,34 @@
           </a:p>
         </p:txBody>
       </p:sp>
-      <p:sp>
-        <p:nvSpPr>
-          <p:cNvPr id="6" name="Shape 3"/>
+      <p:pic>
+        <p:nvPicPr>
+          <p:cNvPr id="6" name="Image 0" descr="/home/user/epi-portugues-fontes/_interno/biblioteca-imagens/fontes/oliveira-milenar-constancia.jpg">    </p:cNvPr>
+          <p:cNvPicPr>
+            <a:picLocks noChangeAspect="1"/>
+          </p:cNvPicPr>
+          <p:nvPr/>
+        </p:nvPicPr>
+        <p:blipFill>
+          <a:blip r:embed="rId1">
+            <a:alphaModFix amt="8000"/>
+          </a:blip>
+          <a:srcRect l="0" r="0" t="0" b="0"/>
+          <a:stretch/>
+        </p:blipFill>
+        <p:spPr>
+          <a:xfrm>
+            <a:off x="0" y="0"/>
+            <a:ext cx="12191695" cy="6858000"/>
+          </a:xfrm>
+          <a:prstGeom prst="rect">
+            <a:avLst/>
+          </a:prstGeom>
+        </p:spPr>
+      </p:pic>
+      <p:sp>
+        <p:nvSpPr>
+          <p:cNvPr id="7" name="Shape 3"/>
           <p:cNvSpPr/>
           <p:nvPr/>
         </p:nvSpPr>
@@ -3012,7 +4160,7 @@
       </p:sp>
       <p:sp>
         <p:nvSpPr>
-          <p:cNvPr id="7" name="Text 4"/>
+          <p:cNvPr id="8" name="Text 4"/>
           <p:cNvSpPr/>
           <p:nvPr/>
         </p:nvSpPr>
@@ -3043,7 +4191,7 @@
                 <a:ea typeface="Arial" pitchFamily="34" charset="-122"/>
                 <a:cs typeface="Arial" pitchFamily="34" charset="-120"/>
               </a:rPr>
-              <a:t>O ESSENCIAL</a:t>
+              <a:t>LER: A PEDRA E OS NOMES (2 DE 2)</a:t>
             </a:r>
             <a:endParaRPr lang="en-US" sz="1100" dirty="0"/>
           </a:p>
@@ -3051,167 +4199,14 @@
       </p:sp>
       <p:sp>
         <p:nvSpPr>
-          <p:cNvPr id="8" name="Text 5"/>
-          <p:cNvSpPr/>
-          <p:nvPr/>
-        </p:nvSpPr>
-        <p:spPr>
-          <a:xfrm>
-            <a:off x="822960" y="868680"/>
-            <a:ext cx="9814255" cy="822960"/>
-          </a:xfrm>
-          <a:prstGeom prst="rect">
-            <a:avLst/>
-          </a:prstGeom>
-          <a:noFill/>
-          <a:ln/>
-        </p:spPr>
-        <p:txBody>
-          <a:bodyPr wrap="square" lIns="0" tIns="0" rIns="0" bIns="0" rtlCol="0" anchor="b">
-            <a:normAutofit/>
-          </a:bodyPr>
-          <a:lstStyle/>
-          <a:p>
-            <a:pPr indent="0" marL="0">
-              <a:buNone/>
-            </a:pPr>
-            <a:r>
-              <a:rPr lang="en-US" sz="3400" dirty="0">
-                <a:solidFill>
-                  <a:srgbClr val="F2F0EA"/>
-                </a:solidFill>
-                <a:latin typeface="Arial" pitchFamily="34" charset="0"/>
-                <a:ea typeface="Arial" pitchFamily="34" charset="-122"/>
-                <a:cs typeface="Arial" pitchFamily="34" charset="-120"/>
-              </a:rPr>
-              <a:t>Três coisas a fixar</a:t>
-            </a:r>
-            <a:endParaRPr lang="en-US" sz="3400" dirty="0"/>
-          </a:p>
-        </p:txBody>
-      </p:sp>
-      <p:sp>
-        <p:nvSpPr>
-          <p:cNvPr id="9" name="Shape 6"/>
-          <p:cNvSpPr/>
-          <p:nvPr/>
-        </p:nvSpPr>
-        <p:spPr>
-          <a:xfrm>
-            <a:off x="822960" y="1746504"/>
-            <a:ext cx="640080" cy="64008"/>
-          </a:xfrm>
-          <a:prstGeom prst="rect">
-            <a:avLst/>
-          </a:prstGeom>
-          <a:solidFill>
-            <a:srgbClr val="E4555C"/>
-          </a:solidFill>
-          <a:ln w="12700">
-            <a:solidFill>
-              <a:srgbClr val="E4555C"/>
-            </a:solidFill>
-            <a:prstDash val="solid"/>
-          </a:ln>
-        </p:spPr>
-      </p:sp>
-      <p:sp>
-        <p:nvSpPr>
-          <p:cNvPr id="10" name="Shape 7"/>
-          <p:cNvSpPr/>
-          <p:nvPr/>
-        </p:nvSpPr>
-        <p:spPr>
-          <a:xfrm>
-            <a:off x="1005840" y="2286000"/>
-            <a:ext cx="0" cy="2447544"/>
-          </a:xfrm>
-          <a:prstGeom prst="line">
-            <a:avLst/>
-          </a:prstGeom>
-          <a:noFill/>
-          <a:ln w="12700">
-            <a:solidFill>
-              <a:srgbClr val="A9A79F"/>
-            </a:solidFill>
-            <a:prstDash val="solid"/>
-          </a:ln>
-        </p:spPr>
-      </p:sp>
-      <p:sp>
-        <p:nvSpPr>
-          <p:cNvPr id="11" name="Shape 8"/>
-          <p:cNvSpPr/>
-          <p:nvPr/>
-        </p:nvSpPr>
-        <p:spPr>
-          <a:xfrm>
-            <a:off x="822960" y="2103120"/>
-            <a:ext cx="365760" cy="365760"/>
-          </a:xfrm>
-          <a:prstGeom prst="ellipse">
-            <a:avLst/>
-          </a:prstGeom>
-          <a:solidFill>
-            <a:srgbClr val="111111"/>
-          </a:solidFill>
-          <a:ln w="15875">
-            <a:solidFill>
-              <a:srgbClr val="F2F0EA"/>
-            </a:solidFill>
-            <a:prstDash val="solid"/>
-          </a:ln>
-        </p:spPr>
-      </p:sp>
-      <p:sp>
-        <p:nvSpPr>
-          <p:cNvPr id="12" name="Text 9"/>
-          <p:cNvSpPr/>
-          <p:nvPr/>
-        </p:nvSpPr>
-        <p:spPr>
-          <a:xfrm>
-            <a:off x="822960" y="2103120"/>
-            <a:ext cx="365760" cy="365760"/>
-          </a:xfrm>
-          <a:prstGeom prst="rect">
-            <a:avLst/>
-          </a:prstGeom>
-          <a:noFill/>
-          <a:ln/>
-        </p:spPr>
-        <p:txBody>
-          <a:bodyPr wrap="square" lIns="0" tIns="0" rIns="0" bIns="0" rtlCol="0" anchor="ctr"/>
-          <a:lstStyle/>
-          <a:p>
-            <a:pPr algn="ctr" indent="0" marL="0">
-              <a:buNone/>
-            </a:pPr>
-            <a:r>
-              <a:rPr lang="en-US" sz="1300" b="1" dirty="0">
-                <a:solidFill>
-                  <a:srgbClr val="F2F0EA"/>
-                </a:solidFill>
-                <a:latin typeface="Arial" pitchFamily="34" charset="0"/>
-                <a:ea typeface="Arial" pitchFamily="34" charset="-122"/>
-                <a:cs typeface="Arial" pitchFamily="34" charset="-120"/>
-              </a:rPr>
-              <a:t>1</a:t>
-            </a:r>
-            <a:endParaRPr lang="en-US" sz="1300" dirty="0"/>
-          </a:p>
-        </p:txBody>
-      </p:sp>
-      <p:sp>
-        <p:nvSpPr>
-          <p:cNvPr id="13" name="Text 10"/>
-          <p:cNvSpPr/>
-          <p:nvPr/>
-        </p:nvSpPr>
-        <p:spPr>
-          <a:xfrm>
-            <a:off x="1417320" y="2112264"/>
-            <a:ext cx="9174175" cy="1223772"/>
+          <p:cNvPr id="9" name="Text 5"/>
+          <p:cNvSpPr/>
+          <p:nvPr/>
+        </p:nvSpPr>
+        <p:spPr>
+          <a:xfrm>
+            <a:off x="822960" y="1005840"/>
+            <a:ext cx="9814255" cy="4937760"/>
           </a:xfrm>
           <a:prstGeom prst="rect">
             <a:avLst/>
@@ -3227,7 +4222,7 @@
           <a:p>
             <a:pPr indent="0" marL="0">
               <a:lnSpc>
-                <a:spcPct val="105000"/>
+                <a:spcPct val="125000"/>
               </a:lnSpc>
               <a:buNone/>
             </a:pPr>
@@ -3236,11 +4231,11 @@
                 <a:solidFill>
                   <a:srgbClr val="F2F0EA"/>
                 </a:solidFill>
-                <a:latin typeface="Arial" pitchFamily="34" charset="0"/>
-                <a:ea typeface="Arial" pitchFamily="34" charset="-122"/>
-                <a:cs typeface="Arial" pitchFamily="34" charset="-120"/>
-              </a:rPr>
-              <a:t>O romance dá nome e voz a quem a história oficial esqueceu: os homens que cortaram, levaram e ergueram a pedra do convento de Mafra.</a:t>
+                <a:latin typeface="Georgia" pitchFamily="34" charset="0"/>
+                <a:ea typeface="Georgia" pitchFamily="34" charset="-122"/>
+                <a:cs typeface="Georgia" pitchFamily="34" charset="-120"/>
+              </a:rPr>
+              <a:t>tudo quanto é nome de homem vai aqui, tudo quanto é vida também, sobretudo se atribulada, principalmente se miserável, já que não podemos falar-lhes das vidas, por tantas serem, ao menos deixemos os nomes escritos, é essa a nossa obrigação, só para isso escrevemos, torná-los imortais, pois aí ficam, se de nós depende, Alcino, Brás, Cristóvão, Daniel, Egas, Firmino, Geraldo, Horácio, Isidro, Juvino, Luís, Marcolino, Nicanor, Onofre, Paulo, Quitério, Rufino, Sebastião, Tadeu, Ubaldo, Valério, Xavier, Zacarias, uma letra de cada um para ficarem todos representados, porventura nem todos estes nomes serão os próprios do tempo e do lugar, menos ainda da gente, mas, enquanto não se acabar quem trabalhe, não se acabarão os trabalhos, e alguns destes estarão no futuro de alguns daqueles, à espera de quem vier a ter o nome e a profissão</a:t>
             </a:r>
             <a:endParaRPr lang="en-US" sz="2200" dirty="0"/>
           </a:p>
@@ -3248,217 +4243,42 @@
       </p:sp>
       <p:sp>
         <p:nvSpPr>
-          <p:cNvPr id="14" name="Shape 11"/>
-          <p:cNvSpPr/>
-          <p:nvPr/>
-        </p:nvSpPr>
-        <p:spPr>
-          <a:xfrm>
-            <a:off x="822960" y="3326892"/>
-            <a:ext cx="365760" cy="365760"/>
-          </a:xfrm>
-          <a:prstGeom prst="ellipse">
-            <a:avLst/>
-          </a:prstGeom>
-          <a:solidFill>
-            <a:srgbClr val="111111"/>
-          </a:solidFill>
-          <a:ln w="15875">
-            <a:solidFill>
-              <a:srgbClr val="F2F0EA"/>
-            </a:solidFill>
-            <a:prstDash val="solid"/>
-          </a:ln>
-        </p:spPr>
-      </p:sp>
-      <p:sp>
-        <p:nvSpPr>
-          <p:cNvPr id="15" name="Text 12"/>
-          <p:cNvSpPr/>
-          <p:nvPr/>
-        </p:nvSpPr>
-        <p:spPr>
-          <a:xfrm>
-            <a:off x="822960" y="3326892"/>
-            <a:ext cx="365760" cy="365760"/>
-          </a:xfrm>
-          <a:prstGeom prst="rect">
-            <a:avLst/>
-          </a:prstGeom>
-          <a:noFill/>
-          <a:ln/>
-        </p:spPr>
-        <p:txBody>
-          <a:bodyPr wrap="square" lIns="0" tIns="0" rIns="0" bIns="0" rtlCol="0" anchor="ctr"/>
-          <a:lstStyle/>
-          <a:p>
-            <a:pPr algn="ctr" indent="0" marL="0">
-              <a:buNone/>
-            </a:pPr>
-            <a:r>
-              <a:rPr lang="en-US" sz="1300" b="1" dirty="0">
-                <a:solidFill>
-                  <a:srgbClr val="F2F0EA"/>
-                </a:solidFill>
-                <a:latin typeface="Arial" pitchFamily="34" charset="0"/>
-                <a:ea typeface="Arial" pitchFamily="34" charset="-122"/>
-                <a:cs typeface="Arial" pitchFamily="34" charset="-120"/>
-              </a:rPr>
-              <a:t>2</a:t>
-            </a:r>
-            <a:endParaRPr lang="en-US" sz="1300" dirty="0"/>
-          </a:p>
-        </p:txBody>
-      </p:sp>
-      <p:sp>
-        <p:nvSpPr>
-          <p:cNvPr id="16" name="Text 13"/>
-          <p:cNvSpPr/>
-          <p:nvPr/>
-        </p:nvSpPr>
-        <p:spPr>
-          <a:xfrm>
-            <a:off x="1417320" y="3336036"/>
-            <a:ext cx="9174175" cy="1223772"/>
-          </a:xfrm>
-          <a:prstGeom prst="rect">
-            <a:avLst/>
-          </a:prstGeom>
-          <a:noFill/>
-          <a:ln/>
-        </p:spPr>
-        <p:txBody>
-          <a:bodyPr wrap="square" lIns="0" tIns="0" rIns="0" bIns="0" rtlCol="0" anchor="t">
+          <p:cNvPr id="10" name="Text 6"/>
+          <p:cNvSpPr/>
+          <p:nvPr/>
+        </p:nvSpPr>
+        <p:spPr>
+          <a:xfrm>
+            <a:off x="822960" y="6035040"/>
+            <a:ext cx="9814255" cy="292608"/>
+          </a:xfrm>
+          <a:prstGeom prst="rect">
+            <a:avLst/>
+          </a:prstGeom>
+          <a:noFill/>
+          <a:ln/>
+        </p:spPr>
+        <p:txBody>
+          <a:bodyPr wrap="square" lIns="0" tIns="0" rIns="0" bIns="0" rtlCol="0" anchor="ctr">
             <a:normAutofit/>
           </a:bodyPr>
           <a:lstStyle/>
           <a:p>
             <a:pPr indent="0" marL="0">
-              <a:lnSpc>
-                <a:spcPct val="105000"/>
-              </a:lnSpc>
-              <a:buNone/>
-            </a:pPr>
-            <a:r>
-              <a:rPr lang="en-US" sz="2200" dirty="0">
-                <a:solidFill>
-                  <a:srgbClr val="F2F0EA"/>
-                </a:solidFill>
-                <a:latin typeface="Arial" pitchFamily="34" charset="0"/>
-                <a:ea typeface="Arial" pitchFamily="34" charset="-122"/>
-                <a:cs typeface="Arial" pitchFamily="34" charset="-120"/>
-              </a:rPr>
-              <a:t>Em grupo, criam um produto do vosso curso que faça o mesmo por um grupo de anónimos, do romance ou de hoje, com três citações curtas e a página de cada uma.</a:t>
-            </a:r>
-            <a:endParaRPr lang="en-US" sz="2200" dirty="0"/>
-          </a:p>
-        </p:txBody>
-      </p:sp>
-      <p:sp>
-        <p:nvSpPr>
-          <p:cNvPr id="17" name="Shape 14"/>
-          <p:cNvSpPr/>
-          <p:nvPr/>
-        </p:nvSpPr>
-        <p:spPr>
-          <a:xfrm>
-            <a:off x="822960" y="4550664"/>
-            <a:ext cx="365760" cy="365760"/>
-          </a:xfrm>
-          <a:prstGeom prst="ellipse">
-            <a:avLst/>
-          </a:prstGeom>
-          <a:solidFill>
-            <a:srgbClr val="111111"/>
-          </a:solidFill>
-          <a:ln w="15875">
-            <a:solidFill>
-              <a:srgbClr val="F2F0EA"/>
-            </a:solidFill>
-            <a:prstDash val="solid"/>
-          </a:ln>
-        </p:spPr>
-      </p:sp>
-      <p:sp>
-        <p:nvSpPr>
-          <p:cNvPr id="18" name="Text 15"/>
-          <p:cNvSpPr/>
-          <p:nvPr/>
-        </p:nvSpPr>
-        <p:spPr>
-          <a:xfrm>
-            <a:off x="822960" y="4550664"/>
-            <a:ext cx="365760" cy="365760"/>
-          </a:xfrm>
-          <a:prstGeom prst="rect">
-            <a:avLst/>
-          </a:prstGeom>
-          <a:noFill/>
-          <a:ln/>
-        </p:spPr>
-        <p:txBody>
-          <a:bodyPr wrap="square" lIns="0" tIns="0" rIns="0" bIns="0" rtlCol="0" anchor="ctr"/>
-          <a:lstStyle/>
-          <a:p>
-            <a:pPr algn="ctr" indent="0" marL="0">
-              <a:buNone/>
-            </a:pPr>
-            <a:r>
-              <a:rPr lang="en-US" sz="1300" b="1" dirty="0">
-                <a:solidFill>
-                  <a:srgbClr val="F2F0EA"/>
-                </a:solidFill>
-                <a:latin typeface="Arial" pitchFamily="34" charset="0"/>
-                <a:ea typeface="Arial" pitchFamily="34" charset="-122"/>
-                <a:cs typeface="Arial" pitchFamily="34" charset="-120"/>
-              </a:rPr>
-              <a:t>3</a:t>
-            </a:r>
-            <a:endParaRPr lang="en-US" sz="1300" dirty="0"/>
-          </a:p>
-        </p:txBody>
-      </p:sp>
-      <p:sp>
-        <p:nvSpPr>
-          <p:cNvPr id="19" name="Text 16"/>
-          <p:cNvSpPr/>
-          <p:nvPr/>
-        </p:nvSpPr>
-        <p:spPr>
-          <a:xfrm>
-            <a:off x="1417320" y="4559808"/>
-            <a:ext cx="9174175" cy="1223772"/>
-          </a:xfrm>
-          <a:prstGeom prst="rect">
-            <a:avLst/>
-          </a:prstGeom>
-          <a:noFill/>
-          <a:ln/>
-        </p:spPr>
-        <p:txBody>
-          <a:bodyPr wrap="square" lIns="0" tIns="0" rIns="0" bIns="0" rtlCol="0" anchor="t">
-            <a:normAutofit/>
-          </a:bodyPr>
-          <a:lstStyle/>
-          <a:p>
-            <a:pPr indent="0" marL="0">
-              <a:lnSpc>
-                <a:spcPct val="105000"/>
-              </a:lnSpc>
-              <a:buNone/>
-            </a:pPr>
-            <a:r>
-              <a:rPr lang="en-US" sz="2200" dirty="0">
-                <a:solidFill>
-                  <a:srgbClr val="F2F0EA"/>
-                </a:solidFill>
-                <a:latin typeface="Arial" pitchFamily="34" charset="0"/>
-                <a:ea typeface="Arial" pitchFamily="34" charset="-122"/>
-                <a:cs typeface="Arial" pitchFamily="34" charset="-120"/>
-              </a:rPr>
-              <a:t>Vale 25 % da nota: apresentação de sete minutos e memória descritiva individual de 100 a 150 palavras; nenhuma pessoa real pode aparecer reconhecível sem autorização.</a:t>
-            </a:r>
-            <a:endParaRPr lang="en-US" sz="2200" dirty="0"/>
+              <a:buNone/>
+            </a:pPr>
+            <a:r>
+              <a:rPr lang="en-US" sz="1200" dirty="0">
+                <a:solidFill>
+                  <a:srgbClr val="A9A79F"/>
+                </a:solidFill>
+                <a:latin typeface="Arial" pitchFamily="34" charset="0"/>
+                <a:ea typeface="Arial" pitchFamily="34" charset="-122"/>
+                <a:cs typeface="Arial" pitchFamily="34" charset="-120"/>
+              </a:rPr>
+              <a:t>José Saramago, Memorial do Convento (1982), a viagem da pedra para Mafra (excerto). Excerto para estudo.</a:t>
+            </a:r>
+            <a:endParaRPr lang="en-US" sz="1200" dirty="0"/>
           </a:p>
         </p:txBody>
       </p:sp>
@@ -3611,9 +4431,34 @@
           </a:p>
         </p:txBody>
       </p:sp>
-      <p:sp>
-        <p:nvSpPr>
-          <p:cNvPr id="6" name="Shape 3"/>
+      <p:pic>
+        <p:nvPicPr>
+          <p:cNvPr id="6" name="Image 0" descr="/home/user/epi-portugues-fontes/_interno/biblioteca-imagens/fontes/oliveira-milenar-constancia.jpg">    </p:cNvPr>
+          <p:cNvPicPr>
+            <a:picLocks noChangeAspect="1"/>
+          </p:cNvPicPr>
+          <p:nvPr/>
+        </p:nvPicPr>
+        <p:blipFill>
+          <a:blip r:embed="rId1">
+            <a:alphaModFix amt="8000"/>
+          </a:blip>
+          <a:srcRect l="0" r="0" t="0" b="0"/>
+          <a:stretch/>
+        </p:blipFill>
+        <p:spPr>
+          <a:xfrm>
+            <a:off x="0" y="0"/>
+            <a:ext cx="12191695" cy="6858000"/>
+          </a:xfrm>
+          <a:prstGeom prst="rect">
+            <a:avLst/>
+          </a:prstGeom>
+        </p:spPr>
+      </p:pic>
+      <p:sp>
+        <p:nvSpPr>
+          <p:cNvPr id="7" name="Shape 3"/>
           <p:cNvSpPr/>
           <p:nvPr/>
         </p:nvSpPr>
@@ -3622,7 +4467,7 @@
             <a:off x="822960" y="502920"/>
             <a:ext cx="201168" cy="201168"/>
           </a:xfrm>
-          <a:prstGeom prst="rect">
+          <a:prstGeom prst="ellipse">
             <a:avLst/>
           </a:prstGeom>
           <a:ln w="19050">
@@ -3635,7 +4480,7 @@
       </p:sp>
       <p:sp>
         <p:nvSpPr>
-          <p:cNvPr id="7" name="Text 4"/>
+          <p:cNvPr id="8" name="Text 4"/>
           <p:cNvSpPr/>
           <p:nvPr/>
         </p:nvSpPr>
@@ -3666,7 +4511,642 @@
                 <a:ea typeface="Arial" pitchFamily="34" charset="-122"/>
                 <a:cs typeface="Arial" pitchFamily="34" charset="-120"/>
               </a:rPr>
-              <a:t>VER, E COMPLETAR NO CADERNO</a:t>
+              <a:t>LER: A PRINCESA NA ESTRADA (1 DE 2)</a:t>
+            </a:r>
+            <a:endParaRPr lang="en-US" sz="1100" dirty="0"/>
+          </a:p>
+        </p:txBody>
+      </p:sp>
+      <p:sp>
+        <p:nvSpPr>
+          <p:cNvPr id="9" name="Text 5"/>
+          <p:cNvSpPr/>
+          <p:nvPr/>
+        </p:nvSpPr>
+        <p:spPr>
+          <a:xfrm>
+            <a:off x="822960" y="1005840"/>
+            <a:ext cx="9814255" cy="4937760"/>
+          </a:xfrm>
+          <a:prstGeom prst="rect">
+            <a:avLst/>
+          </a:prstGeom>
+          <a:noFill/>
+          <a:ln/>
+        </p:spPr>
+        <p:txBody>
+          <a:bodyPr wrap="square" lIns="0" tIns="0" rIns="0" bIns="0" rtlCol="0" anchor="t">
+            <a:normAutofit/>
+          </a:bodyPr>
+          <a:lstStyle/>
+          <a:p>
+            <a:pPr indent="0" marL="0">
+              <a:lnSpc>
+                <a:spcPct val="125000"/>
+              </a:lnSpc>
+              <a:buNone/>
+            </a:pPr>
+            <a:r>
+              <a:rPr lang="en-US" sz="2200" dirty="0">
+                <a:solidFill>
+                  <a:srgbClr val="F2F0EA"/>
+                </a:solidFill>
+                <a:latin typeface="Georgia" pitchFamily="34" charset="0"/>
+                <a:ea typeface="Georgia" pitchFamily="34" charset="-122"/>
+                <a:cs typeface="Georgia" pitchFamily="34" charset="-120"/>
+              </a:rPr>
+              <a:t>A tarde caía rapidamente, o ar arrefecia, e a princesa D. Maria Bárbara, que enfim adormecera, auxiliada pelo torpor emoliente dos caramelos com que aconchegara o estômago e por quinhentos passos de estrada sem buracos, acordou com um grande arrepio, como se um dedo gelado lhe tivesse tocado na testa, e, virando os olhos ensonados para os campos crepusculares, viu parado um pardo ajuntamento de homens, alinhados na beira do caminho e atados uns aos outros por cordas, seriam talvez uns quinze.</a:t>
+            </a:r>
+            <a:endParaRPr lang="en-US" sz="2200" dirty="0"/>
+          </a:p>
+        </p:txBody>
+      </p:sp>
+      <p:sp>
+        <p:nvSpPr>
+          <p:cNvPr id="10" name="Text 6"/>
+          <p:cNvSpPr/>
+          <p:nvPr/>
+        </p:nvSpPr>
+        <p:spPr>
+          <a:xfrm>
+            <a:off x="822960" y="6035040"/>
+            <a:ext cx="9814255" cy="292608"/>
+          </a:xfrm>
+          <a:prstGeom prst="rect">
+            <a:avLst/>
+          </a:prstGeom>
+          <a:noFill/>
+          <a:ln/>
+        </p:spPr>
+        <p:txBody>
+          <a:bodyPr wrap="square" lIns="0" tIns="0" rIns="0" bIns="0" rtlCol="0" anchor="ctr">
+            <a:normAutofit/>
+          </a:bodyPr>
+          <a:lstStyle/>
+          <a:p>
+            <a:pPr indent="0" marL="0">
+              <a:buNone/>
+            </a:pPr>
+            <a:r>
+              <a:rPr lang="en-US" sz="1200" dirty="0">
+                <a:solidFill>
+                  <a:srgbClr val="A9A79F"/>
+                </a:solidFill>
+                <a:latin typeface="Arial" pitchFamily="34" charset="0"/>
+                <a:ea typeface="Arial" pitchFamily="34" charset="-122"/>
+                <a:cs typeface="Arial" pitchFamily="34" charset="-120"/>
+              </a:rPr>
+              <a:t>José Saramago, Memorial do Convento (1982). grafia da edição. Excerto para estudo.</a:t>
+            </a:r>
+            <a:endParaRPr lang="en-US" sz="1200" dirty="0"/>
+          </a:p>
+        </p:txBody>
+      </p:sp>
+    </p:spTree>
+  </p:cSld>
+  <p:clrMapOvr>
+    <a:masterClrMapping/>
+  </p:clrMapOvr>
+</p:sld>
+</file>
+
+<file path=ppt/slides/slide6.xml><?xml version="1.0" encoding="utf-8"?>
+<p:sld xmlns:a="http://schemas.openxmlformats.org/drawingml/2006/main" xmlns:r="http://schemas.openxmlformats.org/officeDocument/2006/relationships" xmlns:p="http://schemas.openxmlformats.org/presentationml/2006/main">
+  <p:cSld name="Slide 6">
+    <p:bg>
+      <p:bgPr>
+        <a:solidFill>
+          <a:srgbClr val="111111"/>
+        </a:solidFill>
+      </p:bgPr>
+    </p:bg>
+    <p:spTree>
+      <p:nvGrpSpPr>
+        <p:cNvPr id="1" name=""/>
+        <p:cNvGrpSpPr/>
+        <p:nvPr/>
+      </p:nvGrpSpPr>
+      <p:grpSpPr>
+        <a:xfrm>
+          <a:off x="0" y="0"/>
+          <a:ext cx="0" cy="0"/>
+          <a:chOff x="0" y="0"/>
+          <a:chExt cx="0" cy="0"/>
+        </a:xfrm>
+      </p:grpSpPr>
+      <p:sp>
+        <p:nvSpPr>
+          <p:cNvPr id="3" name="Text 0"/>
+          <p:cNvSpPr/>
+          <p:nvPr/>
+        </p:nvSpPr>
+        <p:spPr>
+          <a:xfrm>
+            <a:off x="10637215" y="384048"/>
+            <a:ext cx="731520" cy="365760"/>
+          </a:xfrm>
+          <a:prstGeom prst="rect">
+            <a:avLst/>
+          </a:prstGeom>
+          <a:noFill/>
+          <a:ln/>
+        </p:spPr>
+        <p:txBody>
+          <a:bodyPr wrap="square" lIns="0" tIns="0" rIns="0" bIns="0" rtlCol="0" anchor="ctr"/>
+          <a:lstStyle/>
+          <a:p>
+            <a:pPr algn="r" indent="0" marL="0">
+              <a:buNone/>
+            </a:pPr>
+            <a:r>
+              <a:rPr lang="en-US" sz="1200" b="1" spc="300" kern="0" dirty="0">
+                <a:solidFill>
+                  <a:srgbClr val="A9A79F"/>
+                </a:solidFill>
+                <a:latin typeface="Arial" pitchFamily="34" charset="0"/>
+                <a:ea typeface="Arial" pitchFamily="34" charset="-122"/>
+                <a:cs typeface="Arial" pitchFamily="34" charset="-120"/>
+              </a:rPr>
+              <a:t>EPI</a:t>
+            </a:r>
+            <a:endParaRPr lang="en-US" sz="1200" dirty="0"/>
+          </a:p>
+        </p:txBody>
+      </p:sp>
+      <p:sp>
+        <p:nvSpPr>
+          <p:cNvPr id="4" name="Text 1"/>
+          <p:cNvSpPr/>
+          <p:nvPr/>
+        </p:nvSpPr>
+        <p:spPr>
+          <a:xfrm>
+            <a:off x="822960" y="6400800"/>
+            <a:ext cx="9631375" cy="274320"/>
+          </a:xfrm>
+          <a:prstGeom prst="rect">
+            <a:avLst/>
+          </a:prstGeom>
+          <a:noFill/>
+          <a:ln/>
+        </p:spPr>
+        <p:txBody>
+          <a:bodyPr wrap="square" lIns="0" tIns="0" rIns="0" bIns="0" rtlCol="0" anchor="ctr"/>
+          <a:lstStyle/>
+          <a:p>
+            <a:pPr indent="0" marL="0">
+              <a:buNone/>
+            </a:pPr>
+            <a:r>
+              <a:rPr lang="en-US" sz="1000" dirty="0">
+                <a:solidFill>
+                  <a:srgbClr val="A9A79F"/>
+                </a:solidFill>
+                <a:latin typeface="Arial" pitchFamily="34" charset="0"/>
+                <a:ea typeface="Arial" pitchFamily="34" charset="-122"/>
+                <a:cs typeface="Arial" pitchFamily="34" charset="-120"/>
+              </a:rPr>
+              <a:t>Lição M9-F05, Os que carregaram a pedra</a:t>
+            </a:r>
+            <a:endParaRPr lang="en-US" sz="1000" dirty="0"/>
+          </a:p>
+        </p:txBody>
+      </p:sp>
+      <p:sp>
+        <p:nvSpPr>
+          <p:cNvPr id="5" name="Text 2"/>
+          <p:cNvSpPr/>
+          <p:nvPr/>
+        </p:nvSpPr>
+        <p:spPr>
+          <a:xfrm>
+            <a:off x="10637215" y="6400800"/>
+            <a:ext cx="731520" cy="274320"/>
+          </a:xfrm>
+          <a:prstGeom prst="rect">
+            <a:avLst/>
+          </a:prstGeom>
+          <a:noFill/>
+          <a:ln/>
+        </p:spPr>
+        <p:txBody>
+          <a:bodyPr wrap="square" lIns="0" tIns="0" rIns="0" bIns="0" rtlCol="0" anchor="ctr"/>
+          <a:lstStyle/>
+          <a:p>
+            <a:pPr algn="r" indent="0" marL="0">
+              <a:buNone/>
+            </a:pPr>
+            <a:r>
+              <a:rPr lang="en-US" sz="1000" dirty="0">
+                <a:solidFill>
+                  <a:srgbClr val="A9A79F"/>
+                </a:solidFill>
+                <a:latin typeface="Arial" pitchFamily="34" charset="0"/>
+                <a:ea typeface="Arial" pitchFamily="34" charset="-122"/>
+                <a:cs typeface="Arial" pitchFamily="34" charset="-120"/>
+              </a:rPr>
+              <a:t>6</a:t>
+            </a:r>
+            <a:endParaRPr lang="en-US" sz="1000" dirty="0"/>
+          </a:p>
+        </p:txBody>
+      </p:sp>
+      <p:pic>
+        <p:nvPicPr>
+          <p:cNvPr id="6" name="Image 0" descr="/home/user/epi-portugues-fontes/_interno/biblioteca-imagens/fontes/oliveira-milenar-constancia.jpg">    </p:cNvPr>
+          <p:cNvPicPr>
+            <a:picLocks noChangeAspect="1"/>
+          </p:cNvPicPr>
+          <p:nvPr/>
+        </p:nvPicPr>
+        <p:blipFill>
+          <a:blip r:embed="rId1">
+            <a:alphaModFix amt="8000"/>
+          </a:blip>
+          <a:srcRect l="0" r="0" t="0" b="0"/>
+          <a:stretch/>
+        </p:blipFill>
+        <p:spPr>
+          <a:xfrm>
+            <a:off x="0" y="0"/>
+            <a:ext cx="12191695" cy="6858000"/>
+          </a:xfrm>
+          <a:prstGeom prst="rect">
+            <a:avLst/>
+          </a:prstGeom>
+        </p:spPr>
+      </p:pic>
+      <p:sp>
+        <p:nvSpPr>
+          <p:cNvPr id="7" name="Shape 3"/>
+          <p:cNvSpPr/>
+          <p:nvPr/>
+        </p:nvSpPr>
+        <p:spPr>
+          <a:xfrm>
+            <a:off x="822960" y="502920"/>
+            <a:ext cx="201168" cy="201168"/>
+          </a:xfrm>
+          <a:prstGeom prst="ellipse">
+            <a:avLst/>
+          </a:prstGeom>
+          <a:ln w="19050">
+            <a:solidFill>
+              <a:srgbClr val="F2F0EA"/>
+            </a:solidFill>
+            <a:prstDash val="solid"/>
+          </a:ln>
+        </p:spPr>
+      </p:sp>
+      <p:sp>
+        <p:nvSpPr>
+          <p:cNvPr id="8" name="Text 4"/>
+          <p:cNvSpPr/>
+          <p:nvPr/>
+        </p:nvSpPr>
+        <p:spPr>
+          <a:xfrm>
+            <a:off x="1188720" y="457200"/>
+            <a:ext cx="9448495" cy="292608"/>
+          </a:xfrm>
+          <a:prstGeom prst="rect">
+            <a:avLst/>
+          </a:prstGeom>
+          <a:noFill/>
+          <a:ln/>
+        </p:spPr>
+        <p:txBody>
+          <a:bodyPr wrap="square" lIns="0" tIns="0" rIns="0" bIns="0" rtlCol="0" anchor="ctr"/>
+          <a:lstStyle/>
+          <a:p>
+            <a:pPr indent="0" marL="0">
+              <a:buNone/>
+            </a:pPr>
+            <a:r>
+              <a:rPr lang="en-US" sz="1100" b="1" spc="250" kern="0" dirty="0">
+                <a:solidFill>
+                  <a:srgbClr val="A9A79F"/>
+                </a:solidFill>
+                <a:latin typeface="Arial" pitchFamily="34" charset="0"/>
+                <a:ea typeface="Arial" pitchFamily="34" charset="-122"/>
+                <a:cs typeface="Arial" pitchFamily="34" charset="-120"/>
+              </a:rPr>
+              <a:t>LER: A PRINCESA NA ESTRADA (2 DE 2)</a:t>
+            </a:r>
+            <a:endParaRPr lang="en-US" sz="1100" dirty="0"/>
+          </a:p>
+        </p:txBody>
+      </p:sp>
+      <p:sp>
+        <p:nvSpPr>
+          <p:cNvPr id="9" name="Text 5"/>
+          <p:cNvSpPr/>
+          <p:nvPr/>
+        </p:nvSpPr>
+        <p:spPr>
+          <a:xfrm>
+            <a:off x="822960" y="1005840"/>
+            <a:ext cx="9814255" cy="4937760"/>
+          </a:xfrm>
+          <a:prstGeom prst="rect">
+            <a:avLst/>
+          </a:prstGeom>
+          <a:noFill/>
+          <a:ln/>
+        </p:spPr>
+        <p:txBody>
+          <a:bodyPr wrap="square" lIns="0" tIns="0" rIns="0" bIns="0" rtlCol="0" anchor="t">
+            <a:normAutofit/>
+          </a:bodyPr>
+          <a:lstStyle/>
+          <a:p>
+            <a:pPr indent="0" marL="0">
+              <a:lnSpc>
+                <a:spcPct val="125000"/>
+              </a:lnSpc>
+              <a:buNone/>
+            </a:pPr>
+            <a:r>
+              <a:rPr lang="en-US" sz="2200" dirty="0">
+                <a:solidFill>
+                  <a:srgbClr val="F2F0EA"/>
+                </a:solidFill>
+                <a:latin typeface="Georgia" pitchFamily="34" charset="0"/>
+                <a:ea typeface="Georgia" pitchFamily="34" charset="-122"/>
+                <a:cs typeface="Georgia" pitchFamily="34" charset="-120"/>
+              </a:rPr>
+              <a:t>Afirmou-se melhor a princesa, não era sonho nem delírio, e turbou-se de tão lastimoso espectáculo de grilhetas, em véspera das suas bodas, quando tudo devia ser ledice e regozijo, já não chegava o péssimo tempo que faz, esta chuva, este frio, teriam feito bem melhor se me casassem na Primavera. Cavalgava à estribeira um oficial, a quem D. Maria Bárbara ordenou que mandasse saber que homens eram aqueles e o que tinham feito, que crimes, e se iam para o Limoeiro ou para a África. Foi o oficial em pessoa, talvez por muito amar esta infanta, já sabemos que feia, já sabemos que bexigosa, e daí, e vai levada para Espanha, para longe do seu puro e desesperado amor, querer um plebeu a uma princesa, que loucura, foi e voltou, não a loucura, ele, e disse, Saiba vossa alteza que aqueles homens vão trabalhar para Mafra, nas obras do convento real, são do termo de Évora, gente de ofício, E vão atados porquê, Porque não vão de vontade, se os soltam fogem, Ah. Recostou-se a princesa nas almofadas, pensativa, enquanto o oficial repetia e gravava em seu coração as doces palavras trocadas, há-de ser velho, caduco e reformado, e ainda se recordará do mavioso diálogo, como estará ela agora, passados todos estes anos.</a:t>
+            </a:r>
+            <a:endParaRPr lang="en-US" sz="2200" dirty="0"/>
+          </a:p>
+          <a:p>
+            <a:pPr indent="0" marL="0">
+              <a:lnSpc>
+                <a:spcPct val="125000"/>
+              </a:lnSpc>
+              <a:buNone/>
+            </a:pPr>
+            <a:r>
+              <a:rPr lang="en-US" sz="2200" dirty="0">
+                <a:solidFill>
+                  <a:srgbClr val="F2F0EA"/>
+                </a:solidFill>
+                <a:latin typeface="Georgia" pitchFamily="34" charset="0"/>
+                <a:ea typeface="Georgia" pitchFamily="34" charset="-122"/>
+                <a:cs typeface="Georgia" pitchFamily="34" charset="-120"/>
+              </a:rPr>
+              <a:t>[…]</a:t>
+            </a:r>
+            <a:endParaRPr lang="en-US" sz="2200" dirty="0"/>
+          </a:p>
+        </p:txBody>
+      </p:sp>
+      <p:sp>
+        <p:nvSpPr>
+          <p:cNvPr id="10" name="Text 6"/>
+          <p:cNvSpPr/>
+          <p:nvPr/>
+        </p:nvSpPr>
+        <p:spPr>
+          <a:xfrm>
+            <a:off x="822960" y="6035040"/>
+            <a:ext cx="9814255" cy="292608"/>
+          </a:xfrm>
+          <a:prstGeom prst="rect">
+            <a:avLst/>
+          </a:prstGeom>
+          <a:noFill/>
+          <a:ln/>
+        </p:spPr>
+        <p:txBody>
+          <a:bodyPr wrap="square" lIns="0" tIns="0" rIns="0" bIns="0" rtlCol="0" anchor="ctr">
+            <a:normAutofit/>
+          </a:bodyPr>
+          <a:lstStyle/>
+          <a:p>
+            <a:pPr indent="0" marL="0">
+              <a:buNone/>
+            </a:pPr>
+            <a:r>
+              <a:rPr lang="en-US" sz="1200" dirty="0">
+                <a:solidFill>
+                  <a:srgbClr val="A9A79F"/>
+                </a:solidFill>
+                <a:latin typeface="Arial" pitchFamily="34" charset="0"/>
+                <a:ea typeface="Arial" pitchFamily="34" charset="-122"/>
+                <a:cs typeface="Arial" pitchFamily="34" charset="-120"/>
+              </a:rPr>
+              <a:t>José Saramago, Memorial do Convento (1982). grafia da edição. Excerto para estudo.</a:t>
+            </a:r>
+            <a:endParaRPr lang="en-US" sz="1200" dirty="0"/>
+          </a:p>
+        </p:txBody>
+      </p:sp>
+    </p:spTree>
+  </p:cSld>
+  <p:clrMapOvr>
+    <a:masterClrMapping/>
+  </p:clrMapOvr>
+</p:sld>
+</file>
+
+<file path=ppt/slides/slide7.xml><?xml version="1.0" encoding="utf-8"?>
+<p:sld xmlns:a="http://schemas.openxmlformats.org/drawingml/2006/main" xmlns:r="http://schemas.openxmlformats.org/officeDocument/2006/relationships" xmlns:p="http://schemas.openxmlformats.org/presentationml/2006/main">
+  <p:cSld name="Slide 7">
+    <p:bg>
+      <p:bgPr>
+        <a:solidFill>
+          <a:srgbClr val="111111"/>
+        </a:solidFill>
+      </p:bgPr>
+    </p:bg>
+    <p:spTree>
+      <p:nvGrpSpPr>
+        <p:cNvPr id="1" name=""/>
+        <p:cNvGrpSpPr/>
+        <p:nvPr/>
+      </p:nvGrpSpPr>
+      <p:grpSpPr>
+        <a:xfrm>
+          <a:off x="0" y="0"/>
+          <a:ext cx="0" cy="0"/>
+          <a:chOff x="0" y="0"/>
+          <a:chExt cx="0" cy="0"/>
+        </a:xfrm>
+      </p:grpSpPr>
+      <p:sp>
+        <p:nvSpPr>
+          <p:cNvPr id="3" name="Text 0"/>
+          <p:cNvSpPr/>
+          <p:nvPr/>
+        </p:nvSpPr>
+        <p:spPr>
+          <a:xfrm>
+            <a:off x="10637215" y="384048"/>
+            <a:ext cx="731520" cy="365760"/>
+          </a:xfrm>
+          <a:prstGeom prst="rect">
+            <a:avLst/>
+          </a:prstGeom>
+          <a:noFill/>
+          <a:ln/>
+        </p:spPr>
+        <p:txBody>
+          <a:bodyPr wrap="square" lIns="0" tIns="0" rIns="0" bIns="0" rtlCol="0" anchor="ctr"/>
+          <a:lstStyle/>
+          <a:p>
+            <a:pPr algn="r" indent="0" marL="0">
+              <a:buNone/>
+            </a:pPr>
+            <a:r>
+              <a:rPr lang="en-US" sz="1200" b="1" spc="300" kern="0" dirty="0">
+                <a:solidFill>
+                  <a:srgbClr val="A9A79F"/>
+                </a:solidFill>
+                <a:latin typeface="Arial" pitchFamily="34" charset="0"/>
+                <a:ea typeface="Arial" pitchFamily="34" charset="-122"/>
+                <a:cs typeface="Arial" pitchFamily="34" charset="-120"/>
+              </a:rPr>
+              <a:t>EPI</a:t>
+            </a:r>
+            <a:endParaRPr lang="en-US" sz="1200" dirty="0"/>
+          </a:p>
+        </p:txBody>
+      </p:sp>
+      <p:sp>
+        <p:nvSpPr>
+          <p:cNvPr id="4" name="Text 1"/>
+          <p:cNvSpPr/>
+          <p:nvPr/>
+        </p:nvSpPr>
+        <p:spPr>
+          <a:xfrm>
+            <a:off x="822960" y="6400800"/>
+            <a:ext cx="9631375" cy="274320"/>
+          </a:xfrm>
+          <a:prstGeom prst="rect">
+            <a:avLst/>
+          </a:prstGeom>
+          <a:noFill/>
+          <a:ln/>
+        </p:spPr>
+        <p:txBody>
+          <a:bodyPr wrap="square" lIns="0" tIns="0" rIns="0" bIns="0" rtlCol="0" anchor="ctr"/>
+          <a:lstStyle/>
+          <a:p>
+            <a:pPr indent="0" marL="0">
+              <a:buNone/>
+            </a:pPr>
+            <a:r>
+              <a:rPr lang="en-US" sz="1000" dirty="0">
+                <a:solidFill>
+                  <a:srgbClr val="A9A79F"/>
+                </a:solidFill>
+                <a:latin typeface="Arial" pitchFamily="34" charset="0"/>
+                <a:ea typeface="Arial" pitchFamily="34" charset="-122"/>
+                <a:cs typeface="Arial" pitchFamily="34" charset="-120"/>
+              </a:rPr>
+              <a:t>Lição M9-F05, Os que carregaram a pedra</a:t>
+            </a:r>
+            <a:endParaRPr lang="en-US" sz="1000" dirty="0"/>
+          </a:p>
+        </p:txBody>
+      </p:sp>
+      <p:sp>
+        <p:nvSpPr>
+          <p:cNvPr id="5" name="Text 2"/>
+          <p:cNvSpPr/>
+          <p:nvPr/>
+        </p:nvSpPr>
+        <p:spPr>
+          <a:xfrm>
+            <a:off x="10637215" y="6400800"/>
+            <a:ext cx="731520" cy="274320"/>
+          </a:xfrm>
+          <a:prstGeom prst="rect">
+            <a:avLst/>
+          </a:prstGeom>
+          <a:noFill/>
+          <a:ln/>
+        </p:spPr>
+        <p:txBody>
+          <a:bodyPr wrap="square" lIns="0" tIns="0" rIns="0" bIns="0" rtlCol="0" anchor="ctr"/>
+          <a:lstStyle/>
+          <a:p>
+            <a:pPr algn="r" indent="0" marL="0">
+              <a:buNone/>
+            </a:pPr>
+            <a:r>
+              <a:rPr lang="en-US" sz="1000" dirty="0">
+                <a:solidFill>
+                  <a:srgbClr val="A9A79F"/>
+                </a:solidFill>
+                <a:latin typeface="Arial" pitchFamily="34" charset="0"/>
+                <a:ea typeface="Arial" pitchFamily="34" charset="-122"/>
+                <a:cs typeface="Arial" pitchFamily="34" charset="-120"/>
+              </a:rPr>
+              <a:t>7</a:t>
+            </a:r>
+            <a:endParaRPr lang="en-US" sz="1000" dirty="0"/>
+          </a:p>
+        </p:txBody>
+      </p:sp>
+      <p:sp>
+        <p:nvSpPr>
+          <p:cNvPr id="6" name="Shape 3"/>
+          <p:cNvSpPr/>
+          <p:nvPr/>
+        </p:nvSpPr>
+        <p:spPr>
+          <a:xfrm>
+            <a:off x="822960" y="502920"/>
+            <a:ext cx="201168" cy="201168"/>
+          </a:xfrm>
+          <a:prstGeom prst="ellipse">
+            <a:avLst/>
+          </a:prstGeom>
+          <a:ln w="19050">
+            <a:solidFill>
+              <a:srgbClr val="F2F0EA"/>
+            </a:solidFill>
+            <a:prstDash val="solid"/>
+          </a:ln>
+        </p:spPr>
+      </p:sp>
+      <p:sp>
+        <p:nvSpPr>
+          <p:cNvPr id="7" name="Text 4"/>
+          <p:cNvSpPr/>
+          <p:nvPr/>
+        </p:nvSpPr>
+        <p:spPr>
+          <a:xfrm>
+            <a:off x="1188720" y="457200"/>
+            <a:ext cx="9448495" cy="292608"/>
+          </a:xfrm>
+          <a:prstGeom prst="rect">
+            <a:avLst/>
+          </a:prstGeom>
+          <a:noFill/>
+          <a:ln/>
+        </p:spPr>
+        <p:txBody>
+          <a:bodyPr wrap="square" lIns="0" tIns="0" rIns="0" bIns="0" rtlCol="0" anchor="ctr"/>
+          <a:lstStyle/>
+          <a:p>
+            <a:pPr indent="0" marL="0">
+              <a:buNone/>
+            </a:pPr>
+            <a:r>
+              <a:rPr lang="en-US" sz="1100" b="1" spc="250" kern="0" dirty="0">
+                <a:solidFill>
+                  <a:srgbClr val="A9A79F"/>
+                </a:solidFill>
+                <a:latin typeface="Arial" pitchFamily="34" charset="0"/>
+                <a:ea typeface="Arial" pitchFamily="34" charset="-122"/>
+                <a:cs typeface="Arial" pitchFamily="34" charset="-120"/>
+              </a:rPr>
+              <a:t>O ESSENCIAL</a:t>
             </a:r>
             <a:endParaRPr lang="en-US" sz="1100" dirty="0"/>
           </a:p>
@@ -3707,7 +5187,7 @@
                 <a:ea typeface="Arial" pitchFamily="34" charset="-122"/>
                 <a:cs typeface="Arial" pitchFamily="34" charset="-120"/>
               </a:rPr>
-              <a:t>Completa no caderno</a:t>
+              <a:t>Três coisas a fixar</a:t>
             </a:r>
             <a:endParaRPr lang="en-US" sz="3400" dirty="0"/>
           </a:p>
@@ -3738,9 +5218,632 @@
           </a:ln>
         </p:spPr>
       </p:sp>
+      <p:sp>
+        <p:nvSpPr>
+          <p:cNvPr id="10" name="Shape 7"/>
+          <p:cNvSpPr/>
+          <p:nvPr/>
+        </p:nvSpPr>
+        <p:spPr>
+          <a:xfrm>
+            <a:off x="1005840" y="2286000"/>
+            <a:ext cx="0" cy="2447544"/>
+          </a:xfrm>
+          <a:prstGeom prst="line">
+            <a:avLst/>
+          </a:prstGeom>
+          <a:noFill/>
+          <a:ln w="12700">
+            <a:solidFill>
+              <a:srgbClr val="A9A79F"/>
+            </a:solidFill>
+            <a:prstDash val="solid"/>
+          </a:ln>
+        </p:spPr>
+      </p:sp>
+      <p:sp>
+        <p:nvSpPr>
+          <p:cNvPr id="11" name="Shape 8"/>
+          <p:cNvSpPr/>
+          <p:nvPr/>
+        </p:nvSpPr>
+        <p:spPr>
+          <a:xfrm>
+            <a:off x="822960" y="2103120"/>
+            <a:ext cx="365760" cy="365760"/>
+          </a:xfrm>
+          <a:prstGeom prst="ellipse">
+            <a:avLst/>
+          </a:prstGeom>
+          <a:solidFill>
+            <a:srgbClr val="111111"/>
+          </a:solidFill>
+          <a:ln w="15875">
+            <a:solidFill>
+              <a:srgbClr val="F2F0EA"/>
+            </a:solidFill>
+            <a:prstDash val="solid"/>
+          </a:ln>
+        </p:spPr>
+      </p:sp>
+      <p:sp>
+        <p:nvSpPr>
+          <p:cNvPr id="12" name="Text 9"/>
+          <p:cNvSpPr/>
+          <p:nvPr/>
+        </p:nvSpPr>
+        <p:spPr>
+          <a:xfrm>
+            <a:off x="822960" y="2103120"/>
+            <a:ext cx="365760" cy="365760"/>
+          </a:xfrm>
+          <a:prstGeom prst="rect">
+            <a:avLst/>
+          </a:prstGeom>
+          <a:noFill/>
+          <a:ln/>
+        </p:spPr>
+        <p:txBody>
+          <a:bodyPr wrap="square" lIns="0" tIns="0" rIns="0" bIns="0" rtlCol="0" anchor="ctr"/>
+          <a:lstStyle/>
+          <a:p>
+            <a:pPr algn="ctr" indent="0" marL="0">
+              <a:buNone/>
+            </a:pPr>
+            <a:r>
+              <a:rPr lang="en-US" sz="1300" b="1" dirty="0">
+                <a:solidFill>
+                  <a:srgbClr val="F2F0EA"/>
+                </a:solidFill>
+                <a:latin typeface="Arial" pitchFamily="34" charset="0"/>
+                <a:ea typeface="Arial" pitchFamily="34" charset="-122"/>
+                <a:cs typeface="Arial" pitchFamily="34" charset="-120"/>
+              </a:rPr>
+              <a:t>1</a:t>
+            </a:r>
+            <a:endParaRPr lang="en-US" sz="1300" dirty="0"/>
+          </a:p>
+        </p:txBody>
+      </p:sp>
+      <p:sp>
+        <p:nvSpPr>
+          <p:cNvPr id="13" name="Text 10"/>
+          <p:cNvSpPr/>
+          <p:nvPr/>
+        </p:nvSpPr>
+        <p:spPr>
+          <a:xfrm>
+            <a:off x="1417320" y="2112264"/>
+            <a:ext cx="9174175" cy="1223772"/>
+          </a:xfrm>
+          <a:prstGeom prst="rect">
+            <a:avLst/>
+          </a:prstGeom>
+          <a:noFill/>
+          <a:ln/>
+        </p:spPr>
+        <p:txBody>
+          <a:bodyPr wrap="square" lIns="0" tIns="0" rIns="0" bIns="0" rtlCol="0" anchor="t">
+            <a:normAutofit/>
+          </a:bodyPr>
+          <a:lstStyle/>
+          <a:p>
+            <a:pPr indent="0" marL="0">
+              <a:lnSpc>
+                <a:spcPct val="105000"/>
+              </a:lnSpc>
+              <a:buNone/>
+            </a:pPr>
+            <a:r>
+              <a:rPr lang="en-US" sz="2200" dirty="0">
+                <a:solidFill>
+                  <a:srgbClr val="F2F0EA"/>
+                </a:solidFill>
+                <a:latin typeface="Arial" pitchFamily="34" charset="0"/>
+                <a:ea typeface="Arial" pitchFamily="34" charset="-122"/>
+                <a:cs typeface="Arial" pitchFamily="34" charset="-120"/>
+              </a:rPr>
+              <a:t>O romance dá nome e voz a quem a história oficial esqueceu: os homens que cortaram, levaram e ergueram a pedra do convento de Mafra.</a:t>
+            </a:r>
+            <a:endParaRPr lang="en-US" sz="2200" dirty="0"/>
+          </a:p>
+        </p:txBody>
+      </p:sp>
+      <p:sp>
+        <p:nvSpPr>
+          <p:cNvPr id="14" name="Shape 11"/>
+          <p:cNvSpPr/>
+          <p:nvPr/>
+        </p:nvSpPr>
+        <p:spPr>
+          <a:xfrm>
+            <a:off x="822960" y="3326892"/>
+            <a:ext cx="365760" cy="365760"/>
+          </a:xfrm>
+          <a:prstGeom prst="ellipse">
+            <a:avLst/>
+          </a:prstGeom>
+          <a:solidFill>
+            <a:srgbClr val="111111"/>
+          </a:solidFill>
+          <a:ln w="15875">
+            <a:solidFill>
+              <a:srgbClr val="F2F0EA"/>
+            </a:solidFill>
+            <a:prstDash val="solid"/>
+          </a:ln>
+        </p:spPr>
+      </p:sp>
+      <p:sp>
+        <p:nvSpPr>
+          <p:cNvPr id="15" name="Text 12"/>
+          <p:cNvSpPr/>
+          <p:nvPr/>
+        </p:nvSpPr>
+        <p:spPr>
+          <a:xfrm>
+            <a:off x="822960" y="3326892"/>
+            <a:ext cx="365760" cy="365760"/>
+          </a:xfrm>
+          <a:prstGeom prst="rect">
+            <a:avLst/>
+          </a:prstGeom>
+          <a:noFill/>
+          <a:ln/>
+        </p:spPr>
+        <p:txBody>
+          <a:bodyPr wrap="square" lIns="0" tIns="0" rIns="0" bIns="0" rtlCol="0" anchor="ctr"/>
+          <a:lstStyle/>
+          <a:p>
+            <a:pPr algn="ctr" indent="0" marL="0">
+              <a:buNone/>
+            </a:pPr>
+            <a:r>
+              <a:rPr lang="en-US" sz="1300" b="1" dirty="0">
+                <a:solidFill>
+                  <a:srgbClr val="F2F0EA"/>
+                </a:solidFill>
+                <a:latin typeface="Arial" pitchFamily="34" charset="0"/>
+                <a:ea typeface="Arial" pitchFamily="34" charset="-122"/>
+                <a:cs typeface="Arial" pitchFamily="34" charset="-120"/>
+              </a:rPr>
+              <a:t>2</a:t>
+            </a:r>
+            <a:endParaRPr lang="en-US" sz="1300" dirty="0"/>
+          </a:p>
+        </p:txBody>
+      </p:sp>
+      <p:sp>
+        <p:nvSpPr>
+          <p:cNvPr id="16" name="Text 13"/>
+          <p:cNvSpPr/>
+          <p:nvPr/>
+        </p:nvSpPr>
+        <p:spPr>
+          <a:xfrm>
+            <a:off x="1417320" y="3336036"/>
+            <a:ext cx="9174175" cy="1223772"/>
+          </a:xfrm>
+          <a:prstGeom prst="rect">
+            <a:avLst/>
+          </a:prstGeom>
+          <a:noFill/>
+          <a:ln/>
+        </p:spPr>
+        <p:txBody>
+          <a:bodyPr wrap="square" lIns="0" tIns="0" rIns="0" bIns="0" rtlCol="0" anchor="t">
+            <a:normAutofit/>
+          </a:bodyPr>
+          <a:lstStyle/>
+          <a:p>
+            <a:pPr indent="0" marL="0">
+              <a:lnSpc>
+                <a:spcPct val="105000"/>
+              </a:lnSpc>
+              <a:buNone/>
+            </a:pPr>
+            <a:r>
+              <a:rPr lang="en-US" sz="2200" dirty="0">
+                <a:solidFill>
+                  <a:srgbClr val="F2F0EA"/>
+                </a:solidFill>
+                <a:latin typeface="Arial" pitchFamily="34" charset="0"/>
+                <a:ea typeface="Arial" pitchFamily="34" charset="-122"/>
+                <a:cs typeface="Arial" pitchFamily="34" charset="-120"/>
+              </a:rPr>
+              <a:t>Em grupo, criam um produto do vosso curso que faça o mesmo por um grupo de anónimos, do romance ou de hoje, com três citações curtas e a página de cada uma.</a:t>
+            </a:r>
+            <a:endParaRPr lang="en-US" sz="2200" dirty="0"/>
+          </a:p>
+        </p:txBody>
+      </p:sp>
+      <p:sp>
+        <p:nvSpPr>
+          <p:cNvPr id="17" name="Shape 14"/>
+          <p:cNvSpPr/>
+          <p:nvPr/>
+        </p:nvSpPr>
+        <p:spPr>
+          <a:xfrm>
+            <a:off x="822960" y="4550664"/>
+            <a:ext cx="365760" cy="365760"/>
+          </a:xfrm>
+          <a:prstGeom prst="ellipse">
+            <a:avLst/>
+          </a:prstGeom>
+          <a:solidFill>
+            <a:srgbClr val="111111"/>
+          </a:solidFill>
+          <a:ln w="15875">
+            <a:solidFill>
+              <a:srgbClr val="F2F0EA"/>
+            </a:solidFill>
+            <a:prstDash val="solid"/>
+          </a:ln>
+        </p:spPr>
+      </p:sp>
+      <p:sp>
+        <p:nvSpPr>
+          <p:cNvPr id="18" name="Text 15"/>
+          <p:cNvSpPr/>
+          <p:nvPr/>
+        </p:nvSpPr>
+        <p:spPr>
+          <a:xfrm>
+            <a:off x="822960" y="4550664"/>
+            <a:ext cx="365760" cy="365760"/>
+          </a:xfrm>
+          <a:prstGeom prst="rect">
+            <a:avLst/>
+          </a:prstGeom>
+          <a:noFill/>
+          <a:ln/>
+        </p:spPr>
+        <p:txBody>
+          <a:bodyPr wrap="square" lIns="0" tIns="0" rIns="0" bIns="0" rtlCol="0" anchor="ctr"/>
+          <a:lstStyle/>
+          <a:p>
+            <a:pPr algn="ctr" indent="0" marL="0">
+              <a:buNone/>
+            </a:pPr>
+            <a:r>
+              <a:rPr lang="en-US" sz="1300" b="1" dirty="0">
+                <a:solidFill>
+                  <a:srgbClr val="F2F0EA"/>
+                </a:solidFill>
+                <a:latin typeface="Arial" pitchFamily="34" charset="0"/>
+                <a:ea typeface="Arial" pitchFamily="34" charset="-122"/>
+                <a:cs typeface="Arial" pitchFamily="34" charset="-120"/>
+              </a:rPr>
+              <a:t>3</a:t>
+            </a:r>
+            <a:endParaRPr lang="en-US" sz="1300" dirty="0"/>
+          </a:p>
+        </p:txBody>
+      </p:sp>
+      <p:sp>
+        <p:nvSpPr>
+          <p:cNvPr id="19" name="Text 16"/>
+          <p:cNvSpPr/>
+          <p:nvPr/>
+        </p:nvSpPr>
+        <p:spPr>
+          <a:xfrm>
+            <a:off x="1417320" y="4559808"/>
+            <a:ext cx="9174175" cy="1223772"/>
+          </a:xfrm>
+          <a:prstGeom prst="rect">
+            <a:avLst/>
+          </a:prstGeom>
+          <a:noFill/>
+          <a:ln/>
+        </p:spPr>
+        <p:txBody>
+          <a:bodyPr wrap="square" lIns="0" tIns="0" rIns="0" bIns="0" rtlCol="0" anchor="t">
+            <a:normAutofit/>
+          </a:bodyPr>
+          <a:lstStyle/>
+          <a:p>
+            <a:pPr indent="0" marL="0">
+              <a:lnSpc>
+                <a:spcPct val="105000"/>
+              </a:lnSpc>
+              <a:buNone/>
+            </a:pPr>
+            <a:r>
+              <a:rPr lang="en-US" sz="2200" dirty="0">
+                <a:solidFill>
+                  <a:srgbClr val="F2F0EA"/>
+                </a:solidFill>
+                <a:latin typeface="Arial" pitchFamily="34" charset="0"/>
+                <a:ea typeface="Arial" pitchFamily="34" charset="-122"/>
+                <a:cs typeface="Arial" pitchFamily="34" charset="-120"/>
+              </a:rPr>
+              <a:t>Vale 25 % da nota: apresentação de sete minutos e memória descritiva individual de 100 a 150 palavras; nenhuma pessoa real pode aparecer reconhecível sem autorização.</a:t>
+            </a:r>
+            <a:endParaRPr lang="en-US" sz="2200" dirty="0"/>
+          </a:p>
+        </p:txBody>
+      </p:sp>
+    </p:spTree>
+  </p:cSld>
+  <p:clrMapOvr>
+    <a:masterClrMapping/>
+  </p:clrMapOvr>
+</p:sld>
+</file>
+
+<file path=ppt/slides/slide8.xml><?xml version="1.0" encoding="utf-8"?>
+<p:sld xmlns:a="http://schemas.openxmlformats.org/drawingml/2006/main" xmlns:r="http://schemas.openxmlformats.org/officeDocument/2006/relationships" xmlns:p="http://schemas.openxmlformats.org/presentationml/2006/main">
+  <p:cSld name="Slide 8">
+    <p:bg>
+      <p:bgPr>
+        <a:solidFill>
+          <a:srgbClr val="111111"/>
+        </a:solidFill>
+      </p:bgPr>
+    </p:bg>
+    <p:spTree>
+      <p:nvGrpSpPr>
+        <p:cNvPr id="1" name=""/>
+        <p:cNvGrpSpPr/>
+        <p:nvPr/>
+      </p:nvGrpSpPr>
+      <p:grpSpPr>
+        <a:xfrm>
+          <a:off x="0" y="0"/>
+          <a:ext cx="0" cy="0"/>
+          <a:chOff x="0" y="0"/>
+          <a:chExt cx="0" cy="0"/>
+        </a:xfrm>
+      </p:grpSpPr>
+      <p:sp>
+        <p:nvSpPr>
+          <p:cNvPr id="3" name="Text 0"/>
+          <p:cNvSpPr/>
+          <p:nvPr/>
+        </p:nvSpPr>
+        <p:spPr>
+          <a:xfrm>
+            <a:off x="10637215" y="384048"/>
+            <a:ext cx="731520" cy="365760"/>
+          </a:xfrm>
+          <a:prstGeom prst="rect">
+            <a:avLst/>
+          </a:prstGeom>
+          <a:noFill/>
+          <a:ln/>
+        </p:spPr>
+        <p:txBody>
+          <a:bodyPr wrap="square" lIns="0" tIns="0" rIns="0" bIns="0" rtlCol="0" anchor="ctr"/>
+          <a:lstStyle/>
+          <a:p>
+            <a:pPr algn="r" indent="0" marL="0">
+              <a:buNone/>
+            </a:pPr>
+            <a:r>
+              <a:rPr lang="en-US" sz="1200" b="1" spc="300" kern="0" dirty="0">
+                <a:solidFill>
+                  <a:srgbClr val="A9A79F"/>
+                </a:solidFill>
+                <a:latin typeface="Arial" pitchFamily="34" charset="0"/>
+                <a:ea typeface="Arial" pitchFamily="34" charset="-122"/>
+                <a:cs typeface="Arial" pitchFamily="34" charset="-120"/>
+              </a:rPr>
+              <a:t>EPI</a:t>
+            </a:r>
+            <a:endParaRPr lang="en-US" sz="1200" dirty="0"/>
+          </a:p>
+        </p:txBody>
+      </p:sp>
+      <p:sp>
+        <p:nvSpPr>
+          <p:cNvPr id="4" name="Text 1"/>
+          <p:cNvSpPr/>
+          <p:nvPr/>
+        </p:nvSpPr>
+        <p:spPr>
+          <a:xfrm>
+            <a:off x="822960" y="6400800"/>
+            <a:ext cx="9631375" cy="274320"/>
+          </a:xfrm>
+          <a:prstGeom prst="rect">
+            <a:avLst/>
+          </a:prstGeom>
+          <a:noFill/>
+          <a:ln/>
+        </p:spPr>
+        <p:txBody>
+          <a:bodyPr wrap="square" lIns="0" tIns="0" rIns="0" bIns="0" rtlCol="0" anchor="ctr"/>
+          <a:lstStyle/>
+          <a:p>
+            <a:pPr indent="0" marL="0">
+              <a:buNone/>
+            </a:pPr>
+            <a:r>
+              <a:rPr lang="en-US" sz="1000" dirty="0">
+                <a:solidFill>
+                  <a:srgbClr val="A9A79F"/>
+                </a:solidFill>
+                <a:latin typeface="Arial" pitchFamily="34" charset="0"/>
+                <a:ea typeface="Arial" pitchFamily="34" charset="-122"/>
+                <a:cs typeface="Arial" pitchFamily="34" charset="-120"/>
+              </a:rPr>
+              <a:t>Lição M9-F05, Os que carregaram a pedra</a:t>
+            </a:r>
+            <a:endParaRPr lang="en-US" sz="1000" dirty="0"/>
+          </a:p>
+        </p:txBody>
+      </p:sp>
+      <p:sp>
+        <p:nvSpPr>
+          <p:cNvPr id="5" name="Text 2"/>
+          <p:cNvSpPr/>
+          <p:nvPr/>
+        </p:nvSpPr>
+        <p:spPr>
+          <a:xfrm>
+            <a:off x="10637215" y="6400800"/>
+            <a:ext cx="731520" cy="274320"/>
+          </a:xfrm>
+          <a:prstGeom prst="rect">
+            <a:avLst/>
+          </a:prstGeom>
+          <a:noFill/>
+          <a:ln/>
+        </p:spPr>
+        <p:txBody>
+          <a:bodyPr wrap="square" lIns="0" tIns="0" rIns="0" bIns="0" rtlCol="0" anchor="ctr"/>
+          <a:lstStyle/>
+          <a:p>
+            <a:pPr algn="r" indent="0" marL="0">
+              <a:buNone/>
+            </a:pPr>
+            <a:r>
+              <a:rPr lang="en-US" sz="1000" dirty="0">
+                <a:solidFill>
+                  <a:srgbClr val="A9A79F"/>
+                </a:solidFill>
+                <a:latin typeface="Arial" pitchFamily="34" charset="0"/>
+                <a:ea typeface="Arial" pitchFamily="34" charset="-122"/>
+                <a:cs typeface="Arial" pitchFamily="34" charset="-120"/>
+              </a:rPr>
+              <a:t>8</a:t>
+            </a:r>
+            <a:endParaRPr lang="en-US" sz="1000" dirty="0"/>
+          </a:p>
+        </p:txBody>
+      </p:sp>
+      <p:sp>
+        <p:nvSpPr>
+          <p:cNvPr id="6" name="Shape 3"/>
+          <p:cNvSpPr/>
+          <p:nvPr/>
+        </p:nvSpPr>
+        <p:spPr>
+          <a:xfrm>
+            <a:off x="822960" y="502920"/>
+            <a:ext cx="201168" cy="201168"/>
+          </a:xfrm>
+          <a:prstGeom prst="rect">
+            <a:avLst/>
+          </a:prstGeom>
+          <a:ln w="19050">
+            <a:solidFill>
+              <a:srgbClr val="F2F0EA"/>
+            </a:solidFill>
+            <a:prstDash val="solid"/>
+          </a:ln>
+        </p:spPr>
+      </p:sp>
+      <p:sp>
+        <p:nvSpPr>
+          <p:cNvPr id="7" name="Text 4"/>
+          <p:cNvSpPr/>
+          <p:nvPr/>
+        </p:nvSpPr>
+        <p:spPr>
+          <a:xfrm>
+            <a:off x="1188720" y="457200"/>
+            <a:ext cx="9448495" cy="292608"/>
+          </a:xfrm>
+          <a:prstGeom prst="rect">
+            <a:avLst/>
+          </a:prstGeom>
+          <a:noFill/>
+          <a:ln/>
+        </p:spPr>
+        <p:txBody>
+          <a:bodyPr wrap="square" lIns="0" tIns="0" rIns="0" bIns="0" rtlCol="0" anchor="ctr"/>
+          <a:lstStyle/>
+          <a:p>
+            <a:pPr indent="0" marL="0">
+              <a:buNone/>
+            </a:pPr>
+            <a:r>
+              <a:rPr lang="en-US" sz="1100" b="1" spc="250" kern="0" dirty="0">
+                <a:solidFill>
+                  <a:srgbClr val="A9A79F"/>
+                </a:solidFill>
+                <a:latin typeface="Arial" pitchFamily="34" charset="0"/>
+                <a:ea typeface="Arial" pitchFamily="34" charset="-122"/>
+                <a:cs typeface="Arial" pitchFamily="34" charset="-120"/>
+              </a:rPr>
+              <a:t>VER, E COMPLETAR NO CADERNO</a:t>
+            </a:r>
+            <a:endParaRPr lang="en-US" sz="1100" dirty="0"/>
+          </a:p>
+        </p:txBody>
+      </p:sp>
+      <p:sp>
+        <p:nvSpPr>
+          <p:cNvPr id="8" name="Text 5"/>
+          <p:cNvSpPr/>
+          <p:nvPr/>
+        </p:nvSpPr>
+        <p:spPr>
+          <a:xfrm>
+            <a:off x="822960" y="868680"/>
+            <a:ext cx="9814255" cy="822960"/>
+          </a:xfrm>
+          <a:prstGeom prst="rect">
+            <a:avLst/>
+          </a:prstGeom>
+          <a:noFill/>
+          <a:ln/>
+        </p:spPr>
+        <p:txBody>
+          <a:bodyPr wrap="square" lIns="0" tIns="0" rIns="0" bIns="0" rtlCol="0" anchor="b">
+            <a:normAutofit/>
+          </a:bodyPr>
+          <a:lstStyle/>
+          <a:p>
+            <a:pPr indent="0" marL="0">
+              <a:buNone/>
+            </a:pPr>
+            <a:r>
+              <a:rPr lang="en-US" sz="3400" dirty="0">
+                <a:solidFill>
+                  <a:srgbClr val="F2F0EA"/>
+                </a:solidFill>
+                <a:latin typeface="Arial" pitchFamily="34" charset="0"/>
+                <a:ea typeface="Arial" pitchFamily="34" charset="-122"/>
+                <a:cs typeface="Arial" pitchFamily="34" charset="-120"/>
+              </a:rPr>
+              <a:t>Completa no caderno</a:t>
+            </a:r>
+            <a:endParaRPr lang="en-US" sz="3400" dirty="0"/>
+          </a:p>
+        </p:txBody>
+      </p:sp>
+      <p:sp>
+        <p:nvSpPr>
+          <p:cNvPr id="9" name="Shape 6"/>
+          <p:cNvSpPr/>
+          <p:nvPr/>
+        </p:nvSpPr>
+        <p:spPr>
+          <a:xfrm>
+            <a:off x="822960" y="1746504"/>
+            <a:ext cx="640080" cy="64008"/>
+          </a:xfrm>
+          <a:prstGeom prst="rect">
+            <a:avLst/>
+          </a:prstGeom>
+          <a:solidFill>
+            <a:srgbClr val="E4555C"/>
+          </a:solidFill>
+          <a:ln w="12700">
+            <a:solidFill>
+              <a:srgbClr val="E4555C"/>
+            </a:solidFill>
+            <a:prstDash val="solid"/>
+          </a:ln>
+        </p:spPr>
+      </p:sp>
       <p:graphicFrame>
         <p:nvGraphicFramePr>
-          <p:cNvPr id="6" name="Table 0"/>
+          <p:cNvPr id="9" name="Table 0"/>
           <p:cNvGraphicFramePr>
             <a:graphicFrameLocks noGrp="1"/>
           </p:cNvGraphicFramePr>
@@ -4385,1778 +6488,6 @@
 </p:sld>
 </file>
 
-<file path=ppt/slides/slide6.xml><?xml version="1.0" encoding="utf-8"?>
-<p:sld xmlns:a="http://schemas.openxmlformats.org/drawingml/2006/main" xmlns:r="http://schemas.openxmlformats.org/officeDocument/2006/relationships" xmlns:p="http://schemas.openxmlformats.org/presentationml/2006/main">
-  <p:cSld name="Slide 6">
-    <p:bg>
-      <p:bgPr>
-        <a:solidFill>
-          <a:srgbClr val="111111"/>
-        </a:solidFill>
-      </p:bgPr>
-    </p:bg>
-    <p:spTree>
-      <p:nvGrpSpPr>
-        <p:cNvPr id="1" name=""/>
-        <p:cNvGrpSpPr/>
-        <p:nvPr/>
-      </p:nvGrpSpPr>
-      <p:grpSpPr>
-        <a:xfrm>
-          <a:off x="0" y="0"/>
-          <a:ext cx="0" cy="0"/>
-          <a:chOff x="0" y="0"/>
-          <a:chExt cx="0" cy="0"/>
-        </a:xfrm>
-      </p:grpSpPr>
-      <p:sp>
-        <p:nvSpPr>
-          <p:cNvPr id="3" name="Text 0"/>
-          <p:cNvSpPr/>
-          <p:nvPr/>
-        </p:nvSpPr>
-        <p:spPr>
-          <a:xfrm>
-            <a:off x="10637215" y="384048"/>
-            <a:ext cx="731520" cy="365760"/>
-          </a:xfrm>
-          <a:prstGeom prst="rect">
-            <a:avLst/>
-          </a:prstGeom>
-          <a:noFill/>
-          <a:ln/>
-        </p:spPr>
-        <p:txBody>
-          <a:bodyPr wrap="square" lIns="0" tIns="0" rIns="0" bIns="0" rtlCol="0" anchor="ctr"/>
-          <a:lstStyle/>
-          <a:p>
-            <a:pPr algn="r" indent="0" marL="0">
-              <a:buNone/>
-            </a:pPr>
-            <a:r>
-              <a:rPr lang="en-US" sz="1200" b="1" spc="300" kern="0" dirty="0">
-                <a:solidFill>
-                  <a:srgbClr val="A9A79F"/>
-                </a:solidFill>
-                <a:latin typeface="Arial" pitchFamily="34" charset="0"/>
-                <a:ea typeface="Arial" pitchFamily="34" charset="-122"/>
-                <a:cs typeface="Arial" pitchFamily="34" charset="-120"/>
-              </a:rPr>
-              <a:t>EPI</a:t>
-            </a:r>
-            <a:endParaRPr lang="en-US" sz="1200" dirty="0"/>
-          </a:p>
-        </p:txBody>
-      </p:sp>
-      <p:sp>
-        <p:nvSpPr>
-          <p:cNvPr id="4" name="Text 1"/>
-          <p:cNvSpPr/>
-          <p:nvPr/>
-        </p:nvSpPr>
-        <p:spPr>
-          <a:xfrm>
-            <a:off x="822960" y="6400800"/>
-            <a:ext cx="9631375" cy="274320"/>
-          </a:xfrm>
-          <a:prstGeom prst="rect">
-            <a:avLst/>
-          </a:prstGeom>
-          <a:noFill/>
-          <a:ln/>
-        </p:spPr>
-        <p:txBody>
-          <a:bodyPr wrap="square" lIns="0" tIns="0" rIns="0" bIns="0" rtlCol="0" anchor="ctr"/>
-          <a:lstStyle/>
-          <a:p>
-            <a:pPr indent="0" marL="0">
-              <a:buNone/>
-            </a:pPr>
-            <a:r>
-              <a:rPr lang="en-US" sz="1000" dirty="0">
-                <a:solidFill>
-                  <a:srgbClr val="A9A79F"/>
-                </a:solidFill>
-                <a:latin typeface="Arial" pitchFamily="34" charset="0"/>
-                <a:ea typeface="Arial" pitchFamily="34" charset="-122"/>
-                <a:cs typeface="Arial" pitchFamily="34" charset="-120"/>
-              </a:rPr>
-              <a:t>Lição M9-F05, Os que carregaram a pedra</a:t>
-            </a:r>
-            <a:endParaRPr lang="en-US" sz="1000" dirty="0"/>
-          </a:p>
-        </p:txBody>
-      </p:sp>
-      <p:sp>
-        <p:nvSpPr>
-          <p:cNvPr id="5" name="Text 2"/>
-          <p:cNvSpPr/>
-          <p:nvPr/>
-        </p:nvSpPr>
-        <p:spPr>
-          <a:xfrm>
-            <a:off x="10637215" y="6400800"/>
-            <a:ext cx="731520" cy="274320"/>
-          </a:xfrm>
-          <a:prstGeom prst="rect">
-            <a:avLst/>
-          </a:prstGeom>
-          <a:noFill/>
-          <a:ln/>
-        </p:spPr>
-        <p:txBody>
-          <a:bodyPr wrap="square" lIns="0" tIns="0" rIns="0" bIns="0" rtlCol="0" anchor="ctr"/>
-          <a:lstStyle/>
-          <a:p>
-            <a:pPr algn="r" indent="0" marL="0">
-              <a:buNone/>
-            </a:pPr>
-            <a:r>
-              <a:rPr lang="en-US" sz="1000" dirty="0">
-                <a:solidFill>
-                  <a:srgbClr val="A9A79F"/>
-                </a:solidFill>
-                <a:latin typeface="Arial" pitchFamily="34" charset="0"/>
-                <a:ea typeface="Arial" pitchFamily="34" charset="-122"/>
-                <a:cs typeface="Arial" pitchFamily="34" charset="-120"/>
-              </a:rPr>
-              <a:t>6</a:t>
-            </a:r>
-            <a:endParaRPr lang="en-US" sz="1000" dirty="0"/>
-          </a:p>
-        </p:txBody>
-      </p:sp>
-      <p:sp>
-        <p:nvSpPr>
-          <p:cNvPr id="6" name="Shape 3"/>
-          <p:cNvSpPr/>
-          <p:nvPr/>
-        </p:nvSpPr>
-        <p:spPr>
-          <a:xfrm>
-            <a:off x="822960" y="502920"/>
-            <a:ext cx="201168" cy="201168"/>
-          </a:xfrm>
-          <a:prstGeom prst="ellipse">
-            <a:avLst/>
-          </a:prstGeom>
-          <a:ln w="19050">
-            <a:solidFill>
-              <a:srgbClr val="F2F0EA"/>
-            </a:solidFill>
-            <a:prstDash val="solid"/>
-          </a:ln>
-        </p:spPr>
-      </p:sp>
-      <p:sp>
-        <p:nvSpPr>
-          <p:cNvPr id="7" name="Text 4"/>
-          <p:cNvSpPr/>
-          <p:nvPr/>
-        </p:nvSpPr>
-        <p:spPr>
-          <a:xfrm>
-            <a:off x="1188720" y="457200"/>
-            <a:ext cx="9448495" cy="292608"/>
-          </a:xfrm>
-          <a:prstGeom prst="rect">
-            <a:avLst/>
-          </a:prstGeom>
-          <a:noFill/>
-          <a:ln/>
-        </p:spPr>
-        <p:txBody>
-          <a:bodyPr wrap="square" lIns="0" tIns="0" rIns="0" bIns="0" rtlCol="0" anchor="ctr"/>
-          <a:lstStyle/>
-          <a:p>
-            <a:pPr indent="0" marL="0">
-              <a:buNone/>
-            </a:pPr>
-            <a:r>
-              <a:rPr lang="en-US" sz="1100" b="1" spc="250" kern="0" dirty="0">
-                <a:solidFill>
-                  <a:srgbClr val="A9A79F"/>
-                </a:solidFill>
-                <a:latin typeface="Arial" pitchFamily="34" charset="0"/>
-                <a:ea typeface="Arial" pitchFamily="34" charset="-122"/>
-                <a:cs typeface="Arial" pitchFamily="34" charset="-120"/>
-              </a:rPr>
-              <a:t>VER</a:t>
-            </a:r>
-            <a:endParaRPr lang="en-US" sz="1100" dirty="0"/>
-          </a:p>
-        </p:txBody>
-      </p:sp>
-      <p:sp>
-        <p:nvSpPr>
-          <p:cNvPr id="8" name="Text 5"/>
-          <p:cNvSpPr/>
-          <p:nvPr/>
-        </p:nvSpPr>
-        <p:spPr>
-          <a:xfrm>
-            <a:off x="822960" y="868680"/>
-            <a:ext cx="9814255" cy="822960"/>
-          </a:xfrm>
-          <a:prstGeom prst="rect">
-            <a:avLst/>
-          </a:prstGeom>
-          <a:noFill/>
-          <a:ln/>
-        </p:spPr>
-        <p:txBody>
-          <a:bodyPr wrap="square" lIns="0" tIns="0" rIns="0" bIns="0" rtlCol="0" anchor="b">
-            <a:normAutofit/>
-          </a:bodyPr>
-          <a:lstStyle/>
-          <a:p>
-            <a:pPr indent="0" marL="0">
-              <a:buNone/>
-            </a:pPr>
-            <a:r>
-              <a:rPr lang="en-US" sz="3400" dirty="0">
-                <a:solidFill>
-                  <a:srgbClr val="F2F0EA"/>
-                </a:solidFill>
-                <a:latin typeface="Arial" pitchFamily="34" charset="0"/>
-                <a:ea typeface="Arial" pitchFamily="34" charset="-122"/>
-                <a:cs typeface="Arial" pitchFamily="34" charset="-120"/>
-              </a:rPr>
-              <a:t>A encomenda</a:t>
-            </a:r>
-            <a:endParaRPr lang="en-US" sz="3400" dirty="0"/>
-          </a:p>
-        </p:txBody>
-      </p:sp>
-      <p:sp>
-        <p:nvSpPr>
-          <p:cNvPr id="9" name="Shape 6"/>
-          <p:cNvSpPr/>
-          <p:nvPr/>
-        </p:nvSpPr>
-        <p:spPr>
-          <a:xfrm>
-            <a:off x="822960" y="1746504"/>
-            <a:ext cx="640080" cy="64008"/>
-          </a:xfrm>
-          <a:prstGeom prst="rect">
-            <a:avLst/>
-          </a:prstGeom>
-          <a:solidFill>
-            <a:srgbClr val="E4555C"/>
-          </a:solidFill>
-          <a:ln w="12700">
-            <a:solidFill>
-              <a:srgbClr val="E4555C"/>
-            </a:solidFill>
-            <a:prstDash val="solid"/>
-          </a:ln>
-        </p:spPr>
-      </p:sp>
-      <p:sp>
-        <p:nvSpPr>
-          <p:cNvPr id="10" name="Text 7"/>
-          <p:cNvSpPr/>
-          <p:nvPr/>
-        </p:nvSpPr>
-        <p:spPr>
-          <a:xfrm>
-            <a:off x="822960" y="2011680"/>
-            <a:ext cx="9814255" cy="4023360"/>
-          </a:xfrm>
-          <a:prstGeom prst="rect">
-            <a:avLst/>
-          </a:prstGeom>
-          <a:noFill/>
-          <a:ln/>
-        </p:spPr>
-        <p:txBody>
-          <a:bodyPr wrap="square" lIns="0" tIns="0" rIns="0" bIns="0" rtlCol="0" anchor="t">
-            <a:normAutofit/>
-          </a:bodyPr>
-          <a:lstStyle/>
-          <a:p>
-            <a:pPr indent="0" marL="0">
-              <a:lnSpc>
-                <a:spcPct val="120000"/>
-              </a:lnSpc>
-              <a:spcAft>
-                <a:spcPts val="1000"/>
-              </a:spcAft>
-              <a:buNone/>
-            </a:pPr>
-            <a:r>
-              <a:rPr lang="en-US" sz="2300" dirty="0">
-                <a:solidFill>
-                  <a:srgbClr val="F2F0EA"/>
-                </a:solidFill>
-                <a:latin typeface="Georgia" pitchFamily="34" charset="0"/>
-                <a:ea typeface="Georgia" pitchFamily="34" charset="-122"/>
-                <a:cs typeface="Georgia" pitchFamily="34" charset="-120"/>
-              </a:rPr>
-              <a:t>O Memorial dá nome e voz a quem a história oficial esqueceu: os que construíram o convento. Em grupo, criem um produto que faça o mesmo para um grupo de anónimos do romance ou de hoje, relacionado com um tema do livro (poder, trabalho, sonho, memória, ver). Fundamentem com três citações curtas do romance (com página).</a:t>
-            </a:r>
-            <a:endParaRPr lang="en-US" sz="2300" dirty="0"/>
-          </a:p>
-          <a:p>
-            <a:pPr indent="0" marL="0">
-              <a:lnSpc>
-                <a:spcPct val="120000"/>
-              </a:lnSpc>
-              <a:spcAft>
-                <a:spcPts val="1000"/>
-              </a:spcAft>
-              <a:buNone/>
-            </a:pPr>
-            <a:r>
-              <a:rPr lang="en-US" sz="2300" dirty="0">
-                <a:solidFill>
-                  <a:srgbClr val="F2F0EA"/>
-                </a:solidFill>
-                <a:latin typeface="Georgia" pitchFamily="34" charset="0"/>
-                <a:ea typeface="Georgia" pitchFamily="34" charset="-122"/>
-                <a:cs typeface="Georgia" pitchFamily="34" charset="-120"/>
-              </a:rPr>
-              <a:t>Apresentação: 7 minutos.</a:t>
-            </a:r>
-            <a:endParaRPr lang="en-US" sz="2300" dirty="0"/>
-          </a:p>
-        </p:txBody>
-      </p:sp>
-    </p:spTree>
-  </p:cSld>
-  <p:clrMapOvr>
-    <a:masterClrMapping/>
-  </p:clrMapOvr>
-</p:sld>
-</file>
-
-<file path=ppt/slides/slide7.xml><?xml version="1.0" encoding="utf-8"?>
-<p:sld xmlns:a="http://schemas.openxmlformats.org/drawingml/2006/main" xmlns:r="http://schemas.openxmlformats.org/officeDocument/2006/relationships" xmlns:p="http://schemas.openxmlformats.org/presentationml/2006/main">
-  <p:cSld name="Slide 7">
-    <p:bg>
-      <p:bgPr>
-        <a:solidFill>
-          <a:srgbClr val="111111"/>
-        </a:solidFill>
-      </p:bgPr>
-    </p:bg>
-    <p:spTree>
-      <p:nvGrpSpPr>
-        <p:cNvPr id="1" name=""/>
-        <p:cNvGrpSpPr/>
-        <p:nvPr/>
-      </p:nvGrpSpPr>
-      <p:grpSpPr>
-        <a:xfrm>
-          <a:off x="0" y="0"/>
-          <a:ext cx="0" cy="0"/>
-          <a:chOff x="0" y="0"/>
-          <a:chExt cx="0" cy="0"/>
-        </a:xfrm>
-      </p:grpSpPr>
-      <p:sp>
-        <p:nvSpPr>
-          <p:cNvPr id="3" name="Text 0"/>
-          <p:cNvSpPr/>
-          <p:nvPr/>
-        </p:nvSpPr>
-        <p:spPr>
-          <a:xfrm>
-            <a:off x="10637215" y="384048"/>
-            <a:ext cx="731520" cy="365760"/>
-          </a:xfrm>
-          <a:prstGeom prst="rect">
-            <a:avLst/>
-          </a:prstGeom>
-          <a:noFill/>
-          <a:ln/>
-        </p:spPr>
-        <p:txBody>
-          <a:bodyPr wrap="square" lIns="0" tIns="0" rIns="0" bIns="0" rtlCol="0" anchor="ctr"/>
-          <a:lstStyle/>
-          <a:p>
-            <a:pPr algn="r" indent="0" marL="0">
-              <a:buNone/>
-            </a:pPr>
-            <a:r>
-              <a:rPr lang="en-US" sz="1200" b="1" spc="300" kern="0" dirty="0">
-                <a:solidFill>
-                  <a:srgbClr val="A9A79F"/>
-                </a:solidFill>
-                <a:latin typeface="Arial" pitchFamily="34" charset="0"/>
-                <a:ea typeface="Arial" pitchFamily="34" charset="-122"/>
-                <a:cs typeface="Arial" pitchFamily="34" charset="-120"/>
-              </a:rPr>
-              <a:t>EPI</a:t>
-            </a:r>
-            <a:endParaRPr lang="en-US" sz="1200" dirty="0"/>
-          </a:p>
-        </p:txBody>
-      </p:sp>
-      <p:sp>
-        <p:nvSpPr>
-          <p:cNvPr id="4" name="Text 1"/>
-          <p:cNvSpPr/>
-          <p:nvPr/>
-        </p:nvSpPr>
-        <p:spPr>
-          <a:xfrm>
-            <a:off x="822960" y="6400800"/>
-            <a:ext cx="9631375" cy="274320"/>
-          </a:xfrm>
-          <a:prstGeom prst="rect">
-            <a:avLst/>
-          </a:prstGeom>
-          <a:noFill/>
-          <a:ln/>
-        </p:spPr>
-        <p:txBody>
-          <a:bodyPr wrap="square" lIns="0" tIns="0" rIns="0" bIns="0" rtlCol="0" anchor="ctr"/>
-          <a:lstStyle/>
-          <a:p>
-            <a:pPr indent="0" marL="0">
-              <a:buNone/>
-            </a:pPr>
-            <a:r>
-              <a:rPr lang="en-US" sz="1000" dirty="0">
-                <a:solidFill>
-                  <a:srgbClr val="A9A79F"/>
-                </a:solidFill>
-                <a:latin typeface="Arial" pitchFamily="34" charset="0"/>
-                <a:ea typeface="Arial" pitchFamily="34" charset="-122"/>
-                <a:cs typeface="Arial" pitchFamily="34" charset="-120"/>
-              </a:rPr>
-              <a:t>Lição M9-F05, Os que carregaram a pedra</a:t>
-            </a:r>
-            <a:endParaRPr lang="en-US" sz="1000" dirty="0"/>
-          </a:p>
-        </p:txBody>
-      </p:sp>
-      <p:sp>
-        <p:nvSpPr>
-          <p:cNvPr id="5" name="Text 2"/>
-          <p:cNvSpPr/>
-          <p:nvPr/>
-        </p:nvSpPr>
-        <p:spPr>
-          <a:xfrm>
-            <a:off x="10637215" y="6400800"/>
-            <a:ext cx="731520" cy="274320"/>
-          </a:xfrm>
-          <a:prstGeom prst="rect">
-            <a:avLst/>
-          </a:prstGeom>
-          <a:noFill/>
-          <a:ln/>
-        </p:spPr>
-        <p:txBody>
-          <a:bodyPr wrap="square" lIns="0" tIns="0" rIns="0" bIns="0" rtlCol="0" anchor="ctr"/>
-          <a:lstStyle/>
-          <a:p>
-            <a:pPr algn="r" indent="0" marL="0">
-              <a:buNone/>
-            </a:pPr>
-            <a:r>
-              <a:rPr lang="en-US" sz="1000" dirty="0">
-                <a:solidFill>
-                  <a:srgbClr val="A9A79F"/>
-                </a:solidFill>
-                <a:latin typeface="Arial" pitchFamily="34" charset="0"/>
-                <a:ea typeface="Arial" pitchFamily="34" charset="-122"/>
-                <a:cs typeface="Arial" pitchFamily="34" charset="-120"/>
-              </a:rPr>
-              <a:t>7</a:t>
-            </a:r>
-            <a:endParaRPr lang="en-US" sz="1000" dirty="0"/>
-          </a:p>
-        </p:txBody>
-      </p:sp>
-      <p:sp>
-        <p:nvSpPr>
-          <p:cNvPr id="6" name="Shape 3"/>
-          <p:cNvSpPr/>
-          <p:nvPr/>
-        </p:nvSpPr>
-        <p:spPr>
-          <a:xfrm>
-            <a:off x="822960" y="502920"/>
-            <a:ext cx="201168" cy="201168"/>
-          </a:xfrm>
-          <a:prstGeom prst="rect">
-            <a:avLst/>
-          </a:prstGeom>
-          <a:ln w="19050">
-            <a:solidFill>
-              <a:srgbClr val="F2F0EA"/>
-            </a:solidFill>
-            <a:prstDash val="solid"/>
-          </a:ln>
-        </p:spPr>
-      </p:sp>
-      <p:sp>
-        <p:nvSpPr>
-          <p:cNvPr id="7" name="Text 4"/>
-          <p:cNvSpPr/>
-          <p:nvPr/>
-        </p:nvSpPr>
-        <p:spPr>
-          <a:xfrm>
-            <a:off x="1188720" y="457200"/>
-            <a:ext cx="9448495" cy="292608"/>
-          </a:xfrm>
-          <a:prstGeom prst="rect">
-            <a:avLst/>
-          </a:prstGeom>
-          <a:noFill/>
-          <a:ln/>
-        </p:spPr>
-        <p:txBody>
-          <a:bodyPr wrap="square" lIns="0" tIns="0" rIns="0" bIns="0" rtlCol="0" anchor="ctr"/>
-          <a:lstStyle/>
-          <a:p>
-            <a:pPr indent="0" marL="0">
-              <a:buNone/>
-            </a:pPr>
-            <a:r>
-              <a:rPr lang="en-US" sz="1100" b="1" spc="250" kern="0" dirty="0">
-                <a:solidFill>
-                  <a:srgbClr val="A9A79F"/>
-                </a:solidFill>
-                <a:latin typeface="Arial" pitchFamily="34" charset="0"/>
-                <a:ea typeface="Arial" pitchFamily="34" charset="-122"/>
-                <a:cs typeface="Arial" pitchFamily="34" charset="-120"/>
-              </a:rPr>
-              <a:t>AGORA NO TELEMÓVEL, QUINZE MINUTOS</a:t>
-            </a:r>
-            <a:endParaRPr lang="en-US" sz="1100" dirty="0"/>
-          </a:p>
-        </p:txBody>
-      </p:sp>
-      <p:sp>
-        <p:nvSpPr>
-          <p:cNvPr id="8" name="Text 5"/>
-          <p:cNvSpPr/>
-          <p:nvPr/>
-        </p:nvSpPr>
-        <p:spPr>
-          <a:xfrm>
-            <a:off x="822960" y="868680"/>
-            <a:ext cx="7071055" cy="1188720"/>
-          </a:xfrm>
-          <a:prstGeom prst="rect">
-            <a:avLst/>
-          </a:prstGeom>
-          <a:noFill/>
-          <a:ln/>
-        </p:spPr>
-        <p:txBody>
-          <a:bodyPr wrap="square" lIns="0" tIns="0" rIns="0" bIns="0" rtlCol="0" anchor="b">
-            <a:normAutofit/>
-          </a:bodyPr>
-          <a:lstStyle/>
-          <a:p>
-            <a:pPr indent="0" marL="0">
-              <a:buNone/>
-            </a:pPr>
-            <a:r>
-              <a:rPr lang="en-US" sz="3800" dirty="0">
-                <a:solidFill>
-                  <a:srgbClr val="F2F0EA"/>
-                </a:solidFill>
-                <a:latin typeface="Arial" pitchFamily="34" charset="0"/>
-                <a:ea typeface="Arial" pitchFamily="34" charset="-122"/>
-                <a:cs typeface="Arial" pitchFamily="34" charset="-120"/>
-              </a:rPr>
-              <a:t>Abre a lição no telemóvel</a:t>
-            </a:r>
-            <a:endParaRPr lang="en-US" sz="3800" dirty="0"/>
-          </a:p>
-        </p:txBody>
-      </p:sp>
-      <p:sp>
-        <p:nvSpPr>
-          <p:cNvPr id="9" name="Shape 6"/>
-          <p:cNvSpPr/>
-          <p:nvPr/>
-        </p:nvSpPr>
-        <p:spPr>
-          <a:xfrm>
-            <a:off x="822960" y="2121408"/>
-            <a:ext cx="640080" cy="64008"/>
-          </a:xfrm>
-          <a:prstGeom prst="rect">
-            <a:avLst/>
-          </a:prstGeom>
-          <a:solidFill>
-            <a:srgbClr val="E4555C"/>
-          </a:solidFill>
-          <a:ln w="12700">
-            <a:solidFill>
-              <a:srgbClr val="E4555C"/>
-            </a:solidFill>
-            <a:prstDash val="solid"/>
-          </a:ln>
-        </p:spPr>
-      </p:sp>
-      <p:sp>
-        <p:nvSpPr>
-          <p:cNvPr id="10" name="Shape 7"/>
-          <p:cNvSpPr/>
-          <p:nvPr/>
-        </p:nvSpPr>
-        <p:spPr>
-          <a:xfrm>
-            <a:off x="1005840" y="2606040"/>
-            <a:ext cx="0" cy="1765808"/>
-          </a:xfrm>
-          <a:prstGeom prst="line">
-            <a:avLst/>
-          </a:prstGeom>
-          <a:noFill/>
-          <a:ln w="12700">
-            <a:solidFill>
-              <a:srgbClr val="A9A79F"/>
-            </a:solidFill>
-            <a:prstDash val="solid"/>
-          </a:ln>
-        </p:spPr>
-      </p:sp>
-      <p:sp>
-        <p:nvSpPr>
-          <p:cNvPr id="11" name="Shape 8"/>
-          <p:cNvSpPr/>
-          <p:nvPr/>
-        </p:nvSpPr>
-        <p:spPr>
-          <a:xfrm>
-            <a:off x="822960" y="2423160"/>
-            <a:ext cx="365760" cy="365760"/>
-          </a:xfrm>
-          <a:prstGeom prst="ellipse">
-            <a:avLst/>
-          </a:prstGeom>
-          <a:solidFill>
-            <a:srgbClr val="111111"/>
-          </a:solidFill>
-          <a:ln w="15875">
-            <a:solidFill>
-              <a:srgbClr val="F2F0EA"/>
-            </a:solidFill>
-            <a:prstDash val="solid"/>
-          </a:ln>
-        </p:spPr>
-      </p:sp>
-      <p:sp>
-        <p:nvSpPr>
-          <p:cNvPr id="12" name="Text 9"/>
-          <p:cNvSpPr/>
-          <p:nvPr/>
-        </p:nvSpPr>
-        <p:spPr>
-          <a:xfrm>
-            <a:off x="822960" y="2423160"/>
-            <a:ext cx="365760" cy="365760"/>
-          </a:xfrm>
-          <a:prstGeom prst="rect">
-            <a:avLst/>
-          </a:prstGeom>
-          <a:noFill/>
-          <a:ln/>
-        </p:spPr>
-        <p:txBody>
-          <a:bodyPr wrap="square" lIns="0" tIns="0" rIns="0" bIns="0" rtlCol="0" anchor="ctr"/>
-          <a:lstStyle/>
-          <a:p>
-            <a:pPr algn="ctr" indent="0" marL="0">
-              <a:buNone/>
-            </a:pPr>
-            <a:r>
-              <a:rPr lang="en-US" sz="1300" b="1" dirty="0">
-                <a:solidFill>
-                  <a:srgbClr val="F2F0EA"/>
-                </a:solidFill>
-                <a:latin typeface="Arial" pitchFamily="34" charset="0"/>
-                <a:ea typeface="Arial" pitchFamily="34" charset="-122"/>
-                <a:cs typeface="Arial" pitchFamily="34" charset="-120"/>
-              </a:rPr>
-              <a:t>1</a:t>
-            </a:r>
-            <a:endParaRPr lang="en-US" sz="1300" dirty="0"/>
-          </a:p>
-        </p:txBody>
-      </p:sp>
-      <p:sp>
-        <p:nvSpPr>
-          <p:cNvPr id="13" name="Text 10"/>
-          <p:cNvSpPr/>
-          <p:nvPr/>
-        </p:nvSpPr>
-        <p:spPr>
-          <a:xfrm>
-            <a:off x="1417320" y="2432304"/>
-            <a:ext cx="6430975" cy="882904"/>
-          </a:xfrm>
-          <a:prstGeom prst="rect">
-            <a:avLst/>
-          </a:prstGeom>
-          <a:noFill/>
-          <a:ln/>
-        </p:spPr>
-        <p:txBody>
-          <a:bodyPr wrap="square" lIns="0" tIns="0" rIns="0" bIns="0" rtlCol="0" anchor="t">
-            <a:normAutofit/>
-          </a:bodyPr>
-          <a:lstStyle/>
-          <a:p>
-            <a:pPr indent="0" marL="0">
-              <a:lnSpc>
-                <a:spcPct val="105000"/>
-              </a:lnSpc>
-              <a:buNone/>
-            </a:pPr>
-            <a:r>
-              <a:rPr lang="en-US" sz="2200" dirty="0">
-                <a:solidFill>
-                  <a:srgbClr val="F2F0EA"/>
-                </a:solidFill>
-                <a:latin typeface="Arial" pitchFamily="34" charset="0"/>
-                <a:ea typeface="Arial" pitchFamily="34" charset="-122"/>
-                <a:cs typeface="Arial" pitchFamily="34" charset="-120"/>
-              </a:rPr>
-              <a:t>Lê e responde aos cartões, um de cada vez</a:t>
-            </a:r>
-            <a:endParaRPr lang="en-US" sz="2200" dirty="0"/>
-          </a:p>
-        </p:txBody>
-      </p:sp>
-      <p:sp>
-        <p:nvSpPr>
-          <p:cNvPr id="14" name="Shape 11"/>
-          <p:cNvSpPr/>
-          <p:nvPr/>
-        </p:nvSpPr>
-        <p:spPr>
-          <a:xfrm>
-            <a:off x="822960" y="3306064"/>
-            <a:ext cx="365760" cy="365760"/>
-          </a:xfrm>
-          <a:prstGeom prst="ellipse">
-            <a:avLst/>
-          </a:prstGeom>
-          <a:solidFill>
-            <a:srgbClr val="111111"/>
-          </a:solidFill>
-          <a:ln w="15875">
-            <a:solidFill>
-              <a:srgbClr val="F2F0EA"/>
-            </a:solidFill>
-            <a:prstDash val="solid"/>
-          </a:ln>
-        </p:spPr>
-      </p:sp>
-      <p:sp>
-        <p:nvSpPr>
-          <p:cNvPr id="15" name="Text 12"/>
-          <p:cNvSpPr/>
-          <p:nvPr/>
-        </p:nvSpPr>
-        <p:spPr>
-          <a:xfrm>
-            <a:off x="822960" y="3306064"/>
-            <a:ext cx="365760" cy="365760"/>
-          </a:xfrm>
-          <a:prstGeom prst="rect">
-            <a:avLst/>
-          </a:prstGeom>
-          <a:noFill/>
-          <a:ln/>
-        </p:spPr>
-        <p:txBody>
-          <a:bodyPr wrap="square" lIns="0" tIns="0" rIns="0" bIns="0" rtlCol="0" anchor="ctr"/>
-          <a:lstStyle/>
-          <a:p>
-            <a:pPr algn="ctr" indent="0" marL="0">
-              <a:buNone/>
-            </a:pPr>
-            <a:r>
-              <a:rPr lang="en-US" sz="1300" b="1" dirty="0">
-                <a:solidFill>
-                  <a:srgbClr val="F2F0EA"/>
-                </a:solidFill>
-                <a:latin typeface="Arial" pitchFamily="34" charset="0"/>
-                <a:ea typeface="Arial" pitchFamily="34" charset="-122"/>
-                <a:cs typeface="Arial" pitchFamily="34" charset="-120"/>
-              </a:rPr>
-              <a:t>2</a:t>
-            </a:r>
-            <a:endParaRPr lang="en-US" sz="1300" dirty="0"/>
-          </a:p>
-        </p:txBody>
-      </p:sp>
-      <p:sp>
-        <p:nvSpPr>
-          <p:cNvPr id="16" name="Text 13"/>
-          <p:cNvSpPr/>
-          <p:nvPr/>
-        </p:nvSpPr>
-        <p:spPr>
-          <a:xfrm>
-            <a:off x="1417320" y="3315208"/>
-            <a:ext cx="6430975" cy="882904"/>
-          </a:xfrm>
-          <a:prstGeom prst="rect">
-            <a:avLst/>
-          </a:prstGeom>
-          <a:noFill/>
-          <a:ln/>
-        </p:spPr>
-        <p:txBody>
-          <a:bodyPr wrap="square" lIns="0" tIns="0" rIns="0" bIns="0" rtlCol="0" anchor="t">
-            <a:normAutofit/>
-          </a:bodyPr>
-          <a:lstStyle/>
-          <a:p>
-            <a:pPr indent="0" marL="0">
-              <a:lnSpc>
-                <a:spcPct val="105000"/>
-              </a:lnSpc>
-              <a:buNone/>
-            </a:pPr>
-            <a:r>
-              <a:rPr lang="en-US" sz="2200" dirty="0">
-                <a:solidFill>
-                  <a:srgbClr val="F2F0EA"/>
-                </a:solidFill>
-                <a:latin typeface="Arial" pitchFamily="34" charset="0"/>
-                <a:ea typeface="Arial" pitchFamily="34" charset="-122"/>
-                <a:cs typeface="Arial" pitchFamily="34" charset="-120"/>
-              </a:rPr>
-              <a:t>No fim, o cartão extra: «Da promessa à pedra»</a:t>
-            </a:r>
-            <a:endParaRPr lang="en-US" sz="2200" dirty="0"/>
-          </a:p>
-        </p:txBody>
-      </p:sp>
-      <p:sp>
-        <p:nvSpPr>
-          <p:cNvPr id="17" name="Shape 14"/>
-          <p:cNvSpPr/>
-          <p:nvPr/>
-        </p:nvSpPr>
-        <p:spPr>
-          <a:xfrm>
-            <a:off x="822960" y="4188968"/>
-            <a:ext cx="365760" cy="365760"/>
-          </a:xfrm>
-          <a:prstGeom prst="ellipse">
-            <a:avLst/>
-          </a:prstGeom>
-          <a:solidFill>
-            <a:srgbClr val="111111"/>
-          </a:solidFill>
-          <a:ln w="15875">
-            <a:solidFill>
-              <a:srgbClr val="F2F0EA"/>
-            </a:solidFill>
-            <a:prstDash val="solid"/>
-          </a:ln>
-        </p:spPr>
-      </p:sp>
-      <p:sp>
-        <p:nvSpPr>
-          <p:cNvPr id="18" name="Text 15"/>
-          <p:cNvSpPr/>
-          <p:nvPr/>
-        </p:nvSpPr>
-        <p:spPr>
-          <a:xfrm>
-            <a:off x="822960" y="4188968"/>
-            <a:ext cx="365760" cy="365760"/>
-          </a:xfrm>
-          <a:prstGeom prst="rect">
-            <a:avLst/>
-          </a:prstGeom>
-          <a:noFill/>
-          <a:ln/>
-        </p:spPr>
-        <p:txBody>
-          <a:bodyPr wrap="square" lIns="0" tIns="0" rIns="0" bIns="0" rtlCol="0" anchor="ctr"/>
-          <a:lstStyle/>
-          <a:p>
-            <a:pPr algn="ctr" indent="0" marL="0">
-              <a:buNone/>
-            </a:pPr>
-            <a:r>
-              <a:rPr lang="en-US" sz="1300" b="1" dirty="0">
-                <a:solidFill>
-                  <a:srgbClr val="F2F0EA"/>
-                </a:solidFill>
-                <a:latin typeface="Arial" pitchFamily="34" charset="0"/>
-                <a:ea typeface="Arial" pitchFamily="34" charset="-122"/>
-                <a:cs typeface="Arial" pitchFamily="34" charset="-120"/>
-              </a:rPr>
-              <a:t>3</a:t>
-            </a:r>
-            <a:endParaRPr lang="en-US" sz="1300" dirty="0"/>
-          </a:p>
-        </p:txBody>
-      </p:sp>
-      <p:sp>
-        <p:nvSpPr>
-          <p:cNvPr id="19" name="Text 16"/>
-          <p:cNvSpPr/>
-          <p:nvPr/>
-        </p:nvSpPr>
-        <p:spPr>
-          <a:xfrm>
-            <a:off x="1417320" y="4198112"/>
-            <a:ext cx="6430975" cy="542036"/>
-          </a:xfrm>
-          <a:prstGeom prst="rect">
-            <a:avLst/>
-          </a:prstGeom>
-          <a:noFill/>
-          <a:ln/>
-        </p:spPr>
-        <p:txBody>
-          <a:bodyPr wrap="square" lIns="0" tIns="0" rIns="0" bIns="0" rtlCol="0" anchor="t">
-            <a:normAutofit/>
-          </a:bodyPr>
-          <a:lstStyle/>
-          <a:p>
-            <a:pPr indent="0" marL="0">
-              <a:lnSpc>
-                <a:spcPct val="105000"/>
-              </a:lnSpc>
-              <a:buNone/>
-            </a:pPr>
-            <a:r>
-              <a:rPr lang="en-US" sz="2200" dirty="0">
-                <a:solidFill>
-                  <a:srgbClr val="F2F0EA"/>
-                </a:solidFill>
-                <a:latin typeface="Arial" pitchFamily="34" charset="0"/>
-                <a:ea typeface="Arial" pitchFamily="34" charset="-122"/>
-                <a:cs typeface="Arial" pitchFamily="34" charset="-120"/>
-              </a:rPr>
-              <a:t>O percurso marca a lição como feita</a:t>
-            </a:r>
-            <a:endParaRPr lang="en-US" sz="2200" dirty="0"/>
-          </a:p>
-        </p:txBody>
-      </p:sp>
-      <p:sp>
-        <p:nvSpPr>
-          <p:cNvPr id="20" name="Shape 17"/>
-          <p:cNvSpPr/>
-          <p:nvPr/>
-        </p:nvSpPr>
-        <p:spPr>
-          <a:xfrm>
-            <a:off x="8332927" y="1033272"/>
-            <a:ext cx="3145536" cy="3145536"/>
-          </a:xfrm>
-          <a:prstGeom prst="rect">
-            <a:avLst/>
-          </a:prstGeom>
-          <a:solidFill>
-            <a:srgbClr val="FFFFFF"/>
-          </a:solidFill>
-          <a:ln w="12700">
-            <a:solidFill>
-              <a:srgbClr val="F2F0EA"/>
-            </a:solidFill>
-            <a:prstDash val="solid"/>
-          </a:ln>
-        </p:spPr>
-      </p:sp>
-      <p:pic>
-        <p:nvPicPr>
-          <p:cNvPr id="21" name="Image 0" descr="/home/user/epi-portugues-fontes/_interno/biblioteca-imagens/qr/licao-m9-f05.png">    </p:cNvPr>
-          <p:cNvPicPr>
-            <a:picLocks noChangeAspect="1"/>
-          </p:cNvPicPr>
-          <p:nvPr/>
-        </p:nvPicPr>
-        <p:blipFill>
-          <a:blip r:embed="rId1"/>
-          <a:stretch>
-            <a:fillRect/>
-          </a:stretch>
-        </p:blipFill>
-        <p:spPr>
-          <a:xfrm>
-            <a:off x="8442655" y="1143000"/>
-            <a:ext cx="2926080" cy="2926080"/>
-          </a:xfrm>
-          <a:prstGeom prst="rect">
-            <a:avLst/>
-          </a:prstGeom>
-        </p:spPr>
-      </p:pic>
-      <p:sp>
-        <p:nvSpPr>
-          <p:cNvPr id="22" name="Text 18"/>
-          <p:cNvSpPr/>
-          <p:nvPr/>
-        </p:nvSpPr>
-        <p:spPr>
-          <a:xfrm>
-            <a:off x="8332927" y="4343400"/>
-            <a:ext cx="3145536" cy="640080"/>
-          </a:xfrm>
-          <a:prstGeom prst="rect">
-            <a:avLst/>
-          </a:prstGeom>
-          <a:noFill/>
-          <a:ln/>
-        </p:spPr>
-        <p:txBody>
-          <a:bodyPr wrap="square" lIns="0" tIns="0" rIns="0" bIns="0" rtlCol="0" anchor="t">
-            <a:normAutofit/>
-          </a:bodyPr>
-          <a:lstStyle/>
-          <a:p>
-            <a:pPr algn="ctr" indent="0" marL="0">
-              <a:buNone/>
-            </a:pPr>
-            <a:r>
-              <a:rPr lang="en-US" sz="1200" dirty="0">
-                <a:solidFill>
-                  <a:srgbClr val="F2F0EA"/>
-                </a:solidFill>
-                <a:latin typeface="Arial" pitchFamily="34" charset="0"/>
-                <a:ea typeface="Arial" pitchFamily="34" charset="-122"/>
-                <a:cs typeface="Arial" pitchFamily="34" charset="-120"/>
-              </a:rPr>
-              <a:t>pedrohfernandes-klk.github.io/​pt/​m9/​licao-m9-f05/​</a:t>
-            </a:r>
-            <a:endParaRPr lang="en-US" sz="1200" dirty="0"/>
-          </a:p>
-        </p:txBody>
-      </p:sp>
-    </p:spTree>
-  </p:cSld>
-  <p:clrMapOvr>
-    <a:masterClrMapping/>
-  </p:clrMapOvr>
-</p:sld>
-</file>
-
-<file path=ppt/slides/slide8.xml><?xml version="1.0" encoding="utf-8"?>
-<p:sld xmlns:a="http://schemas.openxmlformats.org/drawingml/2006/main" xmlns:r="http://schemas.openxmlformats.org/officeDocument/2006/relationships" xmlns:p="http://schemas.openxmlformats.org/presentationml/2006/main">
-  <p:cSld name="Slide 8">
-    <p:bg>
-      <p:bgPr>
-        <a:solidFill>
-          <a:srgbClr val="111111"/>
-        </a:solidFill>
-      </p:bgPr>
-    </p:bg>
-    <p:spTree>
-      <p:nvGrpSpPr>
-        <p:cNvPr id="1" name=""/>
-        <p:cNvGrpSpPr/>
-        <p:nvPr/>
-      </p:nvGrpSpPr>
-      <p:grpSpPr>
-        <a:xfrm>
-          <a:off x="0" y="0"/>
-          <a:ext cx="0" cy="0"/>
-          <a:chOff x="0" y="0"/>
-          <a:chExt cx="0" cy="0"/>
-        </a:xfrm>
-      </p:grpSpPr>
-      <p:sp>
-        <p:nvSpPr>
-          <p:cNvPr id="3" name="Text 0"/>
-          <p:cNvSpPr/>
-          <p:nvPr/>
-        </p:nvSpPr>
-        <p:spPr>
-          <a:xfrm>
-            <a:off x="10637215" y="384048"/>
-            <a:ext cx="731520" cy="365760"/>
-          </a:xfrm>
-          <a:prstGeom prst="rect">
-            <a:avLst/>
-          </a:prstGeom>
-          <a:noFill/>
-          <a:ln/>
-        </p:spPr>
-        <p:txBody>
-          <a:bodyPr wrap="square" lIns="0" tIns="0" rIns="0" bIns="0" rtlCol="0" anchor="ctr"/>
-          <a:lstStyle/>
-          <a:p>
-            <a:pPr algn="r" indent="0" marL="0">
-              <a:buNone/>
-            </a:pPr>
-            <a:r>
-              <a:rPr lang="en-US" sz="1200" b="1" spc="300" kern="0" dirty="0">
-                <a:solidFill>
-                  <a:srgbClr val="A9A79F"/>
-                </a:solidFill>
-                <a:latin typeface="Arial" pitchFamily="34" charset="0"/>
-                <a:ea typeface="Arial" pitchFamily="34" charset="-122"/>
-                <a:cs typeface="Arial" pitchFamily="34" charset="-120"/>
-              </a:rPr>
-              <a:t>EPI</a:t>
-            </a:r>
-            <a:endParaRPr lang="en-US" sz="1200" dirty="0"/>
-          </a:p>
-        </p:txBody>
-      </p:sp>
-      <p:sp>
-        <p:nvSpPr>
-          <p:cNvPr id="4" name="Text 1"/>
-          <p:cNvSpPr/>
-          <p:nvPr/>
-        </p:nvSpPr>
-        <p:spPr>
-          <a:xfrm>
-            <a:off x="822960" y="6400800"/>
-            <a:ext cx="9631375" cy="274320"/>
-          </a:xfrm>
-          <a:prstGeom prst="rect">
-            <a:avLst/>
-          </a:prstGeom>
-          <a:noFill/>
-          <a:ln/>
-        </p:spPr>
-        <p:txBody>
-          <a:bodyPr wrap="square" lIns="0" tIns="0" rIns="0" bIns="0" rtlCol="0" anchor="ctr"/>
-          <a:lstStyle/>
-          <a:p>
-            <a:pPr indent="0" marL="0">
-              <a:buNone/>
-            </a:pPr>
-            <a:r>
-              <a:rPr lang="en-US" sz="1000" dirty="0">
-                <a:solidFill>
-                  <a:srgbClr val="A9A79F"/>
-                </a:solidFill>
-                <a:latin typeface="Arial" pitchFamily="34" charset="0"/>
-                <a:ea typeface="Arial" pitchFamily="34" charset="-122"/>
-                <a:cs typeface="Arial" pitchFamily="34" charset="-120"/>
-              </a:rPr>
-              <a:t>Lição M9-F05, Os que carregaram a pedra</a:t>
-            </a:r>
-            <a:endParaRPr lang="en-US" sz="1000" dirty="0"/>
-          </a:p>
-        </p:txBody>
-      </p:sp>
-      <p:sp>
-        <p:nvSpPr>
-          <p:cNvPr id="5" name="Text 2"/>
-          <p:cNvSpPr/>
-          <p:nvPr/>
-        </p:nvSpPr>
-        <p:spPr>
-          <a:xfrm>
-            <a:off x="10637215" y="6400800"/>
-            <a:ext cx="731520" cy="274320"/>
-          </a:xfrm>
-          <a:prstGeom prst="rect">
-            <a:avLst/>
-          </a:prstGeom>
-          <a:noFill/>
-          <a:ln/>
-        </p:spPr>
-        <p:txBody>
-          <a:bodyPr wrap="square" lIns="0" tIns="0" rIns="0" bIns="0" rtlCol="0" anchor="ctr"/>
-          <a:lstStyle/>
-          <a:p>
-            <a:pPr algn="r" indent="0" marL="0">
-              <a:buNone/>
-            </a:pPr>
-            <a:r>
-              <a:rPr lang="en-US" sz="1000" dirty="0">
-                <a:solidFill>
-                  <a:srgbClr val="A9A79F"/>
-                </a:solidFill>
-                <a:latin typeface="Arial" pitchFamily="34" charset="0"/>
-                <a:ea typeface="Arial" pitchFamily="34" charset="-122"/>
-                <a:cs typeface="Arial" pitchFamily="34" charset="-120"/>
-              </a:rPr>
-              <a:t>8</a:t>
-            </a:r>
-            <a:endParaRPr lang="en-US" sz="1000" dirty="0"/>
-          </a:p>
-        </p:txBody>
-      </p:sp>
-      <p:sp>
-        <p:nvSpPr>
-          <p:cNvPr id="6" name="Shape 3"/>
-          <p:cNvSpPr/>
-          <p:nvPr/>
-        </p:nvSpPr>
-        <p:spPr>
-          <a:xfrm>
-            <a:off x="822960" y="502920"/>
-            <a:ext cx="201168" cy="201168"/>
-          </a:xfrm>
-          <a:prstGeom prst="rect">
-            <a:avLst/>
-          </a:prstGeom>
-          <a:ln w="19050">
-            <a:solidFill>
-              <a:srgbClr val="F2F0EA"/>
-            </a:solidFill>
-            <a:prstDash val="solid"/>
-          </a:ln>
-        </p:spPr>
-      </p:sp>
-      <p:sp>
-        <p:nvSpPr>
-          <p:cNvPr id="7" name="Text 4"/>
-          <p:cNvSpPr/>
-          <p:nvPr/>
-        </p:nvSpPr>
-        <p:spPr>
-          <a:xfrm>
-            <a:off x="1188720" y="457200"/>
-            <a:ext cx="9448495" cy="292608"/>
-          </a:xfrm>
-          <a:prstGeom prst="rect">
-            <a:avLst/>
-          </a:prstGeom>
-          <a:noFill/>
-          <a:ln/>
-        </p:spPr>
-        <p:txBody>
-          <a:bodyPr wrap="square" lIns="0" tIns="0" rIns="0" bIns="0" rtlCol="0" anchor="ctr"/>
-          <a:lstStyle/>
-          <a:p>
-            <a:pPr indent="0" marL="0">
-              <a:buNone/>
-            </a:pPr>
-            <a:r>
-              <a:rPr lang="en-US" sz="1100" b="1" spc="250" kern="0" dirty="0">
-                <a:solidFill>
-                  <a:srgbClr val="A9A79F"/>
-                </a:solidFill>
-                <a:latin typeface="Arial" pitchFamily="34" charset="0"/>
-                <a:ea typeface="Arial" pitchFamily="34" charset="-122"/>
-                <a:cs typeface="Arial" pitchFamily="34" charset="-120"/>
-              </a:rPr>
-              <a:t>PAUSA: CARTÕES NO TELEMÓVEL</a:t>
-            </a:r>
-            <a:endParaRPr lang="en-US" sz="1100" dirty="0"/>
-          </a:p>
-        </p:txBody>
-      </p:sp>
-      <p:sp>
-        <p:nvSpPr>
-          <p:cNvPr id="8" name="Text 5"/>
-          <p:cNvSpPr/>
-          <p:nvPr/>
-        </p:nvSpPr>
-        <p:spPr>
-          <a:xfrm>
-            <a:off x="822960" y="868680"/>
-            <a:ext cx="7071055" cy="1188720"/>
-          </a:xfrm>
-          <a:prstGeom prst="rect">
-            <a:avLst/>
-          </a:prstGeom>
-          <a:noFill/>
-          <a:ln/>
-        </p:spPr>
-        <p:txBody>
-          <a:bodyPr wrap="square" lIns="0" tIns="0" rIns="0" bIns="0" rtlCol="0" anchor="b">
-            <a:normAutofit/>
-          </a:bodyPr>
-          <a:lstStyle/>
-          <a:p>
-            <a:pPr indent="0" marL="0">
-              <a:buNone/>
-            </a:pPr>
-            <a:r>
-              <a:rPr lang="en-US" sz="3800" dirty="0">
-                <a:solidFill>
-                  <a:srgbClr val="F2F0EA"/>
-                </a:solidFill>
-                <a:latin typeface="Arial" pitchFamily="34" charset="0"/>
-                <a:ea typeface="Arial" pitchFamily="34" charset="-122"/>
-                <a:cs typeface="Arial" pitchFamily="34" charset="-120"/>
-              </a:rPr>
-              <a:t>Três minutos, com placar</a:t>
-            </a:r>
-            <a:endParaRPr lang="en-US" sz="3800" dirty="0"/>
-          </a:p>
-        </p:txBody>
-      </p:sp>
-      <p:sp>
-        <p:nvSpPr>
-          <p:cNvPr id="9" name="Shape 6"/>
-          <p:cNvSpPr/>
-          <p:nvPr/>
-        </p:nvSpPr>
-        <p:spPr>
-          <a:xfrm>
-            <a:off x="822960" y="2121408"/>
-            <a:ext cx="640080" cy="64008"/>
-          </a:xfrm>
-          <a:prstGeom prst="rect">
-            <a:avLst/>
-          </a:prstGeom>
-          <a:solidFill>
-            <a:srgbClr val="E4555C"/>
-          </a:solidFill>
-          <a:ln w="12700">
-            <a:solidFill>
-              <a:srgbClr val="E4555C"/>
-            </a:solidFill>
-            <a:prstDash val="solid"/>
-          </a:ln>
-        </p:spPr>
-      </p:sp>
-      <p:sp>
-        <p:nvSpPr>
-          <p:cNvPr id="10" name="Shape 7"/>
-          <p:cNvSpPr/>
-          <p:nvPr/>
-        </p:nvSpPr>
-        <p:spPr>
-          <a:xfrm>
-            <a:off x="1005840" y="2606040"/>
-            <a:ext cx="0" cy="1424940"/>
-          </a:xfrm>
-          <a:prstGeom prst="line">
-            <a:avLst/>
-          </a:prstGeom>
-          <a:noFill/>
-          <a:ln w="12700">
-            <a:solidFill>
-              <a:srgbClr val="A9A79F"/>
-            </a:solidFill>
-            <a:prstDash val="solid"/>
-          </a:ln>
-        </p:spPr>
-      </p:sp>
-      <p:sp>
-        <p:nvSpPr>
-          <p:cNvPr id="11" name="Shape 8"/>
-          <p:cNvSpPr/>
-          <p:nvPr/>
-        </p:nvSpPr>
-        <p:spPr>
-          <a:xfrm>
-            <a:off x="822960" y="2423160"/>
-            <a:ext cx="365760" cy="365760"/>
-          </a:xfrm>
-          <a:prstGeom prst="ellipse">
-            <a:avLst/>
-          </a:prstGeom>
-          <a:solidFill>
-            <a:srgbClr val="111111"/>
-          </a:solidFill>
-          <a:ln w="15875">
-            <a:solidFill>
-              <a:srgbClr val="F2F0EA"/>
-            </a:solidFill>
-            <a:prstDash val="solid"/>
-          </a:ln>
-        </p:spPr>
-      </p:sp>
-      <p:sp>
-        <p:nvSpPr>
-          <p:cNvPr id="12" name="Text 9"/>
-          <p:cNvSpPr/>
-          <p:nvPr/>
-        </p:nvSpPr>
-        <p:spPr>
-          <a:xfrm>
-            <a:off x="822960" y="2423160"/>
-            <a:ext cx="365760" cy="365760"/>
-          </a:xfrm>
-          <a:prstGeom prst="rect">
-            <a:avLst/>
-          </a:prstGeom>
-          <a:noFill/>
-          <a:ln/>
-        </p:spPr>
-        <p:txBody>
-          <a:bodyPr wrap="square" lIns="0" tIns="0" rIns="0" bIns="0" rtlCol="0" anchor="ctr"/>
-          <a:lstStyle/>
-          <a:p>
-            <a:pPr algn="ctr" indent="0" marL="0">
-              <a:buNone/>
-            </a:pPr>
-            <a:r>
-              <a:rPr lang="en-US" sz="1300" b="1" dirty="0">
-                <a:solidFill>
-                  <a:srgbClr val="F2F0EA"/>
-                </a:solidFill>
-                <a:latin typeface="Arial" pitchFamily="34" charset="0"/>
-                <a:ea typeface="Arial" pitchFamily="34" charset="-122"/>
-                <a:cs typeface="Arial" pitchFamily="34" charset="-120"/>
-              </a:rPr>
-              <a:t>1</a:t>
-            </a:r>
-            <a:endParaRPr lang="en-US" sz="1300" dirty="0"/>
-          </a:p>
-        </p:txBody>
-      </p:sp>
-      <p:sp>
-        <p:nvSpPr>
-          <p:cNvPr id="13" name="Text 10"/>
-          <p:cNvSpPr/>
-          <p:nvPr/>
-        </p:nvSpPr>
-        <p:spPr>
-          <a:xfrm>
-            <a:off x="1417320" y="2432304"/>
-            <a:ext cx="6430975" cy="882904"/>
-          </a:xfrm>
-          <a:prstGeom prst="rect">
-            <a:avLst/>
-          </a:prstGeom>
-          <a:noFill/>
-          <a:ln/>
-        </p:spPr>
-        <p:txBody>
-          <a:bodyPr wrap="square" lIns="0" tIns="0" rIns="0" bIns="0" rtlCol="0" anchor="t">
-            <a:normAutofit/>
-          </a:bodyPr>
-          <a:lstStyle/>
-          <a:p>
-            <a:pPr indent="0" marL="0">
-              <a:lnSpc>
-                <a:spcPct val="105000"/>
-              </a:lnSpc>
-              <a:buNone/>
-            </a:pPr>
-            <a:r>
-              <a:rPr lang="en-US" sz="2200" dirty="0">
-                <a:solidFill>
-                  <a:srgbClr val="F2F0EA"/>
-                </a:solidFill>
-                <a:latin typeface="Arial" pitchFamily="34" charset="0"/>
-                <a:ea typeface="Arial" pitchFamily="34" charset="-122"/>
-                <a:cs typeface="Arial" pitchFamily="34" charset="-120"/>
-              </a:rPr>
-              <a:t>Na lição, toca em «Sala» e escreve o código do ecrã e uma alcunha</a:t>
-            </a:r>
-            <a:endParaRPr lang="en-US" sz="2200" dirty="0"/>
-          </a:p>
-        </p:txBody>
-      </p:sp>
-      <p:sp>
-        <p:nvSpPr>
-          <p:cNvPr id="14" name="Shape 11"/>
-          <p:cNvSpPr/>
-          <p:nvPr/>
-        </p:nvSpPr>
-        <p:spPr>
-          <a:xfrm>
-            <a:off x="822960" y="3306064"/>
-            <a:ext cx="365760" cy="365760"/>
-          </a:xfrm>
-          <a:prstGeom prst="ellipse">
-            <a:avLst/>
-          </a:prstGeom>
-          <a:solidFill>
-            <a:srgbClr val="111111"/>
-          </a:solidFill>
-          <a:ln w="15875">
-            <a:solidFill>
-              <a:srgbClr val="F2F0EA"/>
-            </a:solidFill>
-            <a:prstDash val="solid"/>
-          </a:ln>
-        </p:spPr>
-      </p:sp>
-      <p:sp>
-        <p:nvSpPr>
-          <p:cNvPr id="15" name="Text 12"/>
-          <p:cNvSpPr/>
-          <p:nvPr/>
-        </p:nvSpPr>
-        <p:spPr>
-          <a:xfrm>
-            <a:off x="822960" y="3306064"/>
-            <a:ext cx="365760" cy="365760"/>
-          </a:xfrm>
-          <a:prstGeom prst="rect">
-            <a:avLst/>
-          </a:prstGeom>
-          <a:noFill/>
-          <a:ln/>
-        </p:spPr>
-        <p:txBody>
-          <a:bodyPr wrap="square" lIns="0" tIns="0" rIns="0" bIns="0" rtlCol="0" anchor="ctr"/>
-          <a:lstStyle/>
-          <a:p>
-            <a:pPr algn="ctr" indent="0" marL="0">
-              <a:buNone/>
-            </a:pPr>
-            <a:r>
-              <a:rPr lang="en-US" sz="1300" b="1" dirty="0">
-                <a:solidFill>
-                  <a:srgbClr val="F2F0EA"/>
-                </a:solidFill>
-                <a:latin typeface="Arial" pitchFamily="34" charset="0"/>
-                <a:ea typeface="Arial" pitchFamily="34" charset="-122"/>
-                <a:cs typeface="Arial" pitchFamily="34" charset="-120"/>
-              </a:rPr>
-              <a:t>2</a:t>
-            </a:r>
-            <a:endParaRPr lang="en-US" sz="1300" dirty="0"/>
-          </a:p>
-        </p:txBody>
-      </p:sp>
-      <p:sp>
-        <p:nvSpPr>
-          <p:cNvPr id="16" name="Text 13"/>
-          <p:cNvSpPr/>
-          <p:nvPr/>
-        </p:nvSpPr>
-        <p:spPr>
-          <a:xfrm>
-            <a:off x="1417320" y="3315208"/>
-            <a:ext cx="6430975" cy="542036"/>
-          </a:xfrm>
-          <a:prstGeom prst="rect">
-            <a:avLst/>
-          </a:prstGeom>
-          <a:noFill/>
-          <a:ln/>
-        </p:spPr>
-        <p:txBody>
-          <a:bodyPr wrap="square" lIns="0" tIns="0" rIns="0" bIns="0" rtlCol="0" anchor="t">
-            <a:normAutofit/>
-          </a:bodyPr>
-          <a:lstStyle/>
-          <a:p>
-            <a:pPr indent="0" marL="0">
-              <a:lnSpc>
-                <a:spcPct val="105000"/>
-              </a:lnSpc>
-              <a:buNone/>
-            </a:pPr>
-            <a:r>
-              <a:rPr lang="en-US" sz="2200" dirty="0">
-                <a:solidFill>
-                  <a:srgbClr val="F2F0EA"/>
-                </a:solidFill>
-                <a:latin typeface="Arial" pitchFamily="34" charset="0"/>
-                <a:ea typeface="Arial" pitchFamily="34" charset="-122"/>
-                <a:cs typeface="Arial" pitchFamily="34" charset="-120"/>
-              </a:rPr>
-              <a:t>Faz os cartões que o ecrã indica</a:t>
-            </a:r>
-            <a:endParaRPr lang="en-US" sz="2200" dirty="0"/>
-          </a:p>
-        </p:txBody>
-      </p:sp>
-      <p:sp>
-        <p:nvSpPr>
-          <p:cNvPr id="17" name="Shape 14"/>
-          <p:cNvSpPr/>
-          <p:nvPr/>
-        </p:nvSpPr>
-        <p:spPr>
-          <a:xfrm>
-            <a:off x="822960" y="3848100"/>
-            <a:ext cx="365760" cy="365760"/>
-          </a:xfrm>
-          <a:prstGeom prst="ellipse">
-            <a:avLst/>
-          </a:prstGeom>
-          <a:solidFill>
-            <a:srgbClr val="111111"/>
-          </a:solidFill>
-          <a:ln w="15875">
-            <a:solidFill>
-              <a:srgbClr val="F2F0EA"/>
-            </a:solidFill>
-            <a:prstDash val="solid"/>
-          </a:ln>
-        </p:spPr>
-      </p:sp>
-      <p:sp>
-        <p:nvSpPr>
-          <p:cNvPr id="18" name="Text 15"/>
-          <p:cNvSpPr/>
-          <p:nvPr/>
-        </p:nvSpPr>
-        <p:spPr>
-          <a:xfrm>
-            <a:off x="822960" y="3848100"/>
-            <a:ext cx="365760" cy="365760"/>
-          </a:xfrm>
-          <a:prstGeom prst="rect">
-            <a:avLst/>
-          </a:prstGeom>
-          <a:noFill/>
-          <a:ln/>
-        </p:spPr>
-        <p:txBody>
-          <a:bodyPr wrap="square" lIns="0" tIns="0" rIns="0" bIns="0" rtlCol="0" anchor="ctr"/>
-          <a:lstStyle/>
-          <a:p>
-            <a:pPr algn="ctr" indent="0" marL="0">
-              <a:buNone/>
-            </a:pPr>
-            <a:r>
-              <a:rPr lang="en-US" sz="1300" b="1" dirty="0">
-                <a:solidFill>
-                  <a:srgbClr val="F2F0EA"/>
-                </a:solidFill>
-                <a:latin typeface="Arial" pitchFamily="34" charset="0"/>
-                <a:ea typeface="Arial" pitchFamily="34" charset="-122"/>
-                <a:cs typeface="Arial" pitchFamily="34" charset="-120"/>
-              </a:rPr>
-              <a:t>3</a:t>
-            </a:r>
-            <a:endParaRPr lang="en-US" sz="1300" dirty="0"/>
-          </a:p>
-        </p:txBody>
-      </p:sp>
-      <p:sp>
-        <p:nvSpPr>
-          <p:cNvPr id="19" name="Text 16"/>
-          <p:cNvSpPr/>
-          <p:nvPr/>
-        </p:nvSpPr>
-        <p:spPr>
-          <a:xfrm>
-            <a:off x="1417320" y="3857244"/>
-            <a:ext cx="6430975" cy="542036"/>
-          </a:xfrm>
-          <a:prstGeom prst="rect">
-            <a:avLst/>
-          </a:prstGeom>
-          <a:noFill/>
-          <a:ln/>
-        </p:spPr>
-        <p:txBody>
-          <a:bodyPr wrap="square" lIns="0" tIns="0" rIns="0" bIns="0" rtlCol="0" anchor="t">
-            <a:normAutofit/>
-          </a:bodyPr>
-          <a:lstStyle/>
-          <a:p>
-            <a:pPr indent="0" marL="0">
-              <a:lnSpc>
-                <a:spcPct val="105000"/>
-              </a:lnSpc>
-              <a:buNone/>
-            </a:pPr>
-            <a:r>
-              <a:rPr lang="en-US" sz="2200" dirty="0">
-                <a:solidFill>
-                  <a:srgbClr val="F2F0EA"/>
-                </a:solidFill>
-                <a:latin typeface="Arial" pitchFamily="34" charset="0"/>
-                <a:ea typeface="Arial" pitchFamily="34" charset="-122"/>
-                <a:cs typeface="Arial" pitchFamily="34" charset="-120"/>
-              </a:rPr>
-              <a:t>Quando acabares, olha para o placar</a:t>
-            </a:r>
-            <a:endParaRPr lang="en-US" sz="2200" dirty="0"/>
-          </a:p>
-        </p:txBody>
-      </p:sp>
-      <p:sp>
-        <p:nvSpPr>
-          <p:cNvPr id="20" name="Shape 17"/>
-          <p:cNvSpPr/>
-          <p:nvPr/>
-        </p:nvSpPr>
-        <p:spPr>
-          <a:xfrm>
-            <a:off x="8332927" y="1033272"/>
-            <a:ext cx="3145536" cy="3145536"/>
-          </a:xfrm>
-          <a:prstGeom prst="rect">
-            <a:avLst/>
-          </a:prstGeom>
-          <a:solidFill>
-            <a:srgbClr val="FFFFFF"/>
-          </a:solidFill>
-          <a:ln w="12700">
-            <a:solidFill>
-              <a:srgbClr val="F2F0EA"/>
-            </a:solidFill>
-            <a:prstDash val="solid"/>
-          </a:ln>
-        </p:spPr>
-      </p:sp>
-      <p:pic>
-        <p:nvPicPr>
-          <p:cNvPr id="21" name="Image 0" descr="/home/user/epi-portugues-fontes/_interno/biblioteca-imagens/qr/licao-m9-f05.png">    </p:cNvPr>
-          <p:cNvPicPr>
-            <a:picLocks noChangeAspect="1"/>
-          </p:cNvPicPr>
-          <p:nvPr/>
-        </p:nvPicPr>
-        <p:blipFill>
-          <a:blip r:embed="rId1"/>
-          <a:stretch>
-            <a:fillRect/>
-          </a:stretch>
-        </p:blipFill>
-        <p:spPr>
-          <a:xfrm>
-            <a:off x="8442655" y="1143000"/>
-            <a:ext cx="2926080" cy="2926080"/>
-          </a:xfrm>
-          <a:prstGeom prst="rect">
-            <a:avLst/>
-          </a:prstGeom>
-        </p:spPr>
-      </p:pic>
-      <p:sp>
-        <p:nvSpPr>
-          <p:cNvPr id="22" name="Text 18"/>
-          <p:cNvSpPr/>
-          <p:nvPr/>
-        </p:nvSpPr>
-        <p:spPr>
-          <a:xfrm>
-            <a:off x="8332927" y="4343400"/>
-            <a:ext cx="3145536" cy="640080"/>
-          </a:xfrm>
-          <a:prstGeom prst="rect">
-            <a:avLst/>
-          </a:prstGeom>
-          <a:noFill/>
-          <a:ln/>
-        </p:spPr>
-        <p:txBody>
-          <a:bodyPr wrap="square" lIns="0" tIns="0" rIns="0" bIns="0" rtlCol="0" anchor="t">
-            <a:normAutofit/>
-          </a:bodyPr>
-          <a:lstStyle/>
-          <a:p>
-            <a:pPr algn="ctr" indent="0" marL="0">
-              <a:buNone/>
-            </a:pPr>
-            <a:r>
-              <a:rPr lang="en-US" sz="1200" dirty="0">
-                <a:solidFill>
-                  <a:srgbClr val="F2F0EA"/>
-                </a:solidFill>
-                <a:latin typeface="Arial" pitchFamily="34" charset="0"/>
-                <a:ea typeface="Arial" pitchFamily="34" charset="-122"/>
-                <a:cs typeface="Arial" pitchFamily="34" charset="-120"/>
-              </a:rPr>
-              <a:t>pedrohfernandes-klk.github.io/​pt/​m9/​licao-m9-f05/​</a:t>
-            </a:r>
-            <a:endParaRPr lang="en-US" sz="1200" dirty="0"/>
-          </a:p>
-        </p:txBody>
-      </p:sp>
-    </p:spTree>
-  </p:cSld>
-  <p:clrMapOvr>
-    <a:masterClrMapping/>
-  </p:clrMapOvr>
-</p:sld>
-</file>
-
 <file path=ppt/slides/slide9.xml><?xml version="1.0" encoding="utf-8"?>
 <p:sld xmlns:a="http://schemas.openxmlformats.org/drawingml/2006/main" xmlns:r="http://schemas.openxmlformats.org/officeDocument/2006/relationships" xmlns:p="http://schemas.openxmlformats.org/presentationml/2006/main">
   <p:cSld name="Slide 9">
@@ -6309,7 +6640,7 @@
             <a:off x="822960" y="502920"/>
             <a:ext cx="201168" cy="201168"/>
           </a:xfrm>
-          <a:prstGeom prst="triangle">
+          <a:prstGeom prst="rect">
             <a:avLst/>
           </a:prstGeom>
           <a:ln w="19050">
@@ -6353,7 +6684,7 @@
                 <a:ea typeface="Arial" pitchFamily="34" charset="-122"/>
                 <a:cs typeface="Arial" pitchFamily="34" charset="-120"/>
               </a:rPr>
-              <a:t>SÍNTESE</a:t>
+              <a:t>AGORA NO TELEMÓVEL, QUINZE MINUTOS</a:t>
             </a:r>
             <a:endParaRPr lang="en-US" sz="1100" dirty="0"/>
           </a:p>
@@ -6368,7 +6699,7 @@
         <p:spPr>
           <a:xfrm>
             <a:off x="822960" y="868680"/>
-            <a:ext cx="9814255" cy="822960"/>
+            <a:ext cx="7071055" cy="1188720"/>
           </a:xfrm>
           <a:prstGeom prst="rect">
             <a:avLst/>
@@ -6386,7 +6717,7 @@
               <a:buNone/>
             </a:pPr>
             <a:r>
-              <a:rPr lang="en-US" sz="3400" dirty="0">
+              <a:rPr lang="en-US" sz="3800" dirty="0">
                 <a:solidFill>
                   <a:srgbClr val="F2F0EA"/>
                 </a:solidFill>
@@ -6394,9 +6725,9 @@
                 <a:ea typeface="Arial" pitchFamily="34" charset="-122"/>
                 <a:cs typeface="Arial" pitchFamily="34" charset="-120"/>
               </a:rPr>
-              <a:t>Para fixar</a:t>
-            </a:r>
-            <a:endParaRPr lang="en-US" sz="3400" dirty="0"/>
+              <a:t>Abre a lição no telemóvel</a:t>
+            </a:r>
+            <a:endParaRPr lang="en-US" sz="3800" dirty="0"/>
           </a:p>
         </p:txBody>
       </p:sp>
@@ -6408,7 +6739,7 @@
         </p:nvSpPr>
         <p:spPr>
           <a:xfrm>
-            <a:off x="822960" y="1746504"/>
+            <a:off x="822960" y="2121408"/>
             <a:ext cx="640080" cy="64008"/>
           </a:xfrm>
           <a:prstGeom prst="rect">
@@ -6433,8 +6764,8 @@
         </p:nvSpPr>
         <p:spPr>
           <a:xfrm>
-            <a:off x="1005840" y="2286000"/>
-            <a:ext cx="0" cy="2106676"/>
+            <a:off x="1005840" y="2606040"/>
+            <a:ext cx="0" cy="1765808"/>
           </a:xfrm>
           <a:prstGeom prst="line">
             <a:avLst/>
@@ -6456,7 +6787,7 @@
         </p:nvSpPr>
         <p:spPr>
           <a:xfrm>
-            <a:off x="822960" y="2103120"/>
+            <a:off x="822960" y="2423160"/>
             <a:ext cx="365760" cy="365760"/>
           </a:xfrm>
           <a:prstGeom prst="ellipse">
@@ -6481,7 +6812,7 @@
         </p:nvSpPr>
         <p:spPr>
           <a:xfrm>
-            <a:off x="822960" y="2103120"/>
+            <a:off x="822960" y="2423160"/>
             <a:ext cx="365760" cy="365760"/>
           </a:xfrm>
           <a:prstGeom prst="rect">
@@ -6520,8 +6851,8 @@
         </p:nvSpPr>
         <p:spPr>
           <a:xfrm>
-            <a:off x="1417320" y="2112264"/>
-            <a:ext cx="9174175" cy="1223772"/>
+            <a:off x="1417320" y="2432304"/>
+            <a:ext cx="6430975" cy="882904"/>
           </a:xfrm>
           <a:prstGeom prst="rect">
             <a:avLst/>
@@ -6550,7 +6881,7 @@
                 <a:ea typeface="Arial" pitchFamily="34" charset="-122"/>
                 <a:cs typeface="Arial" pitchFamily="34" charset="-120"/>
               </a:rPr>
-              <a:t>Os itens seguiram a grande pedra de Pêro Pinheiro a Mafra: um homem morre e fica em Cheleiros, os companheiros velam-no e o narrador diz-lhes os nomes, um a um.</a:t>
+              <a:t>Lê e responde aos cartões, um de cada vez</a:t>
             </a:r>
             <a:endParaRPr lang="en-US" sz="2200" dirty="0"/>
           </a:p>
@@ -6564,7 +6895,7 @@
         </p:nvSpPr>
         <p:spPr>
           <a:xfrm>
-            <a:off x="822960" y="3326892"/>
+            <a:off x="822960" y="3306064"/>
             <a:ext cx="365760" cy="365760"/>
           </a:xfrm>
           <a:prstGeom prst="ellipse">
@@ -6589,7 +6920,7 @@
         </p:nvSpPr>
         <p:spPr>
           <a:xfrm>
-            <a:off x="822960" y="3326892"/>
+            <a:off x="822960" y="3306064"/>
             <a:ext cx="365760" cy="365760"/>
           </a:xfrm>
           <a:prstGeom prst="rect">
@@ -6628,8 +6959,8 @@
         </p:nvSpPr>
         <p:spPr>
           <a:xfrm>
-            <a:off x="1417320" y="3336036"/>
-            <a:ext cx="9174175" cy="882904"/>
+            <a:off x="1417320" y="3315208"/>
+            <a:ext cx="6430975" cy="882904"/>
           </a:xfrm>
           <a:prstGeom prst="rect">
             <a:avLst/>
@@ -6658,7 +6989,7 @@
                 <a:ea typeface="Arial" pitchFamily="34" charset="-122"/>
                 <a:cs typeface="Arial" pitchFamily="34" charset="-120"/>
               </a:rPr>
-              <a:t>D. Maria Bárbara vê da estrada homens atados por cordas e esquece-os logo: o romance lembra quem o poder não vê.</a:t>
+              <a:t>No fim, o cartão extra: «Da promessa à pedra»</a:t>
             </a:r>
             <a:endParaRPr lang="en-US" sz="2200" dirty="0"/>
           </a:p>
@@ -6672,7 +7003,7 @@
         </p:nvSpPr>
         <p:spPr>
           <a:xfrm>
-            <a:off x="822960" y="4209796"/>
+            <a:off x="822960" y="4188968"/>
             <a:ext cx="365760" cy="365760"/>
           </a:xfrm>
           <a:prstGeom prst="ellipse">
@@ -6697,7 +7028,7 @@
         </p:nvSpPr>
         <p:spPr>
           <a:xfrm>
-            <a:off x="822960" y="4209796"/>
+            <a:off x="822960" y="4188968"/>
             <a:ext cx="365760" cy="365760"/>
           </a:xfrm>
           <a:prstGeom prst="rect">
@@ -6736,8 +7067,8 @@
         </p:nvSpPr>
         <p:spPr>
           <a:xfrm>
-            <a:off x="1417320" y="4218940"/>
-            <a:ext cx="9174175" cy="1564640"/>
+            <a:off x="1417320" y="4198112"/>
+            <a:ext cx="6430975" cy="542036"/>
           </a:xfrm>
           <a:prstGeom prst="rect">
             <a:avLst/>
@@ -6766,9 +7097,99 @@
                 <a:ea typeface="Arial" pitchFamily="34" charset="-122"/>
                 <a:cs typeface="Arial" pitchFamily="34" charset="-120"/>
               </a:rPr>
-              <a:t>No processo, as citações escolhem-se antes de produzir e o protótipo passa pela crítica de outro grupo; a memória descritiva é tua e diz que decisão do grupo defendeste ou contrariaste.</a:t>
+              <a:t>O percurso marca a lição como feita</a:t>
             </a:r>
             <a:endParaRPr lang="en-US" sz="2200" dirty="0"/>
+          </a:p>
+        </p:txBody>
+      </p:sp>
+      <p:sp>
+        <p:nvSpPr>
+          <p:cNvPr id="20" name="Shape 17"/>
+          <p:cNvSpPr/>
+          <p:nvPr/>
+        </p:nvSpPr>
+        <p:spPr>
+          <a:xfrm>
+            <a:off x="8332927" y="1033272"/>
+            <a:ext cx="3145536" cy="3145536"/>
+          </a:xfrm>
+          <a:prstGeom prst="rect">
+            <a:avLst/>
+          </a:prstGeom>
+          <a:solidFill>
+            <a:srgbClr val="FFFFFF"/>
+          </a:solidFill>
+          <a:ln w="12700">
+            <a:solidFill>
+              <a:srgbClr val="F2F0EA"/>
+            </a:solidFill>
+            <a:prstDash val="solid"/>
+          </a:ln>
+        </p:spPr>
+      </p:sp>
+      <p:pic>
+        <p:nvPicPr>
+          <p:cNvPr id="21" name="Image 0" descr="/home/user/epi-portugues-fontes/_interno/biblioteca-imagens/qr/licao-m9-f05.png">    </p:cNvPr>
+          <p:cNvPicPr>
+            <a:picLocks noChangeAspect="1"/>
+          </p:cNvPicPr>
+          <p:nvPr/>
+        </p:nvPicPr>
+        <p:blipFill>
+          <a:blip r:embed="rId1"/>
+          <a:stretch>
+            <a:fillRect/>
+          </a:stretch>
+        </p:blipFill>
+        <p:spPr>
+          <a:xfrm>
+            <a:off x="8442655" y="1143000"/>
+            <a:ext cx="2926080" cy="2926080"/>
+          </a:xfrm>
+          <a:prstGeom prst="rect">
+            <a:avLst/>
+          </a:prstGeom>
+        </p:spPr>
+      </p:pic>
+      <p:sp>
+        <p:nvSpPr>
+          <p:cNvPr id="22" name="Text 18"/>
+          <p:cNvSpPr/>
+          <p:nvPr/>
+        </p:nvSpPr>
+        <p:spPr>
+          <a:xfrm>
+            <a:off x="8332927" y="4343400"/>
+            <a:ext cx="3145536" cy="640080"/>
+          </a:xfrm>
+          <a:prstGeom prst="rect">
+            <a:avLst/>
+          </a:prstGeom>
+          <a:noFill/>
+          <a:ln/>
+        </p:spPr>
+        <p:txBody>
+          <a:bodyPr wrap="square" lIns="0" tIns="0" rIns="0" bIns="0" rtlCol="0" anchor="t">
+            <a:normAutofit/>
+          </a:bodyPr>
+          <a:lstStyle/>
+          <a:p>
+            <a:pPr algn="ctr" indent="0" marL="0">
+              <a:buNone/>
+            </a:pPr>
+            <a:r>
+              <a:rPr lang="en-US" sz="1200" dirty="0">
+                <a:solidFill>
+                  <a:srgbClr val="F2F0EA"/>
+                </a:solidFill>
+                <a:latin typeface="Arial" pitchFamily="34" charset="0"/>
+                <a:ea typeface="Arial" pitchFamily="34" charset="-122"/>
+                <a:cs typeface="Arial" pitchFamily="34" charset="-120"/>
+              </a:rPr>
+              <a:t>pedrohfernandes-klk.github.io/​pt/​m9/​licao-m9-f05/​</a:t>
+            </a:r>
+            <a:endParaRPr lang="en-US" sz="1200" dirty="0"/>
           </a:p>
         </p:txBody>
       </p:sp>

--- a/m9/diapositivos/sessao-06-m9-f05.pptx
+++ b/m9/diapositivos/sessao-06-m9-f05.pptx
@@ -3956,7 +3956,35 @@
                 <a:ea typeface="Arial" pitchFamily="34" charset="-122"/>
                 <a:cs typeface="Arial" pitchFamily="34" charset="-120"/>
               </a:rPr>
-              <a:t>José Saramago, Memorial do Convento (1982), a viagem da pedra para Mafra (excerto). Excerto para estudo.</a:t>
+              <a:t>José Saramago, </a:t>
+            </a:r>
+            <a:pPr indent="0" marL="0">
+              <a:buNone/>
+            </a:pPr>
+            <a:r>
+              <a:rPr lang="en-US" sz="1200" i="1" dirty="0">
+                <a:solidFill>
+                  <a:srgbClr val="A9A79F"/>
+                </a:solidFill>
+                <a:latin typeface="Arial" pitchFamily="34" charset="0"/>
+                <a:ea typeface="Arial" pitchFamily="34" charset="-122"/>
+                <a:cs typeface="Arial" pitchFamily="34" charset="-120"/>
+              </a:rPr>
+              <a:t>Memorial do Convento</a:t>
+            </a:r>
+            <a:pPr indent="0" marL="0">
+              <a:buNone/>
+            </a:pPr>
+            <a:r>
+              <a:rPr lang="en-US" sz="1200" dirty="0">
+                <a:solidFill>
+                  <a:srgbClr val="A9A79F"/>
+                </a:solidFill>
+                <a:latin typeface="Arial" pitchFamily="34" charset="0"/>
+                <a:ea typeface="Arial" pitchFamily="34" charset="-122"/>
+                <a:cs typeface="Arial" pitchFamily="34" charset="-120"/>
+              </a:rPr>
+              <a:t> (1982), a viagem da pedra para Mafra (excerto). Excerto para estudo.</a:t>
             </a:r>
             <a:endParaRPr lang="en-US" sz="1200" dirty="0"/>
           </a:p>
@@ -4276,7 +4304,35 @@
                 <a:ea typeface="Arial" pitchFamily="34" charset="-122"/>
                 <a:cs typeface="Arial" pitchFamily="34" charset="-120"/>
               </a:rPr>
-              <a:t>José Saramago, Memorial do Convento (1982), a viagem da pedra para Mafra (excerto). Excerto para estudo.</a:t>
+              <a:t>José Saramago, </a:t>
+            </a:r>
+            <a:pPr indent="0" marL="0">
+              <a:buNone/>
+            </a:pPr>
+            <a:r>
+              <a:rPr lang="en-US" sz="1200" i="1" dirty="0">
+                <a:solidFill>
+                  <a:srgbClr val="A9A79F"/>
+                </a:solidFill>
+                <a:latin typeface="Arial" pitchFamily="34" charset="0"/>
+                <a:ea typeface="Arial" pitchFamily="34" charset="-122"/>
+                <a:cs typeface="Arial" pitchFamily="34" charset="-120"/>
+              </a:rPr>
+              <a:t>Memorial do Convento</a:t>
+            </a:r>
+            <a:pPr indent="0" marL="0">
+              <a:buNone/>
+            </a:pPr>
+            <a:r>
+              <a:rPr lang="en-US" sz="1200" dirty="0">
+                <a:solidFill>
+                  <a:srgbClr val="A9A79F"/>
+                </a:solidFill>
+                <a:latin typeface="Arial" pitchFamily="34" charset="0"/>
+                <a:ea typeface="Arial" pitchFamily="34" charset="-122"/>
+                <a:cs typeface="Arial" pitchFamily="34" charset="-120"/>
+              </a:rPr>
+              <a:t> (1982), a viagem da pedra para Mafra (excerto). Excerto para estudo.</a:t>
             </a:r>
             <a:endParaRPr lang="en-US" sz="1200" dirty="0"/>
           </a:p>
@@ -4596,7 +4652,35 @@
                 <a:ea typeface="Arial" pitchFamily="34" charset="-122"/>
                 <a:cs typeface="Arial" pitchFamily="34" charset="-120"/>
               </a:rPr>
-              <a:t>José Saramago, Memorial do Convento (1982). grafia da edição. Excerto para estudo.</a:t>
+              <a:t>José Saramago, </a:t>
+            </a:r>
+            <a:pPr indent="0" marL="0">
+              <a:buNone/>
+            </a:pPr>
+            <a:r>
+              <a:rPr lang="en-US" sz="1200" i="1" dirty="0">
+                <a:solidFill>
+                  <a:srgbClr val="A9A79F"/>
+                </a:solidFill>
+                <a:latin typeface="Arial" pitchFamily="34" charset="0"/>
+                <a:ea typeface="Arial" pitchFamily="34" charset="-122"/>
+                <a:cs typeface="Arial" pitchFamily="34" charset="-120"/>
+              </a:rPr>
+              <a:t>Memorial do Convento</a:t>
+            </a:r>
+            <a:pPr indent="0" marL="0">
+              <a:buNone/>
+            </a:pPr>
+            <a:r>
+              <a:rPr lang="en-US" sz="1200" dirty="0">
+                <a:solidFill>
+                  <a:srgbClr val="A9A79F"/>
+                </a:solidFill>
+                <a:latin typeface="Arial" pitchFamily="34" charset="0"/>
+                <a:ea typeface="Arial" pitchFamily="34" charset="-122"/>
+                <a:cs typeface="Arial" pitchFamily="34" charset="-120"/>
+              </a:rPr>
+              <a:t> (1982). grafia da edição. Excerto para estudo.</a:t>
             </a:r>
             <a:endParaRPr lang="en-US" sz="1200" dirty="0"/>
           </a:p>
@@ -4936,7 +5020,35 @@
                 <a:ea typeface="Arial" pitchFamily="34" charset="-122"/>
                 <a:cs typeface="Arial" pitchFamily="34" charset="-120"/>
               </a:rPr>
-              <a:t>José Saramago, Memorial do Convento (1982). grafia da edição. Excerto para estudo.</a:t>
+              <a:t>José Saramago, </a:t>
+            </a:r>
+            <a:pPr indent="0" marL="0">
+              <a:buNone/>
+            </a:pPr>
+            <a:r>
+              <a:rPr lang="en-US" sz="1200" i="1" dirty="0">
+                <a:solidFill>
+                  <a:srgbClr val="A9A79F"/>
+                </a:solidFill>
+                <a:latin typeface="Arial" pitchFamily="34" charset="0"/>
+                <a:ea typeface="Arial" pitchFamily="34" charset="-122"/>
+                <a:cs typeface="Arial" pitchFamily="34" charset="-120"/>
+              </a:rPr>
+              <a:t>Memorial do Convento</a:t>
+            </a:r>
+            <a:pPr indent="0" marL="0">
+              <a:buNone/>
+            </a:pPr>
+            <a:r>
+              <a:rPr lang="en-US" sz="1200" dirty="0">
+                <a:solidFill>
+                  <a:srgbClr val="A9A79F"/>
+                </a:solidFill>
+                <a:latin typeface="Arial" pitchFamily="34" charset="0"/>
+                <a:ea typeface="Arial" pitchFamily="34" charset="-122"/>
+                <a:cs typeface="Arial" pitchFamily="34" charset="-120"/>
+              </a:rPr>
+              <a:t> (1982). grafia da edição. Excerto para estudo.</a:t>
             </a:r>
             <a:endParaRPr lang="en-US" sz="1200" dirty="0"/>
           </a:p>
